--- a/extended-final-presentation.pptx
+++ b/extended-final-presentation.pptx
@@ -11492,13 +11492,12 @@
                 <a:tableStyleId>{5C22544A-7EE6-4342-B048-85BDC9FD1C3A}</a:tableStyleId>
               </a:tblPr>
               <a:tblGrid>
-                <a:gridCol w="650837"/>
-                <a:gridCol w="3037242"/>
-                <a:gridCol w="1410148"/>
-                <a:gridCol w="1627094"/>
-                <a:gridCol w="1410148"/>
-                <a:gridCol w="1410148"/>
-                <a:gridCol w="1518621"/>
+                <a:gridCol w="663854"/>
+                <a:gridCol w="3097987"/>
+                <a:gridCol w="1770278"/>
+                <a:gridCol w="1770278"/>
+                <a:gridCol w="1770278"/>
+                <a:gridCol w="1991563"/>
               </a:tblGrid>
               <a:tr h="420624">
                 <a:tc>
@@ -11583,29 +11582,6 @@
                           </a:solidFill>
                           <a:latin typeface="Helvetica Neue"/>
                         </a:rPr>
-                        <a:t>Robustness</a:t>
-                      </a:r>
-                    </a:p>
-                  </a:txBody>
-                  <a:tcPr marL="73152" marR="73152" marT="27432" marB="27432" anchor="ctr">
-                    <a:solidFill>
-                      <a:srgbClr val="0B0B0B"/>
-                    </a:solidFill>
-                  </a:tcPr>
-                </a:tc>
-                <a:tc>
-                  <a:txBody>
-                    <a:bodyPr/>
-                    <a:lstStyle/>
-                    <a:p>
-                      <a:pPr algn="ctr"/>
-                      <a:r>
-                        <a:rPr sz="1300" b="1">
-                          <a:solidFill>
-                            <a:srgbClr val="FFFFFF"/>
-                          </a:solidFill>
-                          <a:latin typeface="Helvetica Neue"/>
-                        </a:rPr>
                         <a:t>Efficiency</a:t>
                       </a:r>
                     </a:p>
@@ -11746,29 +11722,6 @@
                           </a:solidFill>
                           <a:latin typeface="Helvetica Neue"/>
                         </a:rPr>
-                        <a:t>n/a</a:t>
-                      </a:r>
-                    </a:p>
-                  </a:txBody>
-                  <a:tcPr marL="73152" marR="73152" marT="27432" marB="27432" anchor="ctr">
-                    <a:solidFill>
-                      <a:srgbClr val="FCFCFB"/>
-                    </a:solidFill>
-                  </a:tcPr>
-                </a:tc>
-                <a:tc>
-                  <a:txBody>
-                    <a:bodyPr/>
-                    <a:lstStyle/>
-                    <a:p>
-                      <a:pPr algn="ctr"/>
-                      <a:r>
-                        <a:rPr sz="1300" b="0">
-                          <a:solidFill>
-                            <a:srgbClr val="0B0B0B"/>
-                          </a:solidFill>
-                          <a:latin typeface="Helvetica Neue"/>
-                        </a:rPr>
                         <a:t>0.476</a:t>
                       </a:r>
                     </a:p>
@@ -11909,29 +11862,6 @@
                           </a:solidFill>
                           <a:latin typeface="Helvetica Neue"/>
                         </a:rPr>
-                        <a:t>n/a</a:t>
-                      </a:r>
-                    </a:p>
-                  </a:txBody>
-                  <a:tcPr marL="73152" marR="73152" marT="27432" marB="27432" anchor="ctr">
-                    <a:solidFill>
-                      <a:srgbClr val="FCFCFB"/>
-                    </a:solidFill>
-                  </a:tcPr>
-                </a:tc>
-                <a:tc>
-                  <a:txBody>
-                    <a:bodyPr/>
-                    <a:lstStyle/>
-                    <a:p>
-                      <a:pPr algn="ctr"/>
-                      <a:r>
-                        <a:rPr sz="1300" b="0">
-                          <a:solidFill>
-                            <a:srgbClr val="0B0B0B"/>
-                          </a:solidFill>
-                          <a:latin typeface="Helvetica Neue"/>
-                        </a:rPr>
                         <a:t>1.000</a:t>
                       </a:r>
                     </a:p>
@@ -12050,29 +11980,6 @@
                           <a:latin typeface="Helvetica Neue"/>
                         </a:rPr>
                         <a:t>0.604</a:t>
-                      </a:r>
-                    </a:p>
-                  </a:txBody>
-                  <a:tcPr marL="73152" marR="73152" marT="27432" marB="27432" anchor="ctr">
-                    <a:solidFill>
-                      <a:srgbClr val="FCFCFB"/>
-                    </a:solidFill>
-                  </a:tcPr>
-                </a:tc>
-                <a:tc>
-                  <a:txBody>
-                    <a:bodyPr/>
-                    <a:lstStyle/>
-                    <a:p>
-                      <a:pPr algn="ctr"/>
-                      <a:r>
-                        <a:rPr sz="1300" b="0">
-                          <a:solidFill>
-                            <a:srgbClr val="0B0B0B"/>
-                          </a:solidFill>
-                          <a:latin typeface="Helvetica Neue"/>
-                        </a:rPr>
-                        <a:t>n/a</a:t>
                       </a:r>
                     </a:p>
                   </a:txBody>
@@ -12190,7 +12097,7 @@
                 </a:solidFill>
                 <a:latin typeface="Helvetica Neue"/>
               </a:rPr>
-              <a:t>composite  =  0.50 · quality   +   0.15 · calibration   +   0.15 · robustness   +   0.10 · efficiency   +   0.10 · reliability</a:t>
+              <a:t>composite  =  0.714 · quality   +   0.143 · efficiency   +   0.143 · reliability</a:t>
             </a:r>
           </a:p>
         </p:txBody>
@@ -12229,7 +12136,7 @@
                 </a:solidFill>
                 <a:latin typeface="Helvetica Neue"/>
               </a:rPr>
-              <a:t>Calibration is absent because the routed providers returned no log-probabilities. Rather than scoring it zero, the weight is redistributed over the components that were measured, and each row records which those were.</a:t>
+              <a:t>Calibration and robustness could not be measured — the routed providers returned no log-probabilities and no robustness pass was run. Rather than scoring them zero, their weight is redistributed over the components that were measured, so the weights above are the applied ones, not the nominal 0.50/0.15/0.15/0.10/0.10.</a:t>
             </a:r>
           </a:p>
           <a:p>
@@ -14778,13 +14685,12 @@
                 <a:tableStyleId>{5C22544A-7EE6-4342-B048-85BDC9FD1C3A}</a:tableStyleId>
               </a:tblPr>
               <a:tblGrid>
-                <a:gridCol w="650837"/>
-                <a:gridCol w="3037242"/>
-                <a:gridCol w="1410148"/>
-                <a:gridCol w="1627094"/>
-                <a:gridCol w="1410148"/>
-                <a:gridCol w="1410148"/>
-                <a:gridCol w="1518621"/>
+                <a:gridCol w="663854"/>
+                <a:gridCol w="3097987"/>
+                <a:gridCol w="1770278"/>
+                <a:gridCol w="1770278"/>
+                <a:gridCol w="1770278"/>
+                <a:gridCol w="1991563"/>
               </a:tblGrid>
               <a:tr h="420624">
                 <a:tc>
@@ -14869,29 +14775,6 @@
                           </a:solidFill>
                           <a:latin typeface="Helvetica Neue"/>
                         </a:rPr>
-                        <a:t>Robustness</a:t>
-                      </a:r>
-                    </a:p>
-                  </a:txBody>
-                  <a:tcPr marL="73152" marR="73152" marT="27432" marB="27432" anchor="ctr">
-                    <a:solidFill>
-                      <a:srgbClr val="0B0B0B"/>
-                    </a:solidFill>
-                  </a:tcPr>
-                </a:tc>
-                <a:tc>
-                  <a:txBody>
-                    <a:bodyPr/>
-                    <a:lstStyle/>
-                    <a:p>
-                      <a:pPr algn="ctr"/>
-                      <a:r>
-                        <a:rPr sz="1300" b="1">
-                          <a:solidFill>
-                            <a:srgbClr val="FFFFFF"/>
-                          </a:solidFill>
-                          <a:latin typeface="Helvetica Neue"/>
-                        </a:rPr>
                         <a:t>Efficiency</a:t>
                       </a:r>
                     </a:p>
@@ -15032,29 +14915,6 @@
                           </a:solidFill>
                           <a:latin typeface="Helvetica Neue"/>
                         </a:rPr>
-                        <a:t>n/a</a:t>
-                      </a:r>
-                    </a:p>
-                  </a:txBody>
-                  <a:tcPr marL="73152" marR="73152" marT="27432" marB="27432" anchor="ctr">
-                    <a:solidFill>
-                      <a:srgbClr val="FCFCFB"/>
-                    </a:solidFill>
-                  </a:tcPr>
-                </a:tc>
-                <a:tc>
-                  <a:txBody>
-                    <a:bodyPr/>
-                    <a:lstStyle/>
-                    <a:p>
-                      <a:pPr algn="ctr"/>
-                      <a:r>
-                        <a:rPr sz="1300" b="0">
-                          <a:solidFill>
-                            <a:srgbClr val="0B0B0B"/>
-                          </a:solidFill>
-                          <a:latin typeface="Helvetica Neue"/>
-                        </a:rPr>
                         <a:t>0.623</a:t>
                       </a:r>
                     </a:p>
@@ -15195,29 +15055,6 @@
                           </a:solidFill>
                           <a:latin typeface="Helvetica Neue"/>
                         </a:rPr>
-                        <a:t>n/a</a:t>
-                      </a:r>
-                    </a:p>
-                  </a:txBody>
-                  <a:tcPr marL="73152" marR="73152" marT="27432" marB="27432" anchor="ctr">
-                    <a:solidFill>
-                      <a:srgbClr val="FCFCFB"/>
-                    </a:solidFill>
-                  </a:tcPr>
-                </a:tc>
-                <a:tc>
-                  <a:txBody>
-                    <a:bodyPr/>
-                    <a:lstStyle/>
-                    <a:p>
-                      <a:pPr algn="ctr"/>
-                      <a:r>
-                        <a:rPr sz="1300" b="0">
-                          <a:solidFill>
-                            <a:srgbClr val="0B0B0B"/>
-                          </a:solidFill>
-                          <a:latin typeface="Helvetica Neue"/>
-                        </a:rPr>
                         <a:t>1.000</a:t>
                       </a:r>
                     </a:p>
@@ -15336,29 +15173,6 @@
                           <a:latin typeface="Helvetica Neue"/>
                         </a:rPr>
                         <a:t>0.180</a:t>
-                      </a:r>
-                    </a:p>
-                  </a:txBody>
-                  <a:tcPr marL="73152" marR="73152" marT="27432" marB="27432" anchor="ctr">
-                    <a:solidFill>
-                      <a:srgbClr val="FCFCFB"/>
-                    </a:solidFill>
-                  </a:tcPr>
-                </a:tc>
-                <a:tc>
-                  <a:txBody>
-                    <a:bodyPr/>
-                    <a:lstStyle/>
-                    <a:p>
-                      <a:pPr algn="ctr"/>
-                      <a:r>
-                        <a:rPr sz="1300" b="0">
-                          <a:solidFill>
-                            <a:srgbClr val="0B0B0B"/>
-                          </a:solidFill>
-                          <a:latin typeface="Helvetica Neue"/>
-                        </a:rPr>
-                        <a:t>n/a</a:t>
                       </a:r>
                     </a:p>
                   </a:txBody>
@@ -15476,7 +15290,7 @@
                 </a:solidFill>
                 <a:latin typeface="Helvetica Neue"/>
               </a:rPr>
-              <a:t>composite  =  0.50 · quality   +   0.15 · calibration   +   0.15 · robustness   +   0.10 · efficiency   +   0.10 · reliability</a:t>
+              <a:t>composite  =  0.714 · quality   +   0.143 · efficiency   +   0.143 · reliability</a:t>
             </a:r>
           </a:p>
         </p:txBody>
@@ -15515,7 +15329,7 @@
                 </a:solidFill>
                 <a:latin typeface="Helvetica Neue"/>
               </a:rPr>
-              <a:t>Calibration is absent because the routed providers returned no log-probabilities. Rather than scoring it zero, the weight is redistributed over the components that were measured, and each row records which those were.</a:t>
+              <a:t>Calibration and robustness could not be measured — the routed providers returned no log-probabilities and no robustness pass was run. Rather than scoring them zero, their weight is redistributed over the components that were measured, so the weights above are the applied ones, not the nominal 0.50/0.15/0.15/0.10/0.10.</a:t>
             </a:r>
           </a:p>
           <a:p>

--- a/extended-final-presentation.pptx
+++ b/extended-final-presentation.pptx
@@ -35,6 +35,10 @@
     <p:sldId id="283" r:id="rId34"/>
     <p:sldId id="284" r:id="rId35"/>
     <p:sldId id="285" r:id="rId36"/>
+    <p:sldId id="286" r:id="rId37"/>
+    <p:sldId id="287" r:id="rId38"/>
+    <p:sldId id="288" r:id="rId39"/>
+    <p:sldId id="289" r:id="rId40"/>
   </p:sldIdLst>
   <p:sldSz cx="12191695" cy="6858000" type="screen4x3"/>
   <p:notesSz cx="6858000" cy="9144000"/>
@@ -17696,7 +17700,7 @@
                 </a:solidFill>
                 <a:latin typeface="Helvetica Neue"/>
               </a:rPr>
-              <a:t>DISCUSSION OF THE RESULTS</a:t>
+              <a:t>ANALYSIS</a:t>
             </a:r>
           </a:p>
         </p:txBody>
@@ -17735,7 +17739,3050 @@
                 </a:solidFill>
                 <a:latin typeface="Helvetica Neue"/>
               </a:rPr>
-              <a:t>Findings accuracy alone would have missed</a:t>
+              <a:t>Are the differences real?</a:t>
+            </a:r>
+          </a:p>
+        </p:txBody>
+      </p:sp>
+      <p:cxnSp>
+        <p:nvCxnSpPr>
+          <p:cNvPr id="7" name="Connector 6"/>
+          <p:cNvCxnSpPr/>
+          <p:nvPr/>
+        </p:nvCxnSpPr>
+        <p:spPr>
+          <a:xfrm>
+            <a:off x="548640" y="1508760"/>
+            <a:ext cx="11091672" cy="0"/>
+          </a:xfrm>
+          <a:prstGeom prst="line">
+            <a:avLst/>
+          </a:prstGeom>
+          <a:ln w="9525">
+            <a:solidFill>
+              <a:srgbClr val="E1E0D9"/>
+            </a:solidFill>
+          </a:ln>
+        </p:spPr>
+        <p:style>
+          <a:lnRef idx="2">
+            <a:schemeClr val="accent1"/>
+          </a:lnRef>
+          <a:fillRef idx="0">
+            <a:schemeClr val="accent1"/>
+          </a:fillRef>
+          <a:effectRef idx="1">
+            <a:schemeClr val="accent1"/>
+          </a:effectRef>
+          <a:fontRef idx="minor">
+            <a:schemeClr val="tx1"/>
+          </a:fontRef>
+        </p:style>
+      </p:cxnSp>
+      <p:sp>
+        <p:nvSpPr>
+          <p:cNvPr id="8" name="TextBox 7"/>
+          <p:cNvSpPr txBox="1"/>
+          <p:nvPr/>
+        </p:nvSpPr>
+        <p:spPr>
+          <a:xfrm>
+            <a:off x="548640" y="1600200"/>
+            <a:ext cx="11064240" cy="685800"/>
+          </a:xfrm>
+          <a:prstGeom prst="rect">
+            <a:avLst/>
+          </a:prstGeom>
+          <a:noFill/>
+        </p:spPr>
+        <p:txBody>
+          <a:bodyPr wrap="square">
+            <a:spAutoFit/>
+          </a:bodyPr>
+          <a:lstStyle/>
+          <a:p>
+            <a:pPr algn="l">
+              <a:lnSpc>
+                <a:spcPct val="115000"/>
+              </a:lnSpc>
+            </a:pPr>
+            <a:r>
+              <a:rPr sz="1400" b="0" i="0">
+                <a:solidFill>
+                  <a:srgbClr val="52514E"/>
+                </a:solidFill>
+                <a:latin typeface="Helvetica Neue"/>
+              </a:rPr>
+              <a:t>The models answered identical items, so every comparison is paired. That is what makes McNemar the right test: an unpaired two-proportion test would discard the pairing and overstate the variance.</a:t>
+            </a:r>
+          </a:p>
+        </p:txBody>
+      </p:sp>
+      <p:graphicFrame>
+        <p:nvGraphicFramePr>
+          <p:cNvPr id="9" name="Table 8"/>
+          <p:cNvGraphicFramePr>
+            <a:graphicFrameLocks noGrp="1"/>
+          </p:cNvGraphicFramePr>
+          <p:nvPr/>
+        </p:nvGraphicFramePr>
+        <p:xfrm>
+          <a:off x="548640" y="2423160"/>
+          <a:ext cx="11064239" cy="2816352"/>
+        </p:xfrm>
+        <a:graphic>
+          <a:graphicData uri="http://schemas.openxmlformats.org/drawingml/2006/table">
+            <a:tbl>
+              <a:tblPr firstRow="1" bandRow="1">
+                <a:tableStyleId>{5C22544A-7EE6-4342-B048-85BDC9FD1C3A}</a:tableStyleId>
+              </a:tblPr>
+              <a:tblGrid>
+                <a:gridCol w="2212848"/>
+                <a:gridCol w="3540556"/>
+                <a:gridCol w="5310835"/>
+              </a:tblGrid>
+              <a:tr h="402336">
+                <a:tc>
+                  <a:txBody>
+                    <a:bodyPr/>
+                    <a:lstStyle/>
+                    <a:p>
+                      <a:pPr algn="l"/>
+                      <a:r>
+                        <a:rPr sz="1200" b="1">
+                          <a:solidFill>
+                            <a:srgbClr val="FFFFFF"/>
+                          </a:solidFill>
+                          <a:latin typeface="Helvetica Neue"/>
+                        </a:rPr>
+                        <a:t>Test</a:t>
+                      </a:r>
+                    </a:p>
+                  </a:txBody>
+                  <a:tcPr marL="73152" marR="73152" marT="27432" marB="27432" anchor="ctr">
+                    <a:solidFill>
+                      <a:srgbClr val="0B0B0B"/>
+                    </a:solidFill>
+                  </a:tcPr>
+                </a:tc>
+                <a:tc>
+                  <a:txBody>
+                    <a:bodyPr/>
+                    <a:lstStyle/>
+                    <a:p>
+                      <a:pPr algn="ctr"/>
+                      <a:r>
+                        <a:rPr sz="1200" b="1">
+                          <a:solidFill>
+                            <a:srgbClr val="FFFFFF"/>
+                          </a:solidFill>
+                          <a:latin typeface="Helvetica Neue"/>
+                        </a:rPr>
+                        <a:t>Question</a:t>
+                      </a:r>
+                    </a:p>
+                  </a:txBody>
+                  <a:tcPr marL="73152" marR="73152" marT="27432" marB="27432" anchor="ctr">
+                    <a:solidFill>
+                      <a:srgbClr val="0B0B0B"/>
+                    </a:solidFill>
+                  </a:tcPr>
+                </a:tc>
+                <a:tc>
+                  <a:txBody>
+                    <a:bodyPr/>
+                    <a:lstStyle/>
+                    <a:p>
+                      <a:pPr algn="ctr"/>
+                      <a:r>
+                        <a:rPr sz="1200" b="1">
+                          <a:solidFill>
+                            <a:srgbClr val="FFFFFF"/>
+                          </a:solidFill>
+                          <a:latin typeface="Helvetica Neue"/>
+                        </a:rPr>
+                        <a:t>Why this one</a:t>
+                      </a:r>
+                    </a:p>
+                  </a:txBody>
+                  <a:tcPr marL="73152" marR="73152" marT="27432" marB="27432" anchor="ctr">
+                    <a:solidFill>
+                      <a:srgbClr val="0B0B0B"/>
+                    </a:solidFill>
+                  </a:tcPr>
+                </a:tc>
+              </a:tr>
+              <a:tr h="402336">
+                <a:tc>
+                  <a:txBody>
+                    <a:bodyPr/>
+                    <a:lstStyle/>
+                    <a:p>
+                      <a:pPr algn="l"/>
+                      <a:r>
+                        <a:rPr sz="1200" b="0">
+                          <a:solidFill>
+                            <a:srgbClr val="0B0B0B"/>
+                          </a:solidFill>
+                          <a:latin typeface="Helvetica Neue"/>
+                        </a:rPr>
+                        <a:t>Cochran's Q</a:t>
+                      </a:r>
+                    </a:p>
+                  </a:txBody>
+                  <a:tcPr marL="73152" marR="73152" marT="27432" marB="27432" anchor="ctr">
+                    <a:solidFill>
+                      <a:srgbClr val="FCFCFB"/>
+                    </a:solidFill>
+                  </a:tcPr>
+                </a:tc>
+                <a:tc>
+                  <a:txBody>
+                    <a:bodyPr/>
+                    <a:lstStyle/>
+                    <a:p>
+                      <a:pPr algn="ctr"/>
+                      <a:r>
+                        <a:rPr sz="1200" b="0">
+                          <a:solidFill>
+                            <a:srgbClr val="0B0B0B"/>
+                          </a:solidFill>
+                          <a:latin typeface="Helvetica Neue"/>
+                        </a:rPr>
+                        <a:t>Do the k models differ at all?</a:t>
+                      </a:r>
+                    </a:p>
+                  </a:txBody>
+                  <a:tcPr marL="73152" marR="73152" marT="27432" marB="27432" anchor="ctr">
+                    <a:solidFill>
+                      <a:srgbClr val="FCFCFB"/>
+                    </a:solidFill>
+                  </a:tcPr>
+                </a:tc>
+                <a:tc>
+                  <a:txBody>
+                    <a:bodyPr/>
+                    <a:lstStyle/>
+                    <a:p>
+                      <a:pPr algn="ctr"/>
+                      <a:r>
+                        <a:rPr sz="1200" b="0">
+                          <a:solidFill>
+                            <a:srgbClr val="0B0B0B"/>
+                          </a:solidFill>
+                          <a:latin typeface="Helvetica Neue"/>
+                        </a:rPr>
+                        <a:t>Omnibus first, so pairwise tests are not p-hacking</a:t>
+                      </a:r>
+                    </a:p>
+                  </a:txBody>
+                  <a:tcPr marL="73152" marR="73152" marT="27432" marB="27432" anchor="ctr">
+                    <a:solidFill>
+                      <a:srgbClr val="FCFCFB"/>
+                    </a:solidFill>
+                  </a:tcPr>
+                </a:tc>
+              </a:tr>
+              <a:tr h="402336">
+                <a:tc>
+                  <a:txBody>
+                    <a:bodyPr/>
+                    <a:lstStyle/>
+                    <a:p>
+                      <a:pPr algn="l"/>
+                      <a:r>
+                        <a:rPr sz="1200" b="0">
+                          <a:solidFill>
+                            <a:srgbClr val="0B0B0B"/>
+                          </a:solidFill>
+                          <a:latin typeface="Helvetica Neue"/>
+                        </a:rPr>
+                        <a:t>McNemar</a:t>
+                      </a:r>
+                    </a:p>
+                  </a:txBody>
+                  <a:tcPr marL="73152" marR="73152" marT="27432" marB="27432" anchor="ctr">
+                    <a:solidFill>
+                      <a:srgbClr val="FCFCFB"/>
+                    </a:solidFill>
+                  </a:tcPr>
+                </a:tc>
+                <a:tc>
+                  <a:txBody>
+                    <a:bodyPr/>
+                    <a:lstStyle/>
+                    <a:p>
+                      <a:pPr algn="ctr"/>
+                      <a:r>
+                        <a:rPr sz="1200" b="0">
+                          <a:solidFill>
+                            <a:srgbClr val="0B0B0B"/>
+                          </a:solidFill>
+                          <a:latin typeface="Helvetica Neue"/>
+                        </a:rPr>
+                        <a:t>Is a given pair's gap real?</a:t>
+                      </a:r>
+                    </a:p>
+                  </a:txBody>
+                  <a:tcPr marL="73152" marR="73152" marT="27432" marB="27432" anchor="ctr">
+                    <a:solidFill>
+                      <a:srgbClr val="FCFCFB"/>
+                    </a:solidFill>
+                  </a:tcPr>
+                </a:tc>
+                <a:tc>
+                  <a:txBody>
+                    <a:bodyPr/>
+                    <a:lstStyle/>
+                    <a:p>
+                      <a:pPr algn="ctr"/>
+                      <a:r>
+                        <a:rPr sz="1200" b="0">
+                          <a:solidFill>
+                            <a:srgbClr val="0B0B0B"/>
+                          </a:solidFill>
+                          <a:latin typeface="Helvetica Neue"/>
+                        </a:rPr>
+                        <a:t>Paired; only discordant items carry information</a:t>
+                      </a:r>
+                    </a:p>
+                  </a:txBody>
+                  <a:tcPr marL="73152" marR="73152" marT="27432" marB="27432" anchor="ctr">
+                    <a:solidFill>
+                      <a:srgbClr val="FCFCFB"/>
+                    </a:solidFill>
+                  </a:tcPr>
+                </a:tc>
+              </a:tr>
+              <a:tr h="402336">
+                <a:tc>
+                  <a:txBody>
+                    <a:bodyPr/>
+                    <a:lstStyle/>
+                    <a:p>
+                      <a:pPr algn="l"/>
+                      <a:r>
+                        <a:rPr sz="1200" b="0">
+                          <a:solidFill>
+                            <a:srgbClr val="0B0B0B"/>
+                          </a:solidFill>
+                          <a:latin typeface="Helvetica Neue"/>
+                        </a:rPr>
+                        <a:t>Holm-Bonferroni</a:t>
+                      </a:r>
+                    </a:p>
+                  </a:txBody>
+                  <a:tcPr marL="73152" marR="73152" marT="27432" marB="27432" anchor="ctr">
+                    <a:solidFill>
+                      <a:srgbClr val="FCFCFB"/>
+                    </a:solidFill>
+                  </a:tcPr>
+                </a:tc>
+                <a:tc>
+                  <a:txBody>
+                    <a:bodyPr/>
+                    <a:lstStyle/>
+                    <a:p>
+                      <a:pPr algn="ctr"/>
+                      <a:r>
+                        <a:rPr sz="1200" b="0">
+                          <a:solidFill>
+                            <a:srgbClr val="0B0B0B"/>
+                          </a:solidFill>
+                          <a:latin typeface="Helvetica Neue"/>
+                        </a:rPr>
+                        <a:t>False positive across 3 pairs?</a:t>
+                      </a:r>
+                    </a:p>
+                  </a:txBody>
+                  <a:tcPr marL="73152" marR="73152" marT="27432" marB="27432" anchor="ctr">
+                    <a:solidFill>
+                      <a:srgbClr val="FCFCFB"/>
+                    </a:solidFill>
+                  </a:tcPr>
+                </a:tc>
+                <a:tc>
+                  <a:txBody>
+                    <a:bodyPr/>
+                    <a:lstStyle/>
+                    <a:p>
+                      <a:pPr algn="ctr"/>
+                      <a:r>
+                        <a:rPr sz="1200" b="0">
+                          <a:solidFill>
+                            <a:srgbClr val="0B0B0B"/>
+                          </a:solidFill>
+                          <a:latin typeface="Helvetica Neue"/>
+                        </a:rPr>
+                        <a:t>Controls family-wise error without Bonferroni's power loss</a:t>
+                      </a:r>
+                    </a:p>
+                  </a:txBody>
+                  <a:tcPr marL="73152" marR="73152" marT="27432" marB="27432" anchor="ctr">
+                    <a:solidFill>
+                      <a:srgbClr val="FCFCFB"/>
+                    </a:solidFill>
+                  </a:tcPr>
+                </a:tc>
+              </a:tr>
+              <a:tr h="402336">
+                <a:tc>
+                  <a:txBody>
+                    <a:bodyPr/>
+                    <a:lstStyle/>
+                    <a:p>
+                      <a:pPr algn="l"/>
+                      <a:r>
+                        <a:rPr sz="1200" b="0">
+                          <a:solidFill>
+                            <a:srgbClr val="0B0B0B"/>
+                          </a:solidFill>
+                          <a:latin typeface="Helvetica Neue"/>
+                        </a:rPr>
+                        <a:t>Chi-square + Cramer's V</a:t>
+                      </a:r>
+                    </a:p>
+                  </a:txBody>
+                  <a:tcPr marL="73152" marR="73152" marT="27432" marB="27432" anchor="ctr">
+                    <a:solidFill>
+                      <a:srgbClr val="FCFCFB"/>
+                    </a:solidFill>
+                  </a:tcPr>
+                </a:tc>
+                <a:tc>
+                  <a:txBody>
+                    <a:bodyPr/>
+                    <a:lstStyle/>
+                    <a:p>
+                      <a:pPr algn="ctr"/>
+                      <a:r>
+                        <a:rPr sz="1200" b="0">
+                          <a:solidFill>
+                            <a:srgbClr val="0B0B0B"/>
+                          </a:solidFill>
+                          <a:latin typeface="Helvetica Neue"/>
+                        </a:rPr>
+                        <a:t>Does a factor move accuracy?</a:t>
+                      </a:r>
+                    </a:p>
+                  </a:txBody>
+                  <a:tcPr marL="73152" marR="73152" marT="27432" marB="27432" anchor="ctr">
+                    <a:solidFill>
+                      <a:srgbClr val="FCFCFB"/>
+                    </a:solidFill>
+                  </a:tcPr>
+                </a:tc>
+                <a:tc>
+                  <a:txBody>
+                    <a:bodyPr/>
+                    <a:lstStyle/>
+                    <a:p>
+                      <a:pPr algn="ctr"/>
+                      <a:r>
+                        <a:rPr sz="1200" b="0">
+                          <a:solidFill>
+                            <a:srgbClr val="0B0B0B"/>
+                          </a:solidFill>
+                          <a:latin typeface="Helvetica Neue"/>
+                        </a:rPr>
+                        <a:t>At 1000s of items everything is significant; V says if it matters</a:t>
+                      </a:r>
+                    </a:p>
+                  </a:txBody>
+                  <a:tcPr marL="73152" marR="73152" marT="27432" marB="27432" anchor="ctr">
+                    <a:solidFill>
+                      <a:srgbClr val="FCFCFB"/>
+                    </a:solidFill>
+                  </a:tcPr>
+                </a:tc>
+              </a:tr>
+              <a:tr h="402336">
+                <a:tc>
+                  <a:txBody>
+                    <a:bodyPr/>
+                    <a:lstStyle/>
+                    <a:p>
+                      <a:pPr algn="l"/>
+                      <a:r>
+                        <a:rPr sz="1200" b="0">
+                          <a:solidFill>
+                            <a:srgbClr val="0B0B0B"/>
+                          </a:solidFill>
+                          <a:latin typeface="Helvetica Neue"/>
+                        </a:rPr>
+                        <a:t>Variance decomposition</a:t>
+                      </a:r>
+                    </a:p>
+                  </a:txBody>
+                  <a:tcPr marL="73152" marR="73152" marT="27432" marB="27432" anchor="ctr">
+                    <a:solidFill>
+                      <a:srgbClr val="FCFCFB"/>
+                    </a:solidFill>
+                  </a:tcPr>
+                </a:tc>
+                <a:tc>
+                  <a:txBody>
+                    <a:bodyPr/>
+                    <a:lstStyle/>
+                    <a:p>
+                      <a:pPr algn="ctr"/>
+                      <a:r>
+                        <a:rPr sz="1200" b="0">
+                          <a:solidFill>
+                            <a:srgbClr val="0B0B0B"/>
+                          </a:solidFill>
+                          <a:latin typeface="Helvetica Neue"/>
+                        </a:rPr>
+                        <a:t>Is the subject spread real?</a:t>
+                      </a:r>
+                    </a:p>
+                  </a:txBody>
+                  <a:tcPr marL="73152" marR="73152" marT="27432" marB="27432" anchor="ctr">
+                    <a:solidFill>
+                      <a:srgbClr val="FCFCFB"/>
+                    </a:solidFill>
+                  </a:tcPr>
+                </a:tc>
+                <a:tc>
+                  <a:txBody>
+                    <a:bodyPr/>
+                    <a:lstStyle/>
+                    <a:p>
+                      <a:pPr algn="ctr"/>
+                      <a:r>
+                        <a:rPr sz="1200" b="0">
+                          <a:solidFill>
+                            <a:srgbClr val="0B0B0B"/>
+                          </a:solidFill>
+                          <a:latin typeface="Helvetica Neue"/>
+                        </a:rPr>
+                        <a:t>Removes the binomial noise of ~50 questions per subject</a:t>
+                      </a:r>
+                    </a:p>
+                  </a:txBody>
+                  <a:tcPr marL="73152" marR="73152" marT="27432" marB="27432" anchor="ctr">
+                    <a:solidFill>
+                      <a:srgbClr val="FCFCFB"/>
+                    </a:solidFill>
+                  </a:tcPr>
+                </a:tc>
+              </a:tr>
+              <a:tr h="402336">
+                <a:tc>
+                  <a:txBody>
+                    <a:bodyPr/>
+                    <a:lstStyle/>
+                    <a:p>
+                      <a:pPr algn="l"/>
+                      <a:r>
+                        <a:rPr sz="1200" b="0">
+                          <a:solidFill>
+                            <a:srgbClr val="0B0B0B"/>
+                          </a:solidFill>
+                          <a:latin typeface="Helvetica Neue"/>
+                        </a:rPr>
+                        <a:t>Oracle ceiling</a:t>
+                      </a:r>
+                    </a:p>
+                  </a:txBody>
+                  <a:tcPr marL="73152" marR="73152" marT="27432" marB="27432" anchor="ctr">
+                    <a:solidFill>
+                      <a:srgbClr val="FCFCFB"/>
+                    </a:solidFill>
+                  </a:tcPr>
+                </a:tc>
+                <a:tc>
+                  <a:txBody>
+                    <a:bodyPr/>
+                    <a:lstStyle/>
+                    <a:p>
+                      <a:pPr algn="ctr"/>
+                      <a:r>
+                        <a:rPr sz="1200" b="0">
+                          <a:solidFill>
+                            <a:srgbClr val="0B0B0B"/>
+                          </a:solidFill>
+                          <a:latin typeface="Helvetica Neue"/>
+                        </a:rPr>
+                        <a:t>What would per-item routing buy?</a:t>
+                      </a:r>
+                    </a:p>
+                  </a:txBody>
+                  <a:tcPr marL="73152" marR="73152" marT="27432" marB="27432" anchor="ctr">
+                    <a:solidFill>
+                      <a:srgbClr val="FCFCFB"/>
+                    </a:solidFill>
+                  </a:tcPr>
+                </a:tc>
+                <a:tc>
+                  <a:txBody>
+                    <a:bodyPr/>
+                    <a:lstStyle/>
+                    <a:p>
+                      <a:pPr algn="ctr"/>
+                      <a:r>
+                        <a:rPr sz="1200" b="0">
+                          <a:solidFill>
+                            <a:srgbClr val="0B0B0B"/>
+                          </a:solidFill>
+                          <a:latin typeface="Helvetica Neue"/>
+                        </a:rPr>
+                        <a:t>Headroom that individual accuracies cannot show</a:t>
+                      </a:r>
+                    </a:p>
+                  </a:txBody>
+                  <a:tcPr marL="73152" marR="73152" marT="27432" marB="27432" anchor="ctr">
+                    <a:solidFill>
+                      <a:srgbClr val="FCFCFB"/>
+                    </a:solidFill>
+                  </a:tcPr>
+                </a:tc>
+              </a:tr>
+            </a:tbl>
+          </a:graphicData>
+        </a:graphic>
+      </p:graphicFrame>
+      <p:sp>
+        <p:nvSpPr>
+          <p:cNvPr id="10" name="TextBox 9"/>
+          <p:cNvSpPr txBox="1"/>
+          <p:nvPr/>
+        </p:nvSpPr>
+        <p:spPr>
+          <a:xfrm>
+            <a:off x="548640" y="5440680"/>
+            <a:ext cx="11064240" cy="457200"/>
+          </a:xfrm>
+          <a:prstGeom prst="rect">
+            <a:avLst/>
+          </a:prstGeom>
+          <a:noFill/>
+        </p:spPr>
+        <p:txBody>
+          <a:bodyPr wrap="square">
+            <a:spAutoFit/>
+          </a:bodyPr>
+          <a:lstStyle/>
+          <a:p>
+            <a:pPr algn="l">
+              <a:lnSpc>
+                <a:spcPct val="115000"/>
+              </a:lnSpc>
+            </a:pPr>
+            <a:r>
+              <a:rPr sz="1200" b="0" i="0">
+                <a:solidFill>
+                  <a:srgbClr val="898781"/>
+                </a:solidFill>
+                <a:latin typeface="Helvetica Neue"/>
+              </a:rPr>
+              <a:t>Pure-stdlib implementations, pinned against SciPy and statsmodels by tests/test_significance.py so the report regenerates on a host where SciPy cannot be installed.</a:t>
+            </a:r>
+          </a:p>
+        </p:txBody>
+      </p:sp>
+    </p:spTree>
+  </p:cSld>
+  <p:clrMapOvr>
+    <a:masterClrMapping/>
+  </p:clrMapOvr>
+</p:sld>
+</file>
+
+<file path=ppt/slides/slide28.xml><?xml version="1.0" encoding="utf-8"?>
+<p:sld xmlns:a="http://schemas.openxmlformats.org/drawingml/2006/main" xmlns:p="http://schemas.openxmlformats.org/presentationml/2006/main" xmlns:r="http://schemas.openxmlformats.org/officeDocument/2006/relationships">
+  <p:cSld>
+    <p:spTree>
+      <p:nvGrpSpPr>
+        <p:cNvPr id="1" name=""/>
+        <p:cNvGrpSpPr/>
+        <p:nvPr/>
+      </p:nvGrpSpPr>
+      <p:grpSpPr/>
+      <p:sp>
+        <p:nvSpPr>
+          <p:cNvPr id="2" name="Rectangle 1"/>
+          <p:cNvSpPr/>
+          <p:nvPr/>
+        </p:nvSpPr>
+        <p:spPr>
+          <a:xfrm>
+            <a:off x="0" y="0"/>
+            <a:ext cx="12191695" cy="6858000"/>
+          </a:xfrm>
+          <a:prstGeom prst="rect">
+            <a:avLst/>
+          </a:prstGeom>
+          <a:solidFill>
+            <a:srgbClr val="FCFCFB"/>
+          </a:solidFill>
+          <a:ln>
+            <a:noFill/>
+          </a:ln>
+          <a:effectLst/>
+        </p:spPr>
+        <p:style>
+          <a:lnRef idx="1">
+            <a:schemeClr val="accent1"/>
+          </a:lnRef>
+          <a:fillRef idx="3">
+            <a:schemeClr val="accent1"/>
+          </a:fillRef>
+          <a:effectRef idx="2">
+            <a:schemeClr val="accent1"/>
+          </a:effectRef>
+          <a:fontRef idx="minor">
+            <a:schemeClr val="lt1"/>
+          </a:fontRef>
+        </p:style>
+        <p:txBody>
+          <a:bodyPr rtlCol="0" anchor="ctr"/>
+          <a:lstStyle/>
+          <a:p>
+            <a:pPr algn="ctr"/>
+          </a:p>
+        </p:txBody>
+      </p:sp>
+      <p:sp>
+        <p:nvSpPr>
+          <p:cNvPr id="3" name="TextBox 2"/>
+          <p:cNvSpPr txBox="1"/>
+          <p:nvPr/>
+        </p:nvSpPr>
+        <p:spPr>
+          <a:xfrm>
+            <a:off x="548640" y="6510528"/>
+            <a:ext cx="5486400" cy="274320"/>
+          </a:xfrm>
+          <a:prstGeom prst="rect">
+            <a:avLst/>
+          </a:prstGeom>
+          <a:noFill/>
+        </p:spPr>
+        <p:txBody>
+          <a:bodyPr wrap="square">
+            <a:spAutoFit/>
+          </a:bodyPr>
+          <a:lstStyle/>
+          <a:p>
+            <a:pPr algn="l">
+              <a:lnSpc>
+                <a:spcPct val="115000"/>
+              </a:lnSpc>
+            </a:pPr>
+            <a:r>
+              <a:rPr sz="900" b="0" i="0">
+                <a:solidFill>
+                  <a:srgbClr val="898781"/>
+                </a:solidFill>
+                <a:latin typeface="Helvetica Neue"/>
+              </a:rPr>
+              <a:t>LAMBADA &amp; MMLU Benchmark Evaluation — Extended</a:t>
+            </a:r>
+          </a:p>
+        </p:txBody>
+      </p:sp>
+      <p:sp>
+        <p:nvSpPr>
+          <p:cNvPr id="4" name="TextBox 3"/>
+          <p:cNvSpPr txBox="1"/>
+          <p:nvPr/>
+        </p:nvSpPr>
+        <p:spPr>
+          <a:xfrm>
+            <a:off x="11338560" y="6510528"/>
+            <a:ext cx="457200" cy="274320"/>
+          </a:xfrm>
+          <a:prstGeom prst="rect">
+            <a:avLst/>
+          </a:prstGeom>
+          <a:noFill/>
+        </p:spPr>
+        <p:txBody>
+          <a:bodyPr wrap="square">
+            <a:spAutoFit/>
+          </a:bodyPr>
+          <a:lstStyle/>
+          <a:p>
+            <a:pPr algn="r">
+              <a:lnSpc>
+                <a:spcPct val="115000"/>
+              </a:lnSpc>
+            </a:pPr>
+            <a:r>
+              <a:rPr sz="900" b="0" i="0">
+                <a:solidFill>
+                  <a:srgbClr val="898781"/>
+                </a:solidFill>
+                <a:latin typeface="Helvetica Neue"/>
+              </a:rPr>
+              <a:t>27</a:t>
+            </a:r>
+          </a:p>
+        </p:txBody>
+      </p:sp>
+      <p:sp>
+        <p:nvSpPr>
+          <p:cNvPr id="5" name="TextBox 4"/>
+          <p:cNvSpPr txBox="1"/>
+          <p:nvPr/>
+        </p:nvSpPr>
+        <p:spPr>
+          <a:xfrm>
+            <a:off x="548640" y="320040"/>
+            <a:ext cx="10058400" cy="320040"/>
+          </a:xfrm>
+          <a:prstGeom prst="rect">
+            <a:avLst/>
+          </a:prstGeom>
+          <a:noFill/>
+        </p:spPr>
+        <p:txBody>
+          <a:bodyPr wrap="square">
+            <a:spAutoFit/>
+          </a:bodyPr>
+          <a:lstStyle/>
+          <a:p>
+            <a:pPr algn="l">
+              <a:lnSpc>
+                <a:spcPct val="115000"/>
+              </a:lnSpc>
+            </a:pPr>
+            <a:r>
+              <a:rPr sz="1250" b="1" i="0">
+                <a:solidFill>
+                  <a:srgbClr val="2A78D6"/>
+                </a:solidFill>
+                <a:latin typeface="Helvetica Neue"/>
+              </a:rPr>
+              <a:t>ANALYSIS</a:t>
+            </a:r>
+          </a:p>
+        </p:txBody>
+      </p:sp>
+      <p:sp>
+        <p:nvSpPr>
+          <p:cNvPr id="6" name="TextBox 5"/>
+          <p:cNvSpPr txBox="1"/>
+          <p:nvPr/>
+        </p:nvSpPr>
+        <p:spPr>
+          <a:xfrm>
+            <a:off x="548640" y="914400"/>
+            <a:ext cx="11064240" cy="640080"/>
+          </a:xfrm>
+          <a:prstGeom prst="rect">
+            <a:avLst/>
+          </a:prstGeom>
+          <a:noFill/>
+        </p:spPr>
+        <p:txBody>
+          <a:bodyPr wrap="square">
+            <a:spAutoFit/>
+          </a:bodyPr>
+          <a:lstStyle/>
+          <a:p>
+            <a:pPr algn="l">
+              <a:lnSpc>
+                <a:spcPct val="115000"/>
+              </a:lnSpc>
+            </a:pPr>
+            <a:r>
+              <a:rPr sz="2600" b="1" i="0">
+                <a:solidFill>
+                  <a:srgbClr val="0B0B0B"/>
+                </a:solidFill>
+                <a:latin typeface="Helvetica Neue"/>
+              </a:rPr>
+              <a:t>MMLU — paired significance</a:t>
+            </a:r>
+          </a:p>
+        </p:txBody>
+      </p:sp>
+      <p:cxnSp>
+        <p:nvCxnSpPr>
+          <p:cNvPr id="7" name="Connector 6"/>
+          <p:cNvCxnSpPr/>
+          <p:nvPr/>
+        </p:nvCxnSpPr>
+        <p:spPr>
+          <a:xfrm>
+            <a:off x="548640" y="1508760"/>
+            <a:ext cx="11091672" cy="0"/>
+          </a:xfrm>
+          <a:prstGeom prst="line">
+            <a:avLst/>
+          </a:prstGeom>
+          <a:ln w="9525">
+            <a:solidFill>
+              <a:srgbClr val="E1E0D9"/>
+            </a:solidFill>
+          </a:ln>
+        </p:spPr>
+        <p:style>
+          <a:lnRef idx="2">
+            <a:schemeClr val="accent1"/>
+          </a:lnRef>
+          <a:fillRef idx="0">
+            <a:schemeClr val="accent1"/>
+          </a:fillRef>
+          <a:effectRef idx="1">
+            <a:schemeClr val="accent1"/>
+          </a:effectRef>
+          <a:fontRef idx="minor">
+            <a:schemeClr val="tx1"/>
+          </a:fontRef>
+        </p:style>
+      </p:cxnSp>
+      <p:sp>
+        <p:nvSpPr>
+          <p:cNvPr id="8" name="TextBox 7"/>
+          <p:cNvSpPr txBox="1"/>
+          <p:nvPr/>
+        </p:nvSpPr>
+        <p:spPr>
+          <a:xfrm>
+            <a:off x="548640" y="1600200"/>
+            <a:ext cx="11064240" cy="365760"/>
+          </a:xfrm>
+          <a:prstGeom prst="rect">
+            <a:avLst/>
+          </a:prstGeom>
+          <a:noFill/>
+        </p:spPr>
+        <p:txBody>
+          <a:bodyPr wrap="square">
+            <a:spAutoFit/>
+          </a:bodyPr>
+          <a:lstStyle/>
+          <a:p>
+            <a:pPr algn="l">
+              <a:lnSpc>
+                <a:spcPct val="115000"/>
+              </a:lnSpc>
+            </a:pPr>
+            <a:r>
+              <a:rPr sz="1400" b="1" i="0">
+                <a:solidFill>
+                  <a:srgbClr val="2A78D6"/>
+                </a:solidFill>
+                <a:latin typeface="Helvetica Neue"/>
+              </a:rPr>
+              <a:t>Cochran's Q = 594.659  (df 2),  p &lt; 0.0001   —   the models differ; pairwise tests follow</a:t>
+            </a:r>
+          </a:p>
+        </p:txBody>
+      </p:sp>
+      <p:graphicFrame>
+        <p:nvGraphicFramePr>
+          <p:cNvPr id="9" name="Table 8"/>
+          <p:cNvGraphicFramePr>
+            <a:graphicFrameLocks noGrp="1"/>
+          </p:cNvGraphicFramePr>
+          <p:nvPr/>
+        </p:nvGraphicFramePr>
+        <p:xfrm>
+          <a:off x="548640" y="2148840"/>
+          <a:ext cx="11064237" cy="1609344"/>
+        </p:xfrm>
+        <a:graphic>
+          <a:graphicData uri="http://schemas.openxmlformats.org/drawingml/2006/table">
+            <a:tbl>
+              <a:tblPr firstRow="1" bandRow="1">
+                <a:tableStyleId>{5C22544A-7EE6-4342-B048-85BDC9FD1C3A}</a:tableStyleId>
+              </a:tblPr>
+              <a:tblGrid>
+                <a:gridCol w="3319272"/>
+                <a:gridCol w="1327708"/>
+                <a:gridCol w="1991563"/>
+                <a:gridCol w="885139"/>
+                <a:gridCol w="885139"/>
+                <a:gridCol w="1327708"/>
+                <a:gridCol w="1327708"/>
+              </a:tblGrid>
+              <a:tr h="402336">
+                <a:tc>
+                  <a:txBody>
+                    <a:bodyPr/>
+                    <a:lstStyle/>
+                    <a:p>
+                      <a:pPr algn="l"/>
+                      <a:r>
+                        <a:rPr sz="1200" b="1">
+                          <a:solidFill>
+                            <a:srgbClr val="FFFFFF"/>
+                          </a:solidFill>
+                          <a:latin typeface="Helvetica Neue"/>
+                        </a:rPr>
+                        <a:t>Pair</a:t>
+                      </a:r>
+                    </a:p>
+                  </a:txBody>
+                  <a:tcPr marL="73152" marR="73152" marT="27432" marB="27432" anchor="ctr">
+                    <a:solidFill>
+                      <a:srgbClr val="0B0B0B"/>
+                    </a:solidFill>
+                  </a:tcPr>
+                </a:tc>
+                <a:tc>
+                  <a:txBody>
+                    <a:bodyPr/>
+                    <a:lstStyle/>
+                    <a:p>
+                      <a:pPr algn="ctr"/>
+                      <a:r>
+                        <a:rPr sz="1200" b="1">
+                          <a:solidFill>
+                            <a:srgbClr val="FFFFFF"/>
+                          </a:solidFill>
+                          <a:latin typeface="Helvetica Neue"/>
+                        </a:rPr>
+                        <a:t>Delta acc.</a:t>
+                      </a:r>
+                    </a:p>
+                  </a:txBody>
+                  <a:tcPr marL="73152" marR="73152" marT="27432" marB="27432" anchor="ctr">
+                    <a:solidFill>
+                      <a:srgbClr val="0B0B0B"/>
+                    </a:solidFill>
+                  </a:tcPr>
+                </a:tc>
+                <a:tc>
+                  <a:txBody>
+                    <a:bodyPr/>
+                    <a:lstStyle/>
+                    <a:p>
+                      <a:pPr algn="ctr"/>
+                      <a:r>
+                        <a:rPr sz="1200" b="1">
+                          <a:solidFill>
+                            <a:srgbClr val="FFFFFF"/>
+                          </a:solidFill>
+                          <a:latin typeface="Helvetica Neue"/>
+                        </a:rPr>
+                        <a:t>95% CI</a:t>
+                      </a:r>
+                    </a:p>
+                  </a:txBody>
+                  <a:tcPr marL="73152" marR="73152" marT="27432" marB="27432" anchor="ctr">
+                    <a:solidFill>
+                      <a:srgbClr val="0B0B0B"/>
+                    </a:solidFill>
+                  </a:tcPr>
+                </a:tc>
+                <a:tc>
+                  <a:txBody>
+                    <a:bodyPr/>
+                    <a:lstStyle/>
+                    <a:p>
+                      <a:pPr algn="ctr"/>
+                      <a:r>
+                        <a:rPr sz="1200" b="1">
+                          <a:solidFill>
+                            <a:srgbClr val="FFFFFF"/>
+                          </a:solidFill>
+                          <a:latin typeface="Helvetica Neue"/>
+                        </a:rPr>
+                        <a:t>Only A</a:t>
+                      </a:r>
+                    </a:p>
+                  </a:txBody>
+                  <a:tcPr marL="73152" marR="73152" marT="27432" marB="27432" anchor="ctr">
+                    <a:solidFill>
+                      <a:srgbClr val="0B0B0B"/>
+                    </a:solidFill>
+                  </a:tcPr>
+                </a:tc>
+                <a:tc>
+                  <a:txBody>
+                    <a:bodyPr/>
+                    <a:lstStyle/>
+                    <a:p>
+                      <a:pPr algn="ctr"/>
+                      <a:r>
+                        <a:rPr sz="1200" b="1">
+                          <a:solidFill>
+                            <a:srgbClr val="FFFFFF"/>
+                          </a:solidFill>
+                          <a:latin typeface="Helvetica Neue"/>
+                        </a:rPr>
+                        <a:t>Only B</a:t>
+                      </a:r>
+                    </a:p>
+                  </a:txBody>
+                  <a:tcPr marL="73152" marR="73152" marT="27432" marB="27432" anchor="ctr">
+                    <a:solidFill>
+                      <a:srgbClr val="0B0B0B"/>
+                    </a:solidFill>
+                  </a:tcPr>
+                </a:tc>
+                <a:tc>
+                  <a:txBody>
+                    <a:bodyPr/>
+                    <a:lstStyle/>
+                    <a:p>
+                      <a:pPr algn="ctr"/>
+                      <a:r>
+                        <a:rPr sz="1200" b="1">
+                          <a:solidFill>
+                            <a:srgbClr val="FFFFFF"/>
+                          </a:solidFill>
+                          <a:latin typeface="Helvetica Neue"/>
+                        </a:rPr>
+                        <a:t>p (Holm)</a:t>
+                      </a:r>
+                    </a:p>
+                  </a:txBody>
+                  <a:tcPr marL="73152" marR="73152" marT="27432" marB="27432" anchor="ctr">
+                    <a:solidFill>
+                      <a:srgbClr val="0B0B0B"/>
+                    </a:solidFill>
+                  </a:tcPr>
+                </a:tc>
+                <a:tc>
+                  <a:txBody>
+                    <a:bodyPr/>
+                    <a:lstStyle/>
+                    <a:p>
+                      <a:pPr algn="ctr"/>
+                      <a:r>
+                        <a:rPr sz="1200" b="1">
+                          <a:solidFill>
+                            <a:srgbClr val="FFFFFF"/>
+                          </a:solidFill>
+                          <a:latin typeface="Helvetica Neue"/>
+                        </a:rPr>
+                        <a:t>Verdict</a:t>
+                      </a:r>
+                    </a:p>
+                  </a:txBody>
+                  <a:tcPr marL="73152" marR="73152" marT="27432" marB="27432" anchor="ctr">
+                    <a:solidFill>
+                      <a:srgbClr val="0B0B0B"/>
+                    </a:solidFill>
+                  </a:tcPr>
+                </a:tc>
+              </a:tr>
+              <a:tr h="402336">
+                <a:tc>
+                  <a:txBody>
+                    <a:bodyPr/>
+                    <a:lstStyle/>
+                    <a:p>
+                      <a:pPr algn="l"/>
+                      <a:r>
+                        <a:rPr sz="1200" b="0">
+                          <a:solidFill>
+                            <a:srgbClr val="0B0B0B"/>
+                          </a:solidFill>
+                          <a:latin typeface="Helvetica Neue"/>
+                        </a:rPr>
+                        <a:t>Gemma-3-4B vs Llama-3.2-3B</a:t>
+                      </a:r>
+                    </a:p>
+                  </a:txBody>
+                  <a:tcPr marL="73152" marR="73152" marT="27432" marB="27432" anchor="ctr">
+                    <a:solidFill>
+                      <a:srgbClr val="FCFCFB"/>
+                    </a:solidFill>
+                  </a:tcPr>
+                </a:tc>
+                <a:tc>
+                  <a:txBody>
+                    <a:bodyPr/>
+                    <a:lstStyle/>
+                    <a:p>
+                      <a:pPr algn="ctr"/>
+                      <a:r>
+                        <a:rPr sz="1200" b="0">
+                          <a:solidFill>
+                            <a:srgbClr val="0B0B0B"/>
+                          </a:solidFill>
+                          <a:latin typeface="Helvetica Neue"/>
+                        </a:rPr>
+                        <a:t>+0.0642</a:t>
+                      </a:r>
+                    </a:p>
+                  </a:txBody>
+                  <a:tcPr marL="73152" marR="73152" marT="27432" marB="27432" anchor="ctr">
+                    <a:solidFill>
+                      <a:srgbClr val="FCFCFB"/>
+                    </a:solidFill>
+                  </a:tcPr>
+                </a:tc>
+                <a:tc>
+                  <a:txBody>
+                    <a:bodyPr/>
+                    <a:lstStyle/>
+                    <a:p>
+                      <a:pPr algn="ctr"/>
+                      <a:r>
+                        <a:rPr sz="1200" b="0">
+                          <a:solidFill>
+                            <a:srgbClr val="0B0B0B"/>
+                          </a:solidFill>
+                          <a:latin typeface="Helvetica Neue"/>
+                        </a:rPr>
+                        <a:t>+0.044 to +0.084</a:t>
+                      </a:r>
+                    </a:p>
+                  </a:txBody>
+                  <a:tcPr marL="73152" marR="73152" marT="27432" marB="27432" anchor="ctr">
+                    <a:solidFill>
+                      <a:srgbClr val="FCFCFB"/>
+                    </a:solidFill>
+                  </a:tcPr>
+                </a:tc>
+                <a:tc>
+                  <a:txBody>
+                    <a:bodyPr/>
+                    <a:lstStyle/>
+                    <a:p>
+                      <a:pPr algn="ctr"/>
+                      <a:r>
+                        <a:rPr sz="1200" b="0">
+                          <a:solidFill>
+                            <a:srgbClr val="0B0B0B"/>
+                          </a:solidFill>
+                          <a:latin typeface="Helvetica Neue"/>
+                        </a:rPr>
+                        <a:t>520</a:t>
+                      </a:r>
+                    </a:p>
+                  </a:txBody>
+                  <a:tcPr marL="73152" marR="73152" marT="27432" marB="27432" anchor="ctr">
+                    <a:solidFill>
+                      <a:srgbClr val="FCFCFB"/>
+                    </a:solidFill>
+                  </a:tcPr>
+                </a:tc>
+                <a:tc>
+                  <a:txBody>
+                    <a:bodyPr/>
+                    <a:lstStyle/>
+                    <a:p>
+                      <a:pPr algn="ctr"/>
+                      <a:r>
+                        <a:rPr sz="1200" b="0">
+                          <a:solidFill>
+                            <a:srgbClr val="0B0B0B"/>
+                          </a:solidFill>
+                          <a:latin typeface="Helvetica Neue"/>
+                        </a:rPr>
+                        <a:t>337</a:t>
+                      </a:r>
+                    </a:p>
+                  </a:txBody>
+                  <a:tcPr marL="73152" marR="73152" marT="27432" marB="27432" anchor="ctr">
+                    <a:solidFill>
+                      <a:srgbClr val="FCFCFB"/>
+                    </a:solidFill>
+                  </a:tcPr>
+                </a:tc>
+                <a:tc>
+                  <a:txBody>
+                    <a:bodyPr/>
+                    <a:lstStyle/>
+                    <a:p>
+                      <a:pPr algn="ctr"/>
+                      <a:r>
+                        <a:rPr sz="1200" b="0">
+                          <a:solidFill>
+                            <a:srgbClr val="0B0B0B"/>
+                          </a:solidFill>
+                          <a:latin typeface="Helvetica Neue"/>
+                        </a:rPr>
+                        <a:t>&lt; 0.0001</a:t>
+                      </a:r>
+                    </a:p>
+                  </a:txBody>
+                  <a:tcPr marL="73152" marR="73152" marT="27432" marB="27432" anchor="ctr">
+                    <a:solidFill>
+                      <a:srgbClr val="FCFCFB"/>
+                    </a:solidFill>
+                  </a:tcPr>
+                </a:tc>
+                <a:tc>
+                  <a:txBody>
+                    <a:bodyPr/>
+                    <a:lstStyle/>
+                    <a:p>
+                      <a:pPr algn="ctr"/>
+                      <a:r>
+                        <a:rPr sz="1200" b="0">
+                          <a:solidFill>
+                            <a:srgbClr val="0B0B0B"/>
+                          </a:solidFill>
+                          <a:latin typeface="Helvetica Neue"/>
+                        </a:rPr>
+                        <a:t>significant</a:t>
+                      </a:r>
+                    </a:p>
+                  </a:txBody>
+                  <a:tcPr marL="73152" marR="73152" marT="27432" marB="27432" anchor="ctr">
+                    <a:solidFill>
+                      <a:srgbClr val="FCFCFB"/>
+                    </a:solidFill>
+                  </a:tcPr>
+                </a:tc>
+              </a:tr>
+              <a:tr h="402336">
+                <a:tc>
+                  <a:txBody>
+                    <a:bodyPr/>
+                    <a:lstStyle/>
+                    <a:p>
+                      <a:pPr algn="l"/>
+                      <a:r>
+                        <a:rPr sz="1200" b="0">
+                          <a:solidFill>
+                            <a:srgbClr val="0B0B0B"/>
+                          </a:solidFill>
+                          <a:latin typeface="Helvetica Neue"/>
+                        </a:rPr>
+                        <a:t>Gemma-3-4B vs Ministral-8B</a:t>
+                      </a:r>
+                    </a:p>
+                  </a:txBody>
+                  <a:tcPr marL="73152" marR="73152" marT="27432" marB="27432" anchor="ctr">
+                    <a:solidFill>
+                      <a:srgbClr val="FCFCFB"/>
+                    </a:solidFill>
+                  </a:tcPr>
+                </a:tc>
+                <a:tc>
+                  <a:txBody>
+                    <a:bodyPr/>
+                    <a:lstStyle/>
+                    <a:p>
+                      <a:pPr algn="ctr"/>
+                      <a:r>
+                        <a:rPr sz="1200" b="0">
+                          <a:solidFill>
+                            <a:srgbClr val="0B0B0B"/>
+                          </a:solidFill>
+                          <a:latin typeface="Helvetica Neue"/>
+                        </a:rPr>
+                        <a:t>-0.1821</a:t>
+                      </a:r>
+                    </a:p>
+                  </a:txBody>
+                  <a:tcPr marL="73152" marR="73152" marT="27432" marB="27432" anchor="ctr">
+                    <a:solidFill>
+                      <a:srgbClr val="FCFCFB"/>
+                    </a:solidFill>
+                  </a:tcPr>
+                </a:tc>
+                <a:tc>
+                  <a:txBody>
+                    <a:bodyPr/>
+                    <a:lstStyle/>
+                    <a:p>
+                      <a:pPr algn="ctr"/>
+                      <a:r>
+                        <a:rPr sz="1200" b="0">
+                          <a:solidFill>
+                            <a:srgbClr val="0B0B0B"/>
+                          </a:solidFill>
+                          <a:latin typeface="Helvetica Neue"/>
+                        </a:rPr>
+                        <a:t>-0.201 to -0.163</a:t>
+                      </a:r>
+                    </a:p>
+                  </a:txBody>
+                  <a:tcPr marL="73152" marR="73152" marT="27432" marB="27432" anchor="ctr">
+                    <a:solidFill>
+                      <a:srgbClr val="FCFCFB"/>
+                    </a:solidFill>
+                  </a:tcPr>
+                </a:tc>
+                <a:tc>
+                  <a:txBody>
+                    <a:bodyPr/>
+                    <a:lstStyle/>
+                    <a:p>
+                      <a:pPr algn="ctr"/>
+                      <a:r>
+                        <a:rPr sz="1200" b="0">
+                          <a:solidFill>
+                            <a:srgbClr val="0B0B0B"/>
+                          </a:solidFill>
+                          <a:latin typeface="Helvetica Neue"/>
+                        </a:rPr>
+                        <a:t>163</a:t>
+                      </a:r>
+                    </a:p>
+                  </a:txBody>
+                  <a:tcPr marL="73152" marR="73152" marT="27432" marB="27432" anchor="ctr">
+                    <a:solidFill>
+                      <a:srgbClr val="FCFCFB"/>
+                    </a:solidFill>
+                  </a:tcPr>
+                </a:tc>
+                <a:tc>
+                  <a:txBody>
+                    <a:bodyPr/>
+                    <a:lstStyle/>
+                    <a:p>
+                      <a:pPr algn="ctr"/>
+                      <a:r>
+                        <a:rPr sz="1200" b="0">
+                          <a:solidFill>
+                            <a:srgbClr val="0B0B0B"/>
+                          </a:solidFill>
+                          <a:latin typeface="Helvetica Neue"/>
+                        </a:rPr>
+                        <a:t>682</a:t>
+                      </a:r>
+                    </a:p>
+                  </a:txBody>
+                  <a:tcPr marL="73152" marR="73152" marT="27432" marB="27432" anchor="ctr">
+                    <a:solidFill>
+                      <a:srgbClr val="FCFCFB"/>
+                    </a:solidFill>
+                  </a:tcPr>
+                </a:tc>
+                <a:tc>
+                  <a:txBody>
+                    <a:bodyPr/>
+                    <a:lstStyle/>
+                    <a:p>
+                      <a:pPr algn="ctr"/>
+                      <a:r>
+                        <a:rPr sz="1200" b="0">
+                          <a:solidFill>
+                            <a:srgbClr val="0B0B0B"/>
+                          </a:solidFill>
+                          <a:latin typeface="Helvetica Neue"/>
+                        </a:rPr>
+                        <a:t>&lt; 0.0001</a:t>
+                      </a:r>
+                    </a:p>
+                  </a:txBody>
+                  <a:tcPr marL="73152" marR="73152" marT="27432" marB="27432" anchor="ctr">
+                    <a:solidFill>
+                      <a:srgbClr val="FCFCFB"/>
+                    </a:solidFill>
+                  </a:tcPr>
+                </a:tc>
+                <a:tc>
+                  <a:txBody>
+                    <a:bodyPr/>
+                    <a:lstStyle/>
+                    <a:p>
+                      <a:pPr algn="ctr"/>
+                      <a:r>
+                        <a:rPr sz="1200" b="0">
+                          <a:solidFill>
+                            <a:srgbClr val="0B0B0B"/>
+                          </a:solidFill>
+                          <a:latin typeface="Helvetica Neue"/>
+                        </a:rPr>
+                        <a:t>significant</a:t>
+                      </a:r>
+                    </a:p>
+                  </a:txBody>
+                  <a:tcPr marL="73152" marR="73152" marT="27432" marB="27432" anchor="ctr">
+                    <a:solidFill>
+                      <a:srgbClr val="FCFCFB"/>
+                    </a:solidFill>
+                  </a:tcPr>
+                </a:tc>
+              </a:tr>
+              <a:tr h="402336">
+                <a:tc>
+                  <a:txBody>
+                    <a:bodyPr/>
+                    <a:lstStyle/>
+                    <a:p>
+                      <a:pPr algn="l"/>
+                      <a:r>
+                        <a:rPr sz="1200" b="0">
+                          <a:solidFill>
+                            <a:srgbClr val="0B0B0B"/>
+                          </a:solidFill>
+                          <a:latin typeface="Helvetica Neue"/>
+                        </a:rPr>
+                        <a:t>Llama-3.2-3B vs Ministral-8B</a:t>
+                      </a:r>
+                    </a:p>
+                  </a:txBody>
+                  <a:tcPr marL="73152" marR="73152" marT="27432" marB="27432" anchor="ctr">
+                    <a:solidFill>
+                      <a:srgbClr val="FCFCFB"/>
+                    </a:solidFill>
+                  </a:tcPr>
+                </a:tc>
+                <a:tc>
+                  <a:txBody>
+                    <a:bodyPr/>
+                    <a:lstStyle/>
+                    <a:p>
+                      <a:pPr algn="ctr"/>
+                      <a:r>
+                        <a:rPr sz="1200" b="0">
+                          <a:solidFill>
+                            <a:srgbClr val="0B0B0B"/>
+                          </a:solidFill>
+                          <a:latin typeface="Helvetica Neue"/>
+                        </a:rPr>
+                        <a:t>-0.2463</a:t>
+                      </a:r>
+                    </a:p>
+                  </a:txBody>
+                  <a:tcPr marL="73152" marR="73152" marT="27432" marB="27432" anchor="ctr">
+                    <a:solidFill>
+                      <a:srgbClr val="FCFCFB"/>
+                    </a:solidFill>
+                  </a:tcPr>
+                </a:tc>
+                <a:tc>
+                  <a:txBody>
+                    <a:bodyPr/>
+                    <a:lstStyle/>
+                    <a:p>
+                      <a:pPr algn="ctr"/>
+                      <a:r>
+                        <a:rPr sz="1200" b="0">
+                          <a:solidFill>
+                            <a:srgbClr val="0B0B0B"/>
+                          </a:solidFill>
+                          <a:latin typeface="Helvetica Neue"/>
+                        </a:rPr>
+                        <a:t>-0.266 to -0.227</a:t>
+                      </a:r>
+                    </a:p>
+                  </a:txBody>
+                  <a:tcPr marL="73152" marR="73152" marT="27432" marB="27432" anchor="ctr">
+                    <a:solidFill>
+                      <a:srgbClr val="FCFCFB"/>
+                    </a:solidFill>
+                  </a:tcPr>
+                </a:tc>
+                <a:tc>
+                  <a:txBody>
+                    <a:bodyPr/>
+                    <a:lstStyle/>
+                    <a:p>
+                      <a:pPr algn="ctr"/>
+                      <a:r>
+                        <a:rPr sz="1200" b="0">
+                          <a:solidFill>
+                            <a:srgbClr val="0B0B0B"/>
+                          </a:solidFill>
+                          <a:latin typeface="Helvetica Neue"/>
+                        </a:rPr>
+                        <a:t>136</a:t>
+                      </a:r>
+                    </a:p>
+                  </a:txBody>
+                  <a:tcPr marL="73152" marR="73152" marT="27432" marB="27432" anchor="ctr">
+                    <a:solidFill>
+                      <a:srgbClr val="FCFCFB"/>
+                    </a:solidFill>
+                  </a:tcPr>
+                </a:tc>
+                <a:tc>
+                  <a:txBody>
+                    <a:bodyPr/>
+                    <a:lstStyle/>
+                    <a:p>
+                      <a:pPr algn="ctr"/>
+                      <a:r>
+                        <a:rPr sz="1200" b="0">
+                          <a:solidFill>
+                            <a:srgbClr val="0B0B0B"/>
+                          </a:solidFill>
+                          <a:latin typeface="Helvetica Neue"/>
+                        </a:rPr>
+                        <a:t>838</a:t>
+                      </a:r>
+                    </a:p>
+                  </a:txBody>
+                  <a:tcPr marL="73152" marR="73152" marT="27432" marB="27432" anchor="ctr">
+                    <a:solidFill>
+                      <a:srgbClr val="FCFCFB"/>
+                    </a:solidFill>
+                  </a:tcPr>
+                </a:tc>
+                <a:tc>
+                  <a:txBody>
+                    <a:bodyPr/>
+                    <a:lstStyle/>
+                    <a:p>
+                      <a:pPr algn="ctr"/>
+                      <a:r>
+                        <a:rPr sz="1200" b="0">
+                          <a:solidFill>
+                            <a:srgbClr val="0B0B0B"/>
+                          </a:solidFill>
+                          <a:latin typeface="Helvetica Neue"/>
+                        </a:rPr>
+                        <a:t>&lt; 0.0001</a:t>
+                      </a:r>
+                    </a:p>
+                  </a:txBody>
+                  <a:tcPr marL="73152" marR="73152" marT="27432" marB="27432" anchor="ctr">
+                    <a:solidFill>
+                      <a:srgbClr val="FCFCFB"/>
+                    </a:solidFill>
+                  </a:tcPr>
+                </a:tc>
+                <a:tc>
+                  <a:txBody>
+                    <a:bodyPr/>
+                    <a:lstStyle/>
+                    <a:p>
+                      <a:pPr algn="ctr"/>
+                      <a:r>
+                        <a:rPr sz="1200" b="0">
+                          <a:solidFill>
+                            <a:srgbClr val="0B0B0B"/>
+                          </a:solidFill>
+                          <a:latin typeface="Helvetica Neue"/>
+                        </a:rPr>
+                        <a:t>significant</a:t>
+                      </a:r>
+                    </a:p>
+                  </a:txBody>
+                  <a:tcPr marL="73152" marR="73152" marT="27432" marB="27432" anchor="ctr">
+                    <a:solidFill>
+                      <a:srgbClr val="FCFCFB"/>
+                    </a:solidFill>
+                  </a:tcPr>
+                </a:tc>
+              </a:tr>
+            </a:tbl>
+          </a:graphicData>
+        </a:graphic>
+      </p:graphicFrame>
+      <p:sp>
+        <p:nvSpPr>
+          <p:cNvPr id="10" name="TextBox 9"/>
+          <p:cNvSpPr txBox="1"/>
+          <p:nvPr/>
+        </p:nvSpPr>
+        <p:spPr>
+          <a:xfrm>
+            <a:off x="548640" y="3977639"/>
+            <a:ext cx="2743200" cy="274320"/>
+          </a:xfrm>
+          <a:prstGeom prst="rect">
+            <a:avLst/>
+          </a:prstGeom>
+          <a:noFill/>
+        </p:spPr>
+        <p:txBody>
+          <a:bodyPr wrap="square">
+            <a:spAutoFit/>
+          </a:bodyPr>
+          <a:lstStyle/>
+          <a:p>
+            <a:pPr algn="l">
+              <a:lnSpc>
+                <a:spcPct val="115000"/>
+              </a:lnSpc>
+            </a:pPr>
+            <a:r>
+              <a:rPr sz="1100" b="1" i="0">
+                <a:solidFill>
+                  <a:srgbClr val="898781"/>
+                </a:solidFill>
+                <a:latin typeface="Helvetica Neue"/>
+              </a:rPr>
+              <a:t>READING IT</a:t>
+            </a:r>
+          </a:p>
+        </p:txBody>
+      </p:sp>
+      <p:sp>
+        <p:nvSpPr>
+          <p:cNvPr id="11" name="TextBox 10"/>
+          <p:cNvSpPr txBox="1"/>
+          <p:nvPr/>
+        </p:nvSpPr>
+        <p:spPr>
+          <a:xfrm>
+            <a:off x="548640" y="4270248"/>
+            <a:ext cx="11064240" cy="1737360"/>
+          </a:xfrm>
+          <a:prstGeom prst="rect">
+            <a:avLst/>
+          </a:prstGeom>
+          <a:noFill/>
+        </p:spPr>
+        <p:txBody>
+          <a:bodyPr wrap="square">
+            <a:spAutoFit/>
+          </a:bodyPr>
+          <a:lstStyle/>
+          <a:p>
+            <a:pPr algn="l">
+              <a:lnSpc>
+                <a:spcPct val="135000"/>
+              </a:lnSpc>
+              <a:spcAft>
+                <a:spcPts val="700"/>
+              </a:spcAft>
+            </a:pPr>
+            <a:r>
+              <a:rPr sz="1300" b="0" i="0">
+                <a:solidFill>
+                  <a:srgbClr val="52514E"/>
+                </a:solidFill>
+                <a:latin typeface="Helvetica Neue"/>
+              </a:rPr>
+              <a:t>—  Every gap survives Holm correction: the ranking is not a sampling artefact.</a:t>
+            </a:r>
+          </a:p>
+          <a:p>
+            <a:pPr algn="l">
+              <a:lnSpc>
+                <a:spcPct val="135000"/>
+              </a:lnSpc>
+              <a:spcAft>
+                <a:spcPts val="700"/>
+              </a:spcAft>
+            </a:pPr>
+            <a:r>
+              <a:rPr sz="1300" b="0" i="0">
+                <a:solidFill>
+                  <a:srgbClr val="52514E"/>
+                </a:solidFill>
+                <a:latin typeface="Helvetica Neue"/>
+              </a:rPr>
+              <a:t>—  Only discordant items count. 'Only A' and 'Only B' are the items one model got right and the other did not - items both answered the same way carry no information about which is better.</a:t>
+            </a:r>
+          </a:p>
+          <a:p>
+            <a:pPr algn="l">
+              <a:lnSpc>
+                <a:spcPct val="135000"/>
+              </a:lnSpc>
+              <a:spcAft>
+                <a:spcPts val="700"/>
+              </a:spcAft>
+            </a:pPr>
+            <a:r>
+              <a:rPr sz="1300" b="0" i="0">
+                <a:solidFill>
+                  <a:srgbClr val="52514E"/>
+                </a:solidFill>
+                <a:latin typeface="Helvetica Neue"/>
+              </a:rPr>
+              <a:t>—  An ideal per-item router would reach 87.8% against 79.4% for the best single model - 8.4 points of headroom, with 12.2% of items defeating all three.</a:t>
+            </a:r>
+          </a:p>
+        </p:txBody>
+      </p:sp>
+    </p:spTree>
+  </p:cSld>
+  <p:clrMapOvr>
+    <a:masterClrMapping/>
+  </p:clrMapOvr>
+</p:sld>
+</file>
+
+<file path=ppt/slides/slide29.xml><?xml version="1.0" encoding="utf-8"?>
+<p:sld xmlns:a="http://schemas.openxmlformats.org/drawingml/2006/main" xmlns:p="http://schemas.openxmlformats.org/presentationml/2006/main" xmlns:r="http://schemas.openxmlformats.org/officeDocument/2006/relationships">
+  <p:cSld>
+    <p:spTree>
+      <p:nvGrpSpPr>
+        <p:cNvPr id="1" name=""/>
+        <p:cNvGrpSpPr/>
+        <p:nvPr/>
+      </p:nvGrpSpPr>
+      <p:grpSpPr/>
+      <p:sp>
+        <p:nvSpPr>
+          <p:cNvPr id="2" name="Rectangle 1"/>
+          <p:cNvSpPr/>
+          <p:nvPr/>
+        </p:nvSpPr>
+        <p:spPr>
+          <a:xfrm>
+            <a:off x="0" y="0"/>
+            <a:ext cx="12191695" cy="6858000"/>
+          </a:xfrm>
+          <a:prstGeom prst="rect">
+            <a:avLst/>
+          </a:prstGeom>
+          <a:solidFill>
+            <a:srgbClr val="FCFCFB"/>
+          </a:solidFill>
+          <a:ln>
+            <a:noFill/>
+          </a:ln>
+          <a:effectLst/>
+        </p:spPr>
+        <p:style>
+          <a:lnRef idx="1">
+            <a:schemeClr val="accent1"/>
+          </a:lnRef>
+          <a:fillRef idx="3">
+            <a:schemeClr val="accent1"/>
+          </a:fillRef>
+          <a:effectRef idx="2">
+            <a:schemeClr val="accent1"/>
+          </a:effectRef>
+          <a:fontRef idx="minor">
+            <a:schemeClr val="lt1"/>
+          </a:fontRef>
+        </p:style>
+        <p:txBody>
+          <a:bodyPr rtlCol="0" anchor="ctr"/>
+          <a:lstStyle/>
+          <a:p>
+            <a:pPr algn="ctr"/>
+          </a:p>
+        </p:txBody>
+      </p:sp>
+      <p:sp>
+        <p:nvSpPr>
+          <p:cNvPr id="3" name="TextBox 2"/>
+          <p:cNvSpPr txBox="1"/>
+          <p:nvPr/>
+        </p:nvSpPr>
+        <p:spPr>
+          <a:xfrm>
+            <a:off x="548640" y="6510528"/>
+            <a:ext cx="5486400" cy="274320"/>
+          </a:xfrm>
+          <a:prstGeom prst="rect">
+            <a:avLst/>
+          </a:prstGeom>
+          <a:noFill/>
+        </p:spPr>
+        <p:txBody>
+          <a:bodyPr wrap="square">
+            <a:spAutoFit/>
+          </a:bodyPr>
+          <a:lstStyle/>
+          <a:p>
+            <a:pPr algn="l">
+              <a:lnSpc>
+                <a:spcPct val="115000"/>
+              </a:lnSpc>
+            </a:pPr>
+            <a:r>
+              <a:rPr sz="900" b="0" i="0">
+                <a:solidFill>
+                  <a:srgbClr val="898781"/>
+                </a:solidFill>
+                <a:latin typeface="Helvetica Neue"/>
+              </a:rPr>
+              <a:t>LAMBADA &amp; MMLU Benchmark Evaluation — Extended</a:t>
+            </a:r>
+          </a:p>
+        </p:txBody>
+      </p:sp>
+      <p:sp>
+        <p:nvSpPr>
+          <p:cNvPr id="4" name="TextBox 3"/>
+          <p:cNvSpPr txBox="1"/>
+          <p:nvPr/>
+        </p:nvSpPr>
+        <p:spPr>
+          <a:xfrm>
+            <a:off x="11338560" y="6510528"/>
+            <a:ext cx="457200" cy="274320"/>
+          </a:xfrm>
+          <a:prstGeom prst="rect">
+            <a:avLst/>
+          </a:prstGeom>
+          <a:noFill/>
+        </p:spPr>
+        <p:txBody>
+          <a:bodyPr wrap="square">
+            <a:spAutoFit/>
+          </a:bodyPr>
+          <a:lstStyle/>
+          <a:p>
+            <a:pPr algn="r">
+              <a:lnSpc>
+                <a:spcPct val="115000"/>
+              </a:lnSpc>
+            </a:pPr>
+            <a:r>
+              <a:rPr sz="900" b="0" i="0">
+                <a:solidFill>
+                  <a:srgbClr val="898781"/>
+                </a:solidFill>
+                <a:latin typeface="Helvetica Neue"/>
+              </a:rPr>
+              <a:t>28</a:t>
+            </a:r>
+          </a:p>
+        </p:txBody>
+      </p:sp>
+      <p:sp>
+        <p:nvSpPr>
+          <p:cNvPr id="5" name="TextBox 4"/>
+          <p:cNvSpPr txBox="1"/>
+          <p:nvPr/>
+        </p:nvSpPr>
+        <p:spPr>
+          <a:xfrm>
+            <a:off x="548640" y="320040"/>
+            <a:ext cx="10058400" cy="320040"/>
+          </a:xfrm>
+          <a:prstGeom prst="rect">
+            <a:avLst/>
+          </a:prstGeom>
+          <a:noFill/>
+        </p:spPr>
+        <p:txBody>
+          <a:bodyPr wrap="square">
+            <a:spAutoFit/>
+          </a:bodyPr>
+          <a:lstStyle/>
+          <a:p>
+            <a:pPr algn="l">
+              <a:lnSpc>
+                <a:spcPct val="115000"/>
+              </a:lnSpc>
+            </a:pPr>
+            <a:r>
+              <a:rPr sz="1250" b="1" i="0">
+                <a:solidFill>
+                  <a:srgbClr val="2A78D6"/>
+                </a:solidFill>
+                <a:latin typeface="Helvetica Neue"/>
+              </a:rPr>
+              <a:t>ANALYSIS</a:t>
+            </a:r>
+          </a:p>
+        </p:txBody>
+      </p:sp>
+      <p:sp>
+        <p:nvSpPr>
+          <p:cNvPr id="6" name="TextBox 5"/>
+          <p:cNvSpPr txBox="1"/>
+          <p:nvPr/>
+        </p:nvSpPr>
+        <p:spPr>
+          <a:xfrm>
+            <a:off x="548640" y="914400"/>
+            <a:ext cx="11064240" cy="640080"/>
+          </a:xfrm>
+          <a:prstGeom prst="rect">
+            <a:avLst/>
+          </a:prstGeom>
+          <a:noFill/>
+        </p:spPr>
+        <p:txBody>
+          <a:bodyPr wrap="square">
+            <a:spAutoFit/>
+          </a:bodyPr>
+          <a:lstStyle/>
+          <a:p>
+            <a:pPr algn="l">
+              <a:lnSpc>
+                <a:spcPct val="115000"/>
+              </a:lnSpc>
+            </a:pPr>
+            <a:r>
+              <a:rPr sz="2600" b="1" i="0">
+                <a:solidFill>
+                  <a:srgbClr val="0B0B0B"/>
+                </a:solidFill>
+                <a:latin typeface="Helvetica Neue"/>
+              </a:rPr>
+              <a:t>LAMBADA — paired significance</a:t>
+            </a:r>
+          </a:p>
+        </p:txBody>
+      </p:sp>
+      <p:cxnSp>
+        <p:nvCxnSpPr>
+          <p:cNvPr id="7" name="Connector 6"/>
+          <p:cNvCxnSpPr/>
+          <p:nvPr/>
+        </p:nvCxnSpPr>
+        <p:spPr>
+          <a:xfrm>
+            <a:off x="548640" y="1508760"/>
+            <a:ext cx="11091672" cy="0"/>
+          </a:xfrm>
+          <a:prstGeom prst="line">
+            <a:avLst/>
+          </a:prstGeom>
+          <a:ln w="9525">
+            <a:solidFill>
+              <a:srgbClr val="E1E0D9"/>
+            </a:solidFill>
+          </a:ln>
+        </p:spPr>
+        <p:style>
+          <a:lnRef idx="2">
+            <a:schemeClr val="accent1"/>
+          </a:lnRef>
+          <a:fillRef idx="0">
+            <a:schemeClr val="accent1"/>
+          </a:fillRef>
+          <a:effectRef idx="1">
+            <a:schemeClr val="accent1"/>
+          </a:effectRef>
+          <a:fontRef idx="minor">
+            <a:schemeClr val="tx1"/>
+          </a:fontRef>
+        </p:style>
+      </p:cxnSp>
+      <p:sp>
+        <p:nvSpPr>
+          <p:cNvPr id="8" name="TextBox 7"/>
+          <p:cNvSpPr txBox="1"/>
+          <p:nvPr/>
+        </p:nvSpPr>
+        <p:spPr>
+          <a:xfrm>
+            <a:off x="548640" y="1600200"/>
+            <a:ext cx="11064240" cy="365760"/>
+          </a:xfrm>
+          <a:prstGeom prst="rect">
+            <a:avLst/>
+          </a:prstGeom>
+          <a:noFill/>
+        </p:spPr>
+        <p:txBody>
+          <a:bodyPr wrap="square">
+            <a:spAutoFit/>
+          </a:bodyPr>
+          <a:lstStyle/>
+          <a:p>
+            <a:pPr algn="l">
+              <a:lnSpc>
+                <a:spcPct val="115000"/>
+              </a:lnSpc>
+            </a:pPr>
+            <a:r>
+              <a:rPr sz="1400" b="1" i="0">
+                <a:solidFill>
+                  <a:srgbClr val="2A78D6"/>
+                </a:solidFill>
+                <a:latin typeface="Helvetica Neue"/>
+              </a:rPr>
+              <a:t>Cochran's Q = 173.547  (df 2),  p &lt; 0.0001   —   the models differ; pairwise tests follow</a:t>
+            </a:r>
+          </a:p>
+        </p:txBody>
+      </p:sp>
+      <p:graphicFrame>
+        <p:nvGraphicFramePr>
+          <p:cNvPr id="9" name="Table 8"/>
+          <p:cNvGraphicFramePr>
+            <a:graphicFrameLocks noGrp="1"/>
+          </p:cNvGraphicFramePr>
+          <p:nvPr/>
+        </p:nvGraphicFramePr>
+        <p:xfrm>
+          <a:off x="548640" y="2148840"/>
+          <a:ext cx="11064237" cy="1609344"/>
+        </p:xfrm>
+        <a:graphic>
+          <a:graphicData uri="http://schemas.openxmlformats.org/drawingml/2006/table">
+            <a:tbl>
+              <a:tblPr firstRow="1" bandRow="1">
+                <a:tableStyleId>{5C22544A-7EE6-4342-B048-85BDC9FD1C3A}</a:tableStyleId>
+              </a:tblPr>
+              <a:tblGrid>
+                <a:gridCol w="3319272"/>
+                <a:gridCol w="1327708"/>
+                <a:gridCol w="1991563"/>
+                <a:gridCol w="885139"/>
+                <a:gridCol w="885139"/>
+                <a:gridCol w="1327708"/>
+                <a:gridCol w="1327708"/>
+              </a:tblGrid>
+              <a:tr h="402336">
+                <a:tc>
+                  <a:txBody>
+                    <a:bodyPr/>
+                    <a:lstStyle/>
+                    <a:p>
+                      <a:pPr algn="l"/>
+                      <a:r>
+                        <a:rPr sz="1200" b="1">
+                          <a:solidFill>
+                            <a:srgbClr val="FFFFFF"/>
+                          </a:solidFill>
+                          <a:latin typeface="Helvetica Neue"/>
+                        </a:rPr>
+                        <a:t>Pair</a:t>
+                      </a:r>
+                    </a:p>
+                  </a:txBody>
+                  <a:tcPr marL="73152" marR="73152" marT="27432" marB="27432" anchor="ctr">
+                    <a:solidFill>
+                      <a:srgbClr val="0B0B0B"/>
+                    </a:solidFill>
+                  </a:tcPr>
+                </a:tc>
+                <a:tc>
+                  <a:txBody>
+                    <a:bodyPr/>
+                    <a:lstStyle/>
+                    <a:p>
+                      <a:pPr algn="ctr"/>
+                      <a:r>
+                        <a:rPr sz="1200" b="1">
+                          <a:solidFill>
+                            <a:srgbClr val="FFFFFF"/>
+                          </a:solidFill>
+                          <a:latin typeface="Helvetica Neue"/>
+                        </a:rPr>
+                        <a:t>Delta acc.</a:t>
+                      </a:r>
+                    </a:p>
+                  </a:txBody>
+                  <a:tcPr marL="73152" marR="73152" marT="27432" marB="27432" anchor="ctr">
+                    <a:solidFill>
+                      <a:srgbClr val="0B0B0B"/>
+                    </a:solidFill>
+                  </a:tcPr>
+                </a:tc>
+                <a:tc>
+                  <a:txBody>
+                    <a:bodyPr/>
+                    <a:lstStyle/>
+                    <a:p>
+                      <a:pPr algn="ctr"/>
+                      <a:r>
+                        <a:rPr sz="1200" b="1">
+                          <a:solidFill>
+                            <a:srgbClr val="FFFFFF"/>
+                          </a:solidFill>
+                          <a:latin typeface="Helvetica Neue"/>
+                        </a:rPr>
+                        <a:t>95% CI</a:t>
+                      </a:r>
+                    </a:p>
+                  </a:txBody>
+                  <a:tcPr marL="73152" marR="73152" marT="27432" marB="27432" anchor="ctr">
+                    <a:solidFill>
+                      <a:srgbClr val="0B0B0B"/>
+                    </a:solidFill>
+                  </a:tcPr>
+                </a:tc>
+                <a:tc>
+                  <a:txBody>
+                    <a:bodyPr/>
+                    <a:lstStyle/>
+                    <a:p>
+                      <a:pPr algn="ctr"/>
+                      <a:r>
+                        <a:rPr sz="1200" b="1">
+                          <a:solidFill>
+                            <a:srgbClr val="FFFFFF"/>
+                          </a:solidFill>
+                          <a:latin typeface="Helvetica Neue"/>
+                        </a:rPr>
+                        <a:t>Only A</a:t>
+                      </a:r>
+                    </a:p>
+                  </a:txBody>
+                  <a:tcPr marL="73152" marR="73152" marT="27432" marB="27432" anchor="ctr">
+                    <a:solidFill>
+                      <a:srgbClr val="0B0B0B"/>
+                    </a:solidFill>
+                  </a:tcPr>
+                </a:tc>
+                <a:tc>
+                  <a:txBody>
+                    <a:bodyPr/>
+                    <a:lstStyle/>
+                    <a:p>
+                      <a:pPr algn="ctr"/>
+                      <a:r>
+                        <a:rPr sz="1200" b="1">
+                          <a:solidFill>
+                            <a:srgbClr val="FFFFFF"/>
+                          </a:solidFill>
+                          <a:latin typeface="Helvetica Neue"/>
+                        </a:rPr>
+                        <a:t>Only B</a:t>
+                      </a:r>
+                    </a:p>
+                  </a:txBody>
+                  <a:tcPr marL="73152" marR="73152" marT="27432" marB="27432" anchor="ctr">
+                    <a:solidFill>
+                      <a:srgbClr val="0B0B0B"/>
+                    </a:solidFill>
+                  </a:tcPr>
+                </a:tc>
+                <a:tc>
+                  <a:txBody>
+                    <a:bodyPr/>
+                    <a:lstStyle/>
+                    <a:p>
+                      <a:pPr algn="ctr"/>
+                      <a:r>
+                        <a:rPr sz="1200" b="1">
+                          <a:solidFill>
+                            <a:srgbClr val="FFFFFF"/>
+                          </a:solidFill>
+                          <a:latin typeface="Helvetica Neue"/>
+                        </a:rPr>
+                        <a:t>p (Holm)</a:t>
+                      </a:r>
+                    </a:p>
+                  </a:txBody>
+                  <a:tcPr marL="73152" marR="73152" marT="27432" marB="27432" anchor="ctr">
+                    <a:solidFill>
+                      <a:srgbClr val="0B0B0B"/>
+                    </a:solidFill>
+                  </a:tcPr>
+                </a:tc>
+                <a:tc>
+                  <a:txBody>
+                    <a:bodyPr/>
+                    <a:lstStyle/>
+                    <a:p>
+                      <a:pPr algn="ctr"/>
+                      <a:r>
+                        <a:rPr sz="1200" b="1">
+                          <a:solidFill>
+                            <a:srgbClr val="FFFFFF"/>
+                          </a:solidFill>
+                          <a:latin typeface="Helvetica Neue"/>
+                        </a:rPr>
+                        <a:t>Verdict</a:t>
+                      </a:r>
+                    </a:p>
+                  </a:txBody>
+                  <a:tcPr marL="73152" marR="73152" marT="27432" marB="27432" anchor="ctr">
+                    <a:solidFill>
+                      <a:srgbClr val="0B0B0B"/>
+                    </a:solidFill>
+                  </a:tcPr>
+                </a:tc>
+              </a:tr>
+              <a:tr h="402336">
+                <a:tc>
+                  <a:txBody>
+                    <a:bodyPr/>
+                    <a:lstStyle/>
+                    <a:p>
+                      <a:pPr algn="l"/>
+                      <a:r>
+                        <a:rPr sz="1200" b="0">
+                          <a:solidFill>
+                            <a:srgbClr val="0B0B0B"/>
+                          </a:solidFill>
+                          <a:latin typeface="Helvetica Neue"/>
+                        </a:rPr>
+                        <a:t>Gemma-3-4B vs Llama-3.2-3B</a:t>
+                      </a:r>
+                    </a:p>
+                  </a:txBody>
+                  <a:tcPr marL="73152" marR="73152" marT="27432" marB="27432" anchor="ctr">
+                    <a:solidFill>
+                      <a:srgbClr val="FCFCFB"/>
+                    </a:solidFill>
+                  </a:tcPr>
+                </a:tc>
+                <a:tc>
+                  <a:txBody>
+                    <a:bodyPr/>
+                    <a:lstStyle/>
+                    <a:p>
+                      <a:pPr algn="ctr"/>
+                      <a:r>
+                        <a:rPr sz="1200" b="0">
+                          <a:solidFill>
+                            <a:srgbClr val="0B0B0B"/>
+                          </a:solidFill>
+                          <a:latin typeface="Helvetica Neue"/>
+                        </a:rPr>
+                        <a:t>-0.0440</a:t>
+                      </a:r>
+                    </a:p>
+                  </a:txBody>
+                  <a:tcPr marL="73152" marR="73152" marT="27432" marB="27432" anchor="ctr">
+                    <a:solidFill>
+                      <a:srgbClr val="FCFCFB"/>
+                    </a:solidFill>
+                  </a:tcPr>
+                </a:tc>
+                <a:tc>
+                  <a:txBody>
+                    <a:bodyPr/>
+                    <a:lstStyle/>
+                    <a:p>
+                      <a:pPr algn="ctr"/>
+                      <a:r>
+                        <a:rPr sz="1200" b="0">
+                          <a:solidFill>
+                            <a:srgbClr val="0B0B0B"/>
+                          </a:solidFill>
+                          <a:latin typeface="Helvetica Neue"/>
+                        </a:rPr>
+                        <a:t>-0.073 to -0.015</a:t>
+                      </a:r>
+                    </a:p>
+                  </a:txBody>
+                  <a:tcPr marL="73152" marR="73152" marT="27432" marB="27432" anchor="ctr">
+                    <a:solidFill>
+                      <a:srgbClr val="FCFCFB"/>
+                    </a:solidFill>
+                  </a:tcPr>
+                </a:tc>
+                <a:tc>
+                  <a:txBody>
+                    <a:bodyPr/>
+                    <a:lstStyle/>
+                    <a:p>
+                      <a:pPr algn="ctr"/>
+                      <a:r>
+                        <a:rPr sz="1200" b="0">
+                          <a:solidFill>
+                            <a:srgbClr val="0B0B0B"/>
+                          </a:solidFill>
+                          <a:latin typeface="Helvetica Neue"/>
+                        </a:rPr>
+                        <a:t>89</a:t>
+                      </a:r>
+                    </a:p>
+                  </a:txBody>
+                  <a:tcPr marL="73152" marR="73152" marT="27432" marB="27432" anchor="ctr">
+                    <a:solidFill>
+                      <a:srgbClr val="FCFCFB"/>
+                    </a:solidFill>
+                  </a:tcPr>
+                </a:tc>
+                <a:tc>
+                  <a:txBody>
+                    <a:bodyPr/>
+                    <a:lstStyle/>
+                    <a:p>
+                      <a:pPr algn="ctr"/>
+                      <a:r>
+                        <a:rPr sz="1200" b="0">
+                          <a:solidFill>
+                            <a:srgbClr val="0B0B0B"/>
+                          </a:solidFill>
+                          <a:latin typeface="Helvetica Neue"/>
+                        </a:rPr>
+                        <a:t>133</a:t>
+                      </a:r>
+                    </a:p>
+                  </a:txBody>
+                  <a:tcPr marL="73152" marR="73152" marT="27432" marB="27432" anchor="ctr">
+                    <a:solidFill>
+                      <a:srgbClr val="FCFCFB"/>
+                    </a:solidFill>
+                  </a:tcPr>
+                </a:tc>
+                <a:tc>
+                  <a:txBody>
+                    <a:bodyPr/>
+                    <a:lstStyle/>
+                    <a:p>
+                      <a:pPr algn="ctr"/>
+                      <a:r>
+                        <a:rPr sz="1200" b="0">
+                          <a:solidFill>
+                            <a:srgbClr val="0B0B0B"/>
+                          </a:solidFill>
+                          <a:latin typeface="Helvetica Neue"/>
+                        </a:rPr>
+                        <a:t>0.0039</a:t>
+                      </a:r>
+                    </a:p>
+                  </a:txBody>
+                  <a:tcPr marL="73152" marR="73152" marT="27432" marB="27432" anchor="ctr">
+                    <a:solidFill>
+                      <a:srgbClr val="FCFCFB"/>
+                    </a:solidFill>
+                  </a:tcPr>
+                </a:tc>
+                <a:tc>
+                  <a:txBody>
+                    <a:bodyPr/>
+                    <a:lstStyle/>
+                    <a:p>
+                      <a:pPr algn="ctr"/>
+                      <a:r>
+                        <a:rPr sz="1200" b="0">
+                          <a:solidFill>
+                            <a:srgbClr val="0B0B0B"/>
+                          </a:solidFill>
+                          <a:latin typeface="Helvetica Neue"/>
+                        </a:rPr>
+                        <a:t>significant</a:t>
+                      </a:r>
+                    </a:p>
+                  </a:txBody>
+                  <a:tcPr marL="73152" marR="73152" marT="27432" marB="27432" anchor="ctr">
+                    <a:solidFill>
+                      <a:srgbClr val="FCFCFB"/>
+                    </a:solidFill>
+                  </a:tcPr>
+                </a:tc>
+              </a:tr>
+              <a:tr h="402336">
+                <a:tc>
+                  <a:txBody>
+                    <a:bodyPr/>
+                    <a:lstStyle/>
+                    <a:p>
+                      <a:pPr algn="l"/>
+                      <a:r>
+                        <a:rPr sz="1200" b="0">
+                          <a:solidFill>
+                            <a:srgbClr val="0B0B0B"/>
+                          </a:solidFill>
+                          <a:latin typeface="Helvetica Neue"/>
+                        </a:rPr>
+                        <a:t>Gemma-3-4B vs Ministral-8B</a:t>
+                      </a:r>
+                    </a:p>
+                  </a:txBody>
+                  <a:tcPr marL="73152" marR="73152" marT="27432" marB="27432" anchor="ctr">
+                    <a:solidFill>
+                      <a:srgbClr val="FCFCFB"/>
+                    </a:solidFill>
+                  </a:tcPr>
+                </a:tc>
+                <a:tc>
+                  <a:txBody>
+                    <a:bodyPr/>
+                    <a:lstStyle/>
+                    <a:p>
+                      <a:pPr algn="ctr"/>
+                      <a:r>
+                        <a:rPr sz="1200" b="0">
+                          <a:solidFill>
+                            <a:srgbClr val="0B0B0B"/>
+                          </a:solidFill>
+                          <a:latin typeface="Helvetica Neue"/>
+                        </a:rPr>
+                        <a:t>-0.2150</a:t>
+                      </a:r>
+                    </a:p>
+                  </a:txBody>
+                  <a:tcPr marL="73152" marR="73152" marT="27432" marB="27432" anchor="ctr">
+                    <a:solidFill>
+                      <a:srgbClr val="FCFCFB"/>
+                    </a:solidFill>
+                  </a:tcPr>
+                </a:tc>
+                <a:tc>
+                  <a:txBody>
+                    <a:bodyPr/>
+                    <a:lstStyle/>
+                    <a:p>
+                      <a:pPr algn="ctr"/>
+                      <a:r>
+                        <a:rPr sz="1200" b="0">
+                          <a:solidFill>
+                            <a:srgbClr val="0B0B0B"/>
+                          </a:solidFill>
+                          <a:latin typeface="Helvetica Neue"/>
+                        </a:rPr>
+                        <a:t>-0.248 to -0.182</a:t>
+                      </a:r>
+                    </a:p>
+                  </a:txBody>
+                  <a:tcPr marL="73152" marR="73152" marT="27432" marB="27432" anchor="ctr">
+                    <a:solidFill>
+                      <a:srgbClr val="FCFCFB"/>
+                    </a:solidFill>
+                  </a:tcPr>
+                </a:tc>
+                <a:tc>
+                  <a:txBody>
+                    <a:bodyPr/>
+                    <a:lstStyle/>
+                    <a:p>
+                      <a:pPr algn="ctr"/>
+                      <a:r>
+                        <a:rPr sz="1200" b="0">
+                          <a:solidFill>
+                            <a:srgbClr val="0B0B0B"/>
+                          </a:solidFill>
+                          <a:latin typeface="Helvetica Neue"/>
+                        </a:rPr>
+                        <a:t>58</a:t>
+                      </a:r>
+                    </a:p>
+                  </a:txBody>
+                  <a:tcPr marL="73152" marR="73152" marT="27432" marB="27432" anchor="ctr">
+                    <a:solidFill>
+                      <a:srgbClr val="FCFCFB"/>
+                    </a:solidFill>
+                  </a:tcPr>
+                </a:tc>
+                <a:tc>
+                  <a:txBody>
+                    <a:bodyPr/>
+                    <a:lstStyle/>
+                    <a:p>
+                      <a:pPr algn="ctr"/>
+                      <a:r>
+                        <a:rPr sz="1200" b="0">
+                          <a:solidFill>
+                            <a:srgbClr val="0B0B0B"/>
+                          </a:solidFill>
+                          <a:latin typeface="Helvetica Neue"/>
+                        </a:rPr>
+                        <a:t>273</a:t>
+                      </a:r>
+                    </a:p>
+                  </a:txBody>
+                  <a:tcPr marL="73152" marR="73152" marT="27432" marB="27432" anchor="ctr">
+                    <a:solidFill>
+                      <a:srgbClr val="FCFCFB"/>
+                    </a:solidFill>
+                  </a:tcPr>
+                </a:tc>
+                <a:tc>
+                  <a:txBody>
+                    <a:bodyPr/>
+                    <a:lstStyle/>
+                    <a:p>
+                      <a:pPr algn="ctr"/>
+                      <a:r>
+                        <a:rPr sz="1200" b="0">
+                          <a:solidFill>
+                            <a:srgbClr val="0B0B0B"/>
+                          </a:solidFill>
+                          <a:latin typeface="Helvetica Neue"/>
+                        </a:rPr>
+                        <a:t>&lt; 0.0001</a:t>
+                      </a:r>
+                    </a:p>
+                  </a:txBody>
+                  <a:tcPr marL="73152" marR="73152" marT="27432" marB="27432" anchor="ctr">
+                    <a:solidFill>
+                      <a:srgbClr val="FCFCFB"/>
+                    </a:solidFill>
+                  </a:tcPr>
+                </a:tc>
+                <a:tc>
+                  <a:txBody>
+                    <a:bodyPr/>
+                    <a:lstStyle/>
+                    <a:p>
+                      <a:pPr algn="ctr"/>
+                      <a:r>
+                        <a:rPr sz="1200" b="0">
+                          <a:solidFill>
+                            <a:srgbClr val="0B0B0B"/>
+                          </a:solidFill>
+                          <a:latin typeface="Helvetica Neue"/>
+                        </a:rPr>
+                        <a:t>significant</a:t>
+                      </a:r>
+                    </a:p>
+                  </a:txBody>
+                  <a:tcPr marL="73152" marR="73152" marT="27432" marB="27432" anchor="ctr">
+                    <a:solidFill>
+                      <a:srgbClr val="FCFCFB"/>
+                    </a:solidFill>
+                  </a:tcPr>
+                </a:tc>
+              </a:tr>
+              <a:tr h="402336">
+                <a:tc>
+                  <a:txBody>
+                    <a:bodyPr/>
+                    <a:lstStyle/>
+                    <a:p>
+                      <a:pPr algn="l"/>
+                      <a:r>
+                        <a:rPr sz="1200" b="0">
+                          <a:solidFill>
+                            <a:srgbClr val="0B0B0B"/>
+                          </a:solidFill>
+                          <a:latin typeface="Helvetica Neue"/>
+                        </a:rPr>
+                        <a:t>Llama-3.2-3B vs Ministral-8B</a:t>
+                      </a:r>
+                    </a:p>
+                  </a:txBody>
+                  <a:tcPr marL="73152" marR="73152" marT="27432" marB="27432" anchor="ctr">
+                    <a:solidFill>
+                      <a:srgbClr val="FCFCFB"/>
+                    </a:solidFill>
+                  </a:tcPr>
+                </a:tc>
+                <a:tc>
+                  <a:txBody>
+                    <a:bodyPr/>
+                    <a:lstStyle/>
+                    <a:p>
+                      <a:pPr algn="ctr"/>
+                      <a:r>
+                        <a:rPr sz="1200" b="0">
+                          <a:solidFill>
+                            <a:srgbClr val="0B0B0B"/>
+                          </a:solidFill>
+                          <a:latin typeface="Helvetica Neue"/>
+                        </a:rPr>
+                        <a:t>-0.1710</a:t>
+                      </a:r>
+                    </a:p>
+                  </a:txBody>
+                  <a:tcPr marL="73152" marR="73152" marT="27432" marB="27432" anchor="ctr">
+                    <a:solidFill>
+                      <a:srgbClr val="FCFCFB"/>
+                    </a:solidFill>
+                  </a:tcPr>
+                </a:tc>
+                <a:tc>
+                  <a:txBody>
+                    <a:bodyPr/>
+                    <a:lstStyle/>
+                    <a:p>
+                      <a:pPr algn="ctr"/>
+                      <a:r>
+                        <a:rPr sz="1200" b="0">
+                          <a:solidFill>
+                            <a:srgbClr val="0B0B0B"/>
+                          </a:solidFill>
+                          <a:latin typeface="Helvetica Neue"/>
+                        </a:rPr>
+                        <a:t>-0.205 to -0.137</a:t>
+                      </a:r>
+                    </a:p>
+                  </a:txBody>
+                  <a:tcPr marL="73152" marR="73152" marT="27432" marB="27432" anchor="ctr">
+                    <a:solidFill>
+                      <a:srgbClr val="FCFCFB"/>
+                    </a:solidFill>
+                  </a:tcPr>
+                </a:tc>
+                <a:tc>
+                  <a:txBody>
+                    <a:bodyPr/>
+                    <a:lstStyle/>
+                    <a:p>
+                      <a:pPr algn="ctr"/>
+                      <a:r>
+                        <a:rPr sz="1200" b="0">
+                          <a:solidFill>
+                            <a:srgbClr val="0B0B0B"/>
+                          </a:solidFill>
+                          <a:latin typeface="Helvetica Neue"/>
+                        </a:rPr>
+                        <a:t>84</a:t>
+                      </a:r>
+                    </a:p>
+                  </a:txBody>
+                  <a:tcPr marL="73152" marR="73152" marT="27432" marB="27432" anchor="ctr">
+                    <a:solidFill>
+                      <a:srgbClr val="FCFCFB"/>
+                    </a:solidFill>
+                  </a:tcPr>
+                </a:tc>
+                <a:tc>
+                  <a:txBody>
+                    <a:bodyPr/>
+                    <a:lstStyle/>
+                    <a:p>
+                      <a:pPr algn="ctr"/>
+                      <a:r>
+                        <a:rPr sz="1200" b="0">
+                          <a:solidFill>
+                            <a:srgbClr val="0B0B0B"/>
+                          </a:solidFill>
+                          <a:latin typeface="Helvetica Neue"/>
+                        </a:rPr>
+                        <a:t>255</a:t>
+                      </a:r>
+                    </a:p>
+                  </a:txBody>
+                  <a:tcPr marL="73152" marR="73152" marT="27432" marB="27432" anchor="ctr">
+                    <a:solidFill>
+                      <a:srgbClr val="FCFCFB"/>
+                    </a:solidFill>
+                  </a:tcPr>
+                </a:tc>
+                <a:tc>
+                  <a:txBody>
+                    <a:bodyPr/>
+                    <a:lstStyle/>
+                    <a:p>
+                      <a:pPr algn="ctr"/>
+                      <a:r>
+                        <a:rPr sz="1200" b="0">
+                          <a:solidFill>
+                            <a:srgbClr val="0B0B0B"/>
+                          </a:solidFill>
+                          <a:latin typeface="Helvetica Neue"/>
+                        </a:rPr>
+                        <a:t>&lt; 0.0001</a:t>
+                      </a:r>
+                    </a:p>
+                  </a:txBody>
+                  <a:tcPr marL="73152" marR="73152" marT="27432" marB="27432" anchor="ctr">
+                    <a:solidFill>
+                      <a:srgbClr val="FCFCFB"/>
+                    </a:solidFill>
+                  </a:tcPr>
+                </a:tc>
+                <a:tc>
+                  <a:txBody>
+                    <a:bodyPr/>
+                    <a:lstStyle/>
+                    <a:p>
+                      <a:pPr algn="ctr"/>
+                      <a:r>
+                        <a:rPr sz="1200" b="0">
+                          <a:solidFill>
+                            <a:srgbClr val="0B0B0B"/>
+                          </a:solidFill>
+                          <a:latin typeface="Helvetica Neue"/>
+                        </a:rPr>
+                        <a:t>significant</a:t>
+                      </a:r>
+                    </a:p>
+                  </a:txBody>
+                  <a:tcPr marL="73152" marR="73152" marT="27432" marB="27432" anchor="ctr">
+                    <a:solidFill>
+                      <a:srgbClr val="FCFCFB"/>
+                    </a:solidFill>
+                  </a:tcPr>
+                </a:tc>
+              </a:tr>
+            </a:tbl>
+          </a:graphicData>
+        </a:graphic>
+      </p:graphicFrame>
+      <p:sp>
+        <p:nvSpPr>
+          <p:cNvPr id="10" name="TextBox 9"/>
+          <p:cNvSpPr txBox="1"/>
+          <p:nvPr/>
+        </p:nvSpPr>
+        <p:spPr>
+          <a:xfrm>
+            <a:off x="548640" y="3977639"/>
+            <a:ext cx="2743200" cy="274320"/>
+          </a:xfrm>
+          <a:prstGeom prst="rect">
+            <a:avLst/>
+          </a:prstGeom>
+          <a:noFill/>
+        </p:spPr>
+        <p:txBody>
+          <a:bodyPr wrap="square">
+            <a:spAutoFit/>
+          </a:bodyPr>
+          <a:lstStyle/>
+          <a:p>
+            <a:pPr algn="l">
+              <a:lnSpc>
+                <a:spcPct val="115000"/>
+              </a:lnSpc>
+            </a:pPr>
+            <a:r>
+              <a:rPr sz="1100" b="1" i="0">
+                <a:solidFill>
+                  <a:srgbClr val="898781"/>
+                </a:solidFill>
+                <a:latin typeface="Helvetica Neue"/>
+              </a:rPr>
+              <a:t>READING IT</a:t>
+            </a:r>
+          </a:p>
+        </p:txBody>
+      </p:sp>
+      <p:sp>
+        <p:nvSpPr>
+          <p:cNvPr id="11" name="TextBox 10"/>
+          <p:cNvSpPr txBox="1"/>
+          <p:nvPr/>
+        </p:nvSpPr>
+        <p:spPr>
+          <a:xfrm>
+            <a:off x="548640" y="4270248"/>
+            <a:ext cx="11064240" cy="1737360"/>
+          </a:xfrm>
+          <a:prstGeom prst="rect">
+            <a:avLst/>
+          </a:prstGeom>
+          <a:noFill/>
+        </p:spPr>
+        <p:txBody>
+          <a:bodyPr wrap="square">
+            <a:spAutoFit/>
+          </a:bodyPr>
+          <a:lstStyle/>
+          <a:p>
+            <a:pPr algn="l">
+              <a:lnSpc>
+                <a:spcPct val="135000"/>
+              </a:lnSpc>
+              <a:spcAft>
+                <a:spcPts val="700"/>
+              </a:spcAft>
+            </a:pPr>
+            <a:r>
+              <a:rPr sz="1300" b="0" i="0">
+                <a:solidFill>
+                  <a:srgbClr val="52514E"/>
+                </a:solidFill>
+                <a:latin typeface="Helvetica Neue"/>
+              </a:rPr>
+              <a:t>—  Every gap survives Holm correction: the ranking is not a sampling artefact.</a:t>
+            </a:r>
+          </a:p>
+          <a:p>
+            <a:pPr algn="l">
+              <a:lnSpc>
+                <a:spcPct val="135000"/>
+              </a:lnSpc>
+              <a:spcAft>
+                <a:spcPts val="700"/>
+              </a:spcAft>
+            </a:pPr>
+            <a:r>
+              <a:rPr sz="1300" b="0" i="0">
+                <a:solidFill>
+                  <a:srgbClr val="52514E"/>
+                </a:solidFill>
+                <a:latin typeface="Helvetica Neue"/>
+              </a:rPr>
+              <a:t>—  Only discordant items count. 'Only A' and 'Only B' are the items one model got right and the other did not - items both answered the same way carry no information about which is better.</a:t>
+            </a:r>
+          </a:p>
+          <a:p>
+            <a:pPr algn="l">
+              <a:lnSpc>
+                <a:spcPct val="135000"/>
+              </a:lnSpc>
+              <a:spcAft>
+                <a:spcPts val="700"/>
+              </a:spcAft>
+            </a:pPr>
+            <a:r>
+              <a:rPr sz="1300" b="0" i="0">
+                <a:solidFill>
+                  <a:srgbClr val="52514E"/>
+                </a:solidFill>
+                <a:latin typeface="Helvetica Neue"/>
+              </a:rPr>
+              <a:t>—  An ideal per-item router would reach 51.5% against 39.5% for the best single model - 12.0 points of headroom, with 48.5% of items defeating all three.</a:t>
+            </a:r>
+          </a:p>
+        </p:txBody>
+      </p:sp>
+    </p:spTree>
+  </p:cSld>
+  <p:clrMapOvr>
+    <a:masterClrMapping/>
+  </p:clrMapOvr>
+</p:sld>
+</file>
+
+<file path=ppt/slides/slide3.xml><?xml version="1.0" encoding="utf-8"?>
+<p:sld xmlns:a="http://schemas.openxmlformats.org/drawingml/2006/main" xmlns:p="http://schemas.openxmlformats.org/presentationml/2006/main" xmlns:r="http://schemas.openxmlformats.org/officeDocument/2006/relationships">
+  <p:cSld>
+    <p:spTree>
+      <p:nvGrpSpPr>
+        <p:cNvPr id="1" name=""/>
+        <p:cNvGrpSpPr/>
+        <p:nvPr/>
+      </p:nvGrpSpPr>
+      <p:grpSpPr/>
+      <p:sp>
+        <p:nvSpPr>
+          <p:cNvPr id="2" name="Rectangle 1"/>
+          <p:cNvSpPr/>
+          <p:nvPr/>
+        </p:nvSpPr>
+        <p:spPr>
+          <a:xfrm>
+            <a:off x="0" y="0"/>
+            <a:ext cx="12191695" cy="6858000"/>
+          </a:xfrm>
+          <a:prstGeom prst="rect">
+            <a:avLst/>
+          </a:prstGeom>
+          <a:solidFill>
+            <a:srgbClr val="FCFCFB"/>
+          </a:solidFill>
+          <a:ln>
+            <a:noFill/>
+          </a:ln>
+          <a:effectLst/>
+        </p:spPr>
+        <p:style>
+          <a:lnRef idx="1">
+            <a:schemeClr val="accent1"/>
+          </a:lnRef>
+          <a:fillRef idx="3">
+            <a:schemeClr val="accent1"/>
+          </a:fillRef>
+          <a:effectRef idx="2">
+            <a:schemeClr val="accent1"/>
+          </a:effectRef>
+          <a:fontRef idx="minor">
+            <a:schemeClr val="lt1"/>
+          </a:fontRef>
+        </p:style>
+        <p:txBody>
+          <a:bodyPr rtlCol="0" anchor="ctr"/>
+          <a:lstStyle/>
+          <a:p>
+            <a:pPr algn="ctr"/>
+          </a:p>
+        </p:txBody>
+      </p:sp>
+      <p:sp>
+        <p:nvSpPr>
+          <p:cNvPr id="3" name="TextBox 2"/>
+          <p:cNvSpPr txBox="1"/>
+          <p:nvPr/>
+        </p:nvSpPr>
+        <p:spPr>
+          <a:xfrm>
+            <a:off x="548640" y="6510528"/>
+            <a:ext cx="5486400" cy="274320"/>
+          </a:xfrm>
+          <a:prstGeom prst="rect">
+            <a:avLst/>
+          </a:prstGeom>
+          <a:noFill/>
+        </p:spPr>
+        <p:txBody>
+          <a:bodyPr wrap="square">
+            <a:spAutoFit/>
+          </a:bodyPr>
+          <a:lstStyle/>
+          <a:p>
+            <a:pPr algn="l">
+              <a:lnSpc>
+                <a:spcPct val="115000"/>
+              </a:lnSpc>
+            </a:pPr>
+            <a:r>
+              <a:rPr sz="900" b="0" i="0">
+                <a:solidFill>
+                  <a:srgbClr val="898781"/>
+                </a:solidFill>
+                <a:latin typeface="Helvetica Neue"/>
+              </a:rPr>
+              <a:t>LAMBADA &amp; MMLU Benchmark Evaluation — Extended</a:t>
+            </a:r>
+          </a:p>
+        </p:txBody>
+      </p:sp>
+      <p:sp>
+        <p:nvSpPr>
+          <p:cNvPr id="4" name="TextBox 3"/>
+          <p:cNvSpPr txBox="1"/>
+          <p:nvPr/>
+        </p:nvSpPr>
+        <p:spPr>
+          <a:xfrm>
+            <a:off x="11338560" y="6510528"/>
+            <a:ext cx="457200" cy="274320"/>
+          </a:xfrm>
+          <a:prstGeom prst="rect">
+            <a:avLst/>
+          </a:prstGeom>
+          <a:noFill/>
+        </p:spPr>
+        <p:txBody>
+          <a:bodyPr wrap="square">
+            <a:spAutoFit/>
+          </a:bodyPr>
+          <a:lstStyle/>
+          <a:p>
+            <a:pPr algn="r">
+              <a:lnSpc>
+                <a:spcPct val="115000"/>
+              </a:lnSpc>
+            </a:pPr>
+            <a:r>
+              <a:rPr sz="900" b="0" i="0">
+                <a:solidFill>
+                  <a:srgbClr val="898781"/>
+                </a:solidFill>
+                <a:latin typeface="Helvetica Neue"/>
+              </a:rPr>
+              <a:t>2</a:t>
+            </a:r>
+          </a:p>
+        </p:txBody>
+      </p:sp>
+      <p:sp>
+        <p:nvSpPr>
+          <p:cNvPr id="5" name="TextBox 4"/>
+          <p:cNvSpPr txBox="1"/>
+          <p:nvPr/>
+        </p:nvSpPr>
+        <p:spPr>
+          <a:xfrm>
+            <a:off x="548640" y="320040"/>
+            <a:ext cx="10058400" cy="320040"/>
+          </a:xfrm>
+          <a:prstGeom prst="rect">
+            <a:avLst/>
+          </a:prstGeom>
+          <a:noFill/>
+        </p:spPr>
+        <p:txBody>
+          <a:bodyPr wrap="square">
+            <a:spAutoFit/>
+          </a:bodyPr>
+          <a:lstStyle/>
+          <a:p>
+            <a:pPr algn="l">
+              <a:lnSpc>
+                <a:spcPct val="115000"/>
+              </a:lnSpc>
+            </a:pPr>
+            <a:r>
+              <a:rPr sz="1250" b="1" i="0">
+                <a:solidFill>
+                  <a:srgbClr val="2A78D6"/>
+                </a:solidFill>
+                <a:latin typeface="Helvetica Neue"/>
+              </a:rPr>
+              <a:t>RESEARCH QUESTION</a:t>
+            </a:r>
+          </a:p>
+        </p:txBody>
+      </p:sp>
+      <p:sp>
+        <p:nvSpPr>
+          <p:cNvPr id="6" name="TextBox 5"/>
+          <p:cNvSpPr txBox="1"/>
+          <p:nvPr/>
+        </p:nvSpPr>
+        <p:spPr>
+          <a:xfrm>
+            <a:off x="548640" y="914400"/>
+            <a:ext cx="11064240" cy="640080"/>
+          </a:xfrm>
+          <a:prstGeom prst="rect">
+            <a:avLst/>
+          </a:prstGeom>
+          <a:noFill/>
+        </p:spPr>
+        <p:txBody>
+          <a:bodyPr wrap="square">
+            <a:spAutoFit/>
+          </a:bodyPr>
+          <a:lstStyle/>
+          <a:p>
+            <a:pPr algn="l">
+              <a:lnSpc>
+                <a:spcPct val="115000"/>
+              </a:lnSpc>
+            </a:pPr>
+            <a:r>
+              <a:rPr sz="2600" b="1" i="0">
+                <a:solidFill>
+                  <a:srgbClr val="0B0B0B"/>
+                </a:solidFill>
+                <a:latin typeface="Helvetica Neue"/>
+              </a:rPr>
+              <a:t>Why accuracy alone cannot answer it</a:t>
             </a:r>
           </a:p>
         </p:txBody>
@@ -17784,8 +20831,8 @@
           <p:nvPr/>
         </p:nvGraphicFramePr>
         <p:xfrm>
-          <a:off x="548640" y="1737360"/>
-          <a:ext cx="11064239" cy="3401568"/>
+          <a:off x="548640" y="1783080"/>
+          <a:ext cx="11064239" cy="3291840"/>
         </p:xfrm>
         <a:graphic>
           <a:graphicData uri="http://schemas.openxmlformats.org/drawingml/2006/table">
@@ -17794,10 +20841,10 @@
                 <a:tableStyleId>{5C22544A-7EE6-4342-B048-85BDC9FD1C3A}</a:tableStyleId>
               </a:tblPr>
               <a:tblGrid>
-                <a:gridCol w="1991563"/>
-                <a:gridCol w="9072676"/>
+                <a:gridCol w="6859828"/>
+                <a:gridCol w="4204411"/>
               </a:tblGrid>
-              <a:tr h="566928">
+              <a:tr h="365760">
                 <a:tc>
                   <a:txBody>
                     <a:bodyPr/>
@@ -17805,13 +20852,13 @@
                     <a:p>
                       <a:pPr algn="l"/>
                       <a:r>
-                        <a:rPr sz="1200" b="1">
+                        <a:rPr sz="1300" b="1">
                           <a:solidFill>
                             <a:srgbClr val="FFFFFF"/>
                           </a:solidFill>
                           <a:latin typeface="Helvetica Neue"/>
                         </a:rPr>
-                        <a:t>Stage</a:t>
+                        <a:t>A single accuracy number cannot distinguish…</a:t>
                       </a:r>
                     </a:p>
                   </a:txBody>
@@ -17828,13 +20875,13 @@
                     <a:p>
                       <a:pPr algn="ctr"/>
                       <a:r>
-                        <a:rPr sz="1200" b="1">
+                        <a:rPr sz="1300" b="1">
                           <a:solidFill>
                             <a:srgbClr val="FFFFFF"/>
                           </a:solidFill>
                           <a:latin typeface="Helvetica Neue"/>
                         </a:rPr>
-                        <a:t>Finding</a:t>
+                        <a:t>Stage that can</a:t>
                       </a:r>
                     </a:p>
                   </a:txBody>
@@ -17845,7 +20892,7 @@
                   </a:tcPr>
                 </a:tc>
               </a:tr>
-              <a:tr h="566928">
+              <a:tr h="365760">
                 <a:tc>
                   <a:txBody>
                     <a:bodyPr/>
@@ -17853,36 +20900,36 @@
                     <a:p>
                       <a:pPr algn="l"/>
                       <a:r>
-                        <a:rPr sz="1200" b="0">
-                          <a:solidFill>
-                            <a:srgbClr val="0B0B0B"/>
-                          </a:solidFill>
-                          <a:latin typeface="Helvetica Neue"/>
-                        </a:rPr>
-                        <a:t>1 · Task Quality</a:t>
-                      </a:r>
-                    </a:p>
-                  </a:txBody>
-                  <a:tcPr marL="73152" marR="73152" marT="27432" marB="27432" anchor="ctr">
-                    <a:solidFill>
-                      <a:srgbClr val="FCFCFB"/>
-                    </a:solidFill>
-                  </a:tcPr>
-                </a:tc>
-                <a:tc>
-                  <a:txBody>
-                    <a:bodyPr/>
-                    <a:lstStyle/>
-                    <a:p>
-                      <a:pPr algn="ctr"/>
-                      <a:r>
-                        <a:rPr sz="1200" b="0">
-                          <a:solidFill>
-                            <a:srgbClr val="0B0B0B"/>
-                          </a:solidFill>
-                          <a:latin typeface="Helvetica Neue"/>
-                        </a:rPr>
-                        <a:t>Llama-3.2-3B returns no parseable answer on 11.7% of questions — disobedience scored as ignorance.</a:t>
+                        <a:rPr sz="1300" b="0">
+                          <a:solidFill>
+                            <a:srgbClr val="0B0B0B"/>
+                          </a:solidFill>
+                          <a:latin typeface="Helvetica Neue"/>
+                        </a:rPr>
+                        <a:t>a wrong answer from an unparseable one</a:t>
+                      </a:r>
+                    </a:p>
+                  </a:txBody>
+                  <a:tcPr marL="73152" marR="73152" marT="27432" marB="27432" anchor="ctr">
+                    <a:solidFill>
+                      <a:srgbClr val="FCFCFB"/>
+                    </a:solidFill>
+                  </a:tcPr>
+                </a:tc>
+                <a:tc>
+                  <a:txBody>
+                    <a:bodyPr/>
+                    <a:lstStyle/>
+                    <a:p>
+                      <a:pPr algn="ctr"/>
+                      <a:r>
+                        <a:rPr sz="1300" b="0">
+                          <a:solidFill>
+                            <a:srgbClr val="0B0B0B"/>
+                          </a:solidFill>
+                          <a:latin typeface="Helvetica Neue"/>
+                        </a:rPr>
+                        <a:t>1 · parse-failure rate</a:t>
                       </a:r>
                     </a:p>
                   </a:txBody>
@@ -17893,7 +20940,7 @@
                   </a:tcPr>
                 </a:tc>
               </a:tr>
-              <a:tr h="566928">
+              <a:tr h="365760">
                 <a:tc>
                   <a:txBody>
                     <a:bodyPr/>
@@ -17901,36 +20948,36 @@
                     <a:p>
                       <a:pPr algn="l"/>
                       <a:r>
-                        <a:rPr sz="1200" b="0">
-                          <a:solidFill>
-                            <a:srgbClr val="0B0B0B"/>
-                          </a:solidFill>
-                          <a:latin typeface="Helvetica Neue"/>
-                        </a:rPr>
-                        <a:t>Tokenization</a:t>
-                      </a:r>
-                    </a:p>
-                  </a:txBody>
-                  <a:tcPr marL="73152" marR="73152" marT="27432" marB="27432" anchor="ctr">
-                    <a:solidFill>
-                      <a:srgbClr val="FCFCFB"/>
-                    </a:solidFill>
-                  </a:tcPr>
-                </a:tc>
-                <a:tc>
-                  <a:txBody>
-                    <a:bodyPr/>
-                    <a:lstStyle/>
-                    <a:p>
-                      <a:pPr algn="ctr"/>
-                      <a:r>
-                        <a:rPr sz="1200" b="0">
-                          <a:solidFill>
-                            <a:srgbClr val="0B0B0B"/>
-                          </a:solidFill>
-                          <a:latin typeface="Helvetica Neue"/>
-                        </a:rPr>
-                        <a:t>On 3+-token targets Ministral-8B holds 34% while Gemma-3-4B collapses to 3% — a vocabulary handicap, not a comprehension gap.</a:t>
+                        <a:rPr sz="1300" b="0">
+                          <a:solidFill>
+                            <a:srgbClr val="0B0B0B"/>
+                          </a:solidFill>
+                          <a:latin typeface="Helvetica Neue"/>
+                        </a:rPr>
+                        <a:t>confident-and-right from confident-and-wrong</a:t>
+                      </a:r>
+                    </a:p>
+                  </a:txBody>
+                  <a:tcPr marL="73152" marR="73152" marT="27432" marB="27432" anchor="ctr">
+                    <a:solidFill>
+                      <a:srgbClr val="FCFCFB"/>
+                    </a:solidFill>
+                  </a:tcPr>
+                </a:tc>
+                <a:tc>
+                  <a:txBody>
+                    <a:bodyPr/>
+                    <a:lstStyle/>
+                    <a:p>
+                      <a:pPr algn="ctr"/>
+                      <a:r>
+                        <a:rPr sz="1300" b="0">
+                          <a:solidFill>
+                            <a:srgbClr val="0B0B0B"/>
+                          </a:solidFill>
+                          <a:latin typeface="Helvetica Neue"/>
+                        </a:rPr>
+                        <a:t>2 · ECE, Brier</a:t>
                       </a:r>
                     </a:p>
                   </a:txBody>
@@ -17941,7 +20988,7 @@
                   </a:tcPr>
                 </a:tc>
               </a:tr>
-              <a:tr h="566928">
+              <a:tr h="365760">
                 <a:tc>
                   <a:txBody>
                     <a:bodyPr/>
@@ -17949,36 +20996,36 @@
                     <a:p>
                       <a:pPr algn="l"/>
                       <a:r>
-                        <a:rPr sz="1200" b="0">
-                          <a:solidFill>
-                            <a:srgbClr val="0B0B0B"/>
-                          </a:solidFill>
-                          <a:latin typeface="Helvetica Neue"/>
-                        </a:rPr>
-                        <a:t>9 · Reliability</a:t>
-                      </a:r>
-                    </a:p>
-                  </a:txBody>
-                  <a:tcPr marL="73152" marR="73152" marT="27432" marB="27432" anchor="ctr">
-                    <a:solidFill>
-                      <a:srgbClr val="FCFCFB"/>
-                    </a:solidFill>
-                  </a:tcPr>
-                </a:tc>
-                <a:tc>
-                  <a:txBody>
-                    <a:bodyPr/>
-                    <a:lstStyle/>
-                    <a:p>
-                      <a:pPr algn="ctr"/>
-                      <a:r>
-                        <a:rPr sz="1200" b="0">
-                          <a:solidFill>
-                            <a:srgbClr val="0B0B0B"/>
-                          </a:solidFill>
-                          <a:latin typeface="Helvetica Neue"/>
-                        </a:rPr>
-                        <a:t>Gemma-3-4B: 40 retries, 0.1% transport failures — invisible in an accuracy table and unrecoverable after the fact without this stage.</a:t>
+                        <a:rPr sz="1300" b="0">
+                          <a:solidFill>
+                            <a:srgbClr val="0B0B0B"/>
+                          </a:solidFill>
+                          <a:latin typeface="Helvetica Neue"/>
+                        </a:rPr>
+                        <a:t>a stable answer from a lucky one</a:t>
+                      </a:r>
+                    </a:p>
+                  </a:txBody>
+                  <a:tcPr marL="73152" marR="73152" marT="27432" marB="27432" anchor="ctr">
+                    <a:solidFill>
+                      <a:srgbClr val="FCFCFB"/>
+                    </a:solidFill>
+                  </a:tcPr>
+                </a:tc>
+                <a:tc>
+                  <a:txBody>
+                    <a:bodyPr/>
+                    <a:lstStyle/>
+                    <a:p>
+                      <a:pPr algn="ctr"/>
+                      <a:r>
+                        <a:rPr sz="1300" b="0">
+                          <a:solidFill>
+                            <a:srgbClr val="0B0B0B"/>
+                          </a:solidFill>
+                          <a:latin typeface="Helvetica Neue"/>
+                        </a:rPr>
+                        <a:t>3 · answer stability</a:t>
                       </a:r>
                     </a:p>
                   </a:txBody>
@@ -17989,7 +21036,7 @@
                   </a:tcPr>
                 </a:tc>
               </a:tr>
-              <a:tr h="566928">
+              <a:tr h="365760">
                 <a:tc>
                   <a:txBody>
                     <a:bodyPr/>
@@ -17997,36 +21044,36 @@
                     <a:p>
                       <a:pPr algn="l"/>
                       <a:r>
-                        <a:rPr sz="1200" b="0">
-                          <a:solidFill>
-                            <a:srgbClr val="0B0B0B"/>
-                          </a:solidFill>
-                          <a:latin typeface="Helvetica Neue"/>
-                        </a:rPr>
-                        <a:t>8 · Economics</a:t>
-                      </a:r>
-                    </a:p>
-                  </a:txBody>
-                  <a:tcPr marL="73152" marR="73152" marT="27432" marB="27432" anchor="ctr">
-                    <a:solidFill>
-                      <a:srgbClr val="FCFCFB"/>
-                    </a:solidFill>
-                  </a:tcPr>
-                </a:tc>
-                <a:tc>
-                  <a:txBody>
-                    <a:bodyPr/>
-                    <a:lstStyle/>
-                    <a:p>
-                      <a:pPr algn="ctr"/>
-                      <a:r>
-                        <a:rPr sz="1200" b="0">
-                          <a:solidFill>
-                            <a:srgbClr val="0B0B0B"/>
-                          </a:solidFill>
-                          <a:latin typeface="Helvetica Neue"/>
-                        </a:rPr>
-                        <a:t>Llama-3.2-3B costs 1.8× more per correct answer than Gemma-3-4B — token price inverts once accuracy is applied.</a:t>
+                        <a:rPr sz="1300" b="0">
+                          <a:solidFill>
+                            <a:srgbClr val="0B0B0B"/>
+                          </a:solidFill>
+                          <a:latin typeface="Helvetica Neue"/>
+                        </a:rPr>
+                        <a:t>comprehension from local n-gram matching</a:t>
+                      </a:r>
+                    </a:p>
+                  </a:txBody>
+                  <a:tcPr marL="73152" marR="73152" marT="27432" marB="27432" anchor="ctr">
+                    <a:solidFill>
+                      <a:srgbClr val="FCFCFB"/>
+                    </a:solidFill>
+                  </a:tcPr>
+                </a:tc>
+                <a:tc>
+                  <a:txBody>
+                    <a:bodyPr/>
+                    <a:lstStyle/>
+                    <a:p>
+                      <a:pPr algn="ctr"/>
+                      <a:r>
+                        <a:rPr sz="1300" b="0">
+                          <a:solidFill>
+                            <a:srgbClr val="0B0B0B"/>
+                          </a:solidFill>
+                          <a:latin typeface="Helvetica Neue"/>
+                        </a:rPr>
+                        <a:t>4 · context ablation</a:t>
                       </a:r>
                     </a:p>
                   </a:txBody>
@@ -18037,7 +21084,7 @@
                   </a:tcPr>
                 </a:tc>
               </a:tr>
-              <a:tr h="566928">
+              <a:tr h="365760">
                 <a:tc>
                   <a:txBody>
                     <a:bodyPr/>
@@ -18045,36 +21092,180 @@
                     <a:p>
                       <a:pPr algn="l"/>
                       <a:r>
-                        <a:rPr sz="1200" b="0">
-                          <a:solidFill>
-                            <a:srgbClr val="0B0B0B"/>
-                          </a:solidFill>
-                          <a:latin typeface="Helvetica Neue"/>
-                        </a:rPr>
-                        <a:t>2 · Probabilistic</a:t>
-                      </a:r>
-                    </a:p>
-                  </a:txBody>
-                  <a:tcPr marL="73152" marR="73152" marT="27432" marB="27432" anchor="ctr">
-                    <a:solidFill>
-                      <a:srgbClr val="FCFCFB"/>
-                    </a:solidFill>
-                  </a:tcPr>
-                </a:tc>
-                <a:tc>
-                  <a:txBody>
-                    <a:bodyPr/>
-                    <a:lstStyle/>
-                    <a:p>
-                      <a:pPr algn="ctr"/>
-                      <a:r>
-                        <a:rPr sz="1200" b="0">
-                          <a:solidFill>
-                            <a:srgbClr val="0B0B0B"/>
-                          </a:solidFill>
-                          <a:latin typeface="Helvetica Neue"/>
-                        </a:rPr>
-                        <a:t>Whether calibration is obtainable at all depends on which provider OpenRouter routes to — a property of the serving path, not the model.</a:t>
+                        <a:rPr sz="1300" b="0">
+                          <a:solidFill>
+                            <a:srgbClr val="0B0B0B"/>
+                          </a:solidFill>
+                          <a:latin typeface="Helvetica Neue"/>
+                        </a:rPr>
+                        <a:t>a robust score from a fragile one</a:t>
+                      </a:r>
+                    </a:p>
+                  </a:txBody>
+                  <a:tcPr marL="73152" marR="73152" marT="27432" marB="27432" anchor="ctr">
+                    <a:solidFill>
+                      <a:srgbClr val="FCFCFB"/>
+                    </a:solidFill>
+                  </a:tcPr>
+                </a:tc>
+                <a:tc>
+                  <a:txBody>
+                    <a:bodyPr/>
+                    <a:lstStyle/>
+                    <a:p>
+                      <a:pPr algn="ctr"/>
+                      <a:r>
+                        <a:rPr sz="1300" b="0">
+                          <a:solidFill>
+                            <a:srgbClr val="0B0B0B"/>
+                          </a:solidFill>
+                          <a:latin typeface="Helvetica Neue"/>
+                        </a:rPr>
+                        <a:t>5 · perturbation deltas</a:t>
+                      </a:r>
+                    </a:p>
+                  </a:txBody>
+                  <a:tcPr marL="73152" marR="73152" marT="27432" marB="27432" anchor="ctr">
+                    <a:solidFill>
+                      <a:srgbClr val="FCFCFB"/>
+                    </a:solidFill>
+                  </a:tcPr>
+                </a:tc>
+              </a:tr>
+              <a:tr h="365760">
+                <a:tc>
+                  <a:txBody>
+                    <a:bodyPr/>
+                    <a:lstStyle/>
+                    <a:p>
+                      <a:pPr algn="l"/>
+                      <a:r>
+                        <a:rPr sz="1300" b="0">
+                          <a:solidFill>
+                            <a:srgbClr val="0B0B0B"/>
+                          </a:solidFill>
+                          <a:latin typeface="Helvetica Neue"/>
+                        </a:rPr>
+                        <a:t>a fast model from a slow one</a:t>
+                      </a:r>
+                    </a:p>
+                  </a:txBody>
+                  <a:tcPr marL="73152" marR="73152" marT="27432" marB="27432" anchor="ctr">
+                    <a:solidFill>
+                      <a:srgbClr val="FCFCFB"/>
+                    </a:solidFill>
+                  </a:tcPr>
+                </a:tc>
+                <a:tc>
+                  <a:txBody>
+                    <a:bodyPr/>
+                    <a:lstStyle/>
+                    <a:p>
+                      <a:pPr algn="ctr"/>
+                      <a:r>
+                        <a:rPr sz="1300" b="0">
+                          <a:solidFill>
+                            <a:srgbClr val="0B0B0B"/>
+                          </a:solidFill>
+                          <a:latin typeface="Helvetica Neue"/>
+                        </a:rPr>
+                        <a:t>6 · TTFT, TPOT, p95</a:t>
+                      </a:r>
+                    </a:p>
+                  </a:txBody>
+                  <a:tcPr marL="73152" marR="73152" marT="27432" marB="27432" anchor="ctr">
+                    <a:solidFill>
+                      <a:srgbClr val="FCFCFB"/>
+                    </a:solidFill>
+                  </a:tcPr>
+                </a:tc>
+              </a:tr>
+              <a:tr h="365760">
+                <a:tc>
+                  <a:txBody>
+                    <a:bodyPr/>
+                    <a:lstStyle/>
+                    <a:p>
+                      <a:pPr algn="l"/>
+                      <a:r>
+                        <a:rPr sz="1300" b="0">
+                          <a:solidFill>
+                            <a:srgbClr val="0B0B0B"/>
+                          </a:solidFill>
+                          <a:latin typeface="Helvetica Neue"/>
+                        </a:rPr>
+                        <a:t>cheap tokens from cheap correct answers</a:t>
+                      </a:r>
+                    </a:p>
+                  </a:txBody>
+                  <a:tcPr marL="73152" marR="73152" marT="27432" marB="27432" anchor="ctr">
+                    <a:solidFill>
+                      <a:srgbClr val="FCFCFB"/>
+                    </a:solidFill>
+                  </a:tcPr>
+                </a:tc>
+                <a:tc>
+                  <a:txBody>
+                    <a:bodyPr/>
+                    <a:lstStyle/>
+                    <a:p>
+                      <a:pPr algn="ctr"/>
+                      <a:r>
+                        <a:rPr sz="1300" b="0">
+                          <a:solidFill>
+                            <a:srgbClr val="0B0B0B"/>
+                          </a:solidFill>
+                          <a:latin typeface="Helvetica Neue"/>
+                        </a:rPr>
+                        <a:t>7–8 · cost per correct answer</a:t>
+                      </a:r>
+                    </a:p>
+                  </a:txBody>
+                  <a:tcPr marL="73152" marR="73152" marT="27432" marB="27432" anchor="ctr">
+                    <a:solidFill>
+                      <a:srgbClr val="FCFCFB"/>
+                    </a:solidFill>
+                  </a:tcPr>
+                </a:tc>
+              </a:tr>
+              <a:tr h="365760">
+                <a:tc>
+                  <a:txBody>
+                    <a:bodyPr/>
+                    <a:lstStyle/>
+                    <a:p>
+                      <a:pPr algn="l"/>
+                      <a:r>
+                        <a:rPr sz="1300" b="0">
+                          <a:solidFill>
+                            <a:srgbClr val="0B0B0B"/>
+                          </a:solidFill>
+                          <a:latin typeface="Helvetica Neue"/>
+                        </a:rPr>
+                        <a:t>a clean run from one that silently retried</a:t>
+                      </a:r>
+                    </a:p>
+                  </a:txBody>
+                  <a:tcPr marL="73152" marR="73152" marT="27432" marB="27432" anchor="ctr">
+                    <a:solidFill>
+                      <a:srgbClr val="FCFCFB"/>
+                    </a:solidFill>
+                  </a:tcPr>
+                </a:tc>
+                <a:tc>
+                  <a:txBody>
+                    <a:bodyPr/>
+                    <a:lstStyle/>
+                    <a:p>
+                      <a:pPr algn="ctr"/>
+                      <a:r>
+                        <a:rPr sz="1300" b="0">
+                          <a:solidFill>
+                            <a:srgbClr val="0B0B0B"/>
+                          </a:solidFill>
+                          <a:latin typeface="Helvetica Neue"/>
+                        </a:rPr>
+                        <a:t>9 · retries, failover</a:t>
                       </a:r>
                     </a:p>
                   </a:txBody>
@@ -18089,6 +21280,45 @@
           </a:graphicData>
         </a:graphic>
       </p:graphicFrame>
+      <p:sp>
+        <p:nvSpPr>
+          <p:cNvPr id="9" name="TextBox 8"/>
+          <p:cNvSpPr txBox="1"/>
+          <p:nvPr/>
+        </p:nvSpPr>
+        <p:spPr>
+          <a:xfrm>
+            <a:off x="548640" y="5303520"/>
+            <a:ext cx="11064240" cy="411480"/>
+          </a:xfrm>
+          <a:prstGeom prst="rect">
+            <a:avLst/>
+          </a:prstGeom>
+          <a:noFill/>
+        </p:spPr>
+        <p:txBody>
+          <a:bodyPr wrap="square">
+            <a:spAutoFit/>
+          </a:bodyPr>
+          <a:lstStyle/>
+          <a:p>
+            <a:pPr algn="l">
+              <a:lnSpc>
+                <a:spcPct val="115000"/>
+              </a:lnSpc>
+            </a:pPr>
+            <a:r>
+              <a:rPr sz="1400" b="1" i="0">
+                <a:solidFill>
+                  <a:srgbClr val="2A78D6"/>
+                </a:solidFill>
+                <a:latin typeface="Helvetica Neue"/>
+              </a:rPr>
+              <a:t>Each stage exists because it separates two things that accuracy conflates.</a:t>
+            </a:r>
+          </a:p>
+        </p:txBody>
+      </p:sp>
     </p:spTree>
   </p:cSld>
   <p:clrMapOvr>
@@ -18097,7 +21327,7 @@
 </p:sld>
 </file>
 
-<file path=ppt/slides/slide28.xml><?xml version="1.0" encoding="utf-8"?>
+<file path=ppt/slides/slide30.xml><?xml version="1.0" encoding="utf-8"?>
 <p:sld xmlns:a="http://schemas.openxmlformats.org/drawingml/2006/main" xmlns:p="http://schemas.openxmlformats.org/presentationml/2006/main" xmlns:r="http://schemas.openxmlformats.org/officeDocument/2006/relationships">
   <p:cSld>
     <p:spTree>
@@ -18224,7 +21454,7 @@
                 </a:solidFill>
                 <a:latin typeface="Helvetica Neue"/>
               </a:rPr>
-              <a:t>27</a:t>
+              <a:t>29</a:t>
             </a:r>
           </a:p>
         </p:txBody>
@@ -18263,7 +21493,7 @@
                 </a:solidFill>
                 <a:latin typeface="Helvetica Neue"/>
               </a:rPr>
-              <a:t>DISCUSSION OF THE RESULTS</a:t>
+              <a:t>ANALYSIS</a:t>
             </a:r>
           </a:p>
         </p:txBody>
@@ -18302,7 +21532,1428 @@
                 </a:solidFill>
                 <a:latin typeface="Helvetica Neue"/>
               </a:rPr>
-              <a:t>Part of the LAMBADA gap is the tokenizer</a:t>
+              <a:t>Which parameters move the outcome?</a:t>
+            </a:r>
+          </a:p>
+        </p:txBody>
+      </p:sp>
+      <p:cxnSp>
+        <p:nvCxnSpPr>
+          <p:cNvPr id="7" name="Connector 6"/>
+          <p:cNvCxnSpPr/>
+          <p:nvPr/>
+        </p:nvCxnSpPr>
+        <p:spPr>
+          <a:xfrm>
+            <a:off x="548640" y="1508760"/>
+            <a:ext cx="11091672" cy="0"/>
+          </a:xfrm>
+          <a:prstGeom prst="line">
+            <a:avLst/>
+          </a:prstGeom>
+          <a:ln w="9525">
+            <a:solidFill>
+              <a:srgbClr val="E1E0D9"/>
+            </a:solidFill>
+          </a:ln>
+        </p:spPr>
+        <p:style>
+          <a:lnRef idx="2">
+            <a:schemeClr val="accent1"/>
+          </a:lnRef>
+          <a:fillRef idx="0">
+            <a:schemeClr val="accent1"/>
+          </a:fillRef>
+          <a:effectRef idx="1">
+            <a:schemeClr val="accent1"/>
+          </a:effectRef>
+          <a:fontRef idx="minor">
+            <a:schemeClr val="tx1"/>
+          </a:fontRef>
+        </p:style>
+      </p:cxnSp>
+      <p:sp>
+        <p:nvSpPr>
+          <p:cNvPr id="8" name="TextBox 7"/>
+          <p:cNvSpPr txBox="1"/>
+          <p:nvPr/>
+        </p:nvSpPr>
+        <p:spPr>
+          <a:xfrm>
+            <a:off x="548640" y="1600200"/>
+            <a:ext cx="11064240" cy="548640"/>
+          </a:xfrm>
+          <a:prstGeom prst="rect">
+            <a:avLst/>
+          </a:prstGeom>
+          <a:noFill/>
+        </p:spPr>
+        <p:txBody>
+          <a:bodyPr wrap="square">
+            <a:spAutoFit/>
+          </a:bodyPr>
+          <a:lstStyle/>
+          <a:p>
+            <a:pPr algn="l">
+              <a:lnSpc>
+                <a:spcPct val="115000"/>
+              </a:lnSpc>
+            </a:pPr>
+            <a:r>
+              <a:rPr sz="1400" b="0" i="0">
+                <a:solidFill>
+                  <a:srgbClr val="52514E"/>
+                </a:solidFill>
+                <a:latin typeface="Helvetica Neue"/>
+              </a:rPr>
+              <a:t>Significance and effect size are different questions. Cramer's V is reported alongside every p-value because at thousands of items a negligible association is still significant.</a:t>
+            </a:r>
+          </a:p>
+        </p:txBody>
+      </p:sp>
+      <p:graphicFrame>
+        <p:nvGraphicFramePr>
+          <p:cNvPr id="9" name="Table 8"/>
+          <p:cNvGraphicFramePr>
+            <a:graphicFrameLocks noGrp="1"/>
+          </p:cNvGraphicFramePr>
+          <p:nvPr/>
+        </p:nvGraphicFramePr>
+        <p:xfrm>
+          <a:off x="548640" y="2286000"/>
+          <a:ext cx="11064237" cy="2560320"/>
+        </p:xfrm>
+        <a:graphic>
+          <a:graphicData uri="http://schemas.openxmlformats.org/drawingml/2006/table">
+            <a:tbl>
+              <a:tblPr firstRow="1" bandRow="1">
+                <a:tableStyleId>{5C22544A-7EE6-4342-B048-85BDC9FD1C3A}</a:tableStyleId>
+              </a:tblPr>
+              <a:tblGrid>
+                <a:gridCol w="1548993"/>
+                <a:gridCol w="4204411"/>
+                <a:gridCol w="1327708"/>
+                <a:gridCol w="1548993"/>
+                <a:gridCol w="1106424"/>
+                <a:gridCol w="1327708"/>
+              </a:tblGrid>
+              <a:tr h="365760">
+                <a:tc>
+                  <a:txBody>
+                    <a:bodyPr/>
+                    <a:lstStyle/>
+                    <a:p>
+                      <a:pPr algn="l"/>
+                      <a:r>
+                        <a:rPr sz="1200" b="1">
+                          <a:solidFill>
+                            <a:srgbClr val="FFFFFF"/>
+                          </a:solidFill>
+                          <a:latin typeface="Helvetica Neue"/>
+                        </a:rPr>
+                        <a:t>Benchmark</a:t>
+                      </a:r>
+                    </a:p>
+                  </a:txBody>
+                  <a:tcPr marL="73152" marR="73152" marT="27432" marB="27432" anchor="ctr">
+                    <a:solidFill>
+                      <a:srgbClr val="0B0B0B"/>
+                    </a:solidFill>
+                  </a:tcPr>
+                </a:tc>
+                <a:tc>
+                  <a:txBody>
+                    <a:bodyPr/>
+                    <a:lstStyle/>
+                    <a:p>
+                      <a:pPr algn="ctr"/>
+                      <a:r>
+                        <a:rPr sz="1200" b="1">
+                          <a:solidFill>
+                            <a:srgbClr val="FFFFFF"/>
+                          </a:solidFill>
+                          <a:latin typeface="Helvetica Neue"/>
+                        </a:rPr>
+                        <a:t>Factor</a:t>
+                      </a:r>
+                    </a:p>
+                  </a:txBody>
+                  <a:tcPr marL="73152" marR="73152" marT="27432" marB="27432" anchor="ctr">
+                    <a:solidFill>
+                      <a:srgbClr val="0B0B0B"/>
+                    </a:solidFill>
+                  </a:tcPr>
+                </a:tc>
+                <a:tc>
+                  <a:txBody>
+                    <a:bodyPr/>
+                    <a:lstStyle/>
+                    <a:p>
+                      <a:pPr algn="ctr"/>
+                      <a:r>
+                        <a:rPr sz="1200" b="1">
+                          <a:solidFill>
+                            <a:srgbClr val="FFFFFF"/>
+                          </a:solidFill>
+                          <a:latin typeface="Helvetica Neue"/>
+                        </a:rPr>
+                        <a:t>Spread</a:t>
+                      </a:r>
+                    </a:p>
+                  </a:txBody>
+                  <a:tcPr marL="73152" marR="73152" marT="27432" marB="27432" anchor="ctr">
+                    <a:solidFill>
+                      <a:srgbClr val="0B0B0B"/>
+                    </a:solidFill>
+                  </a:tcPr>
+                </a:tc>
+                <a:tc>
+                  <a:txBody>
+                    <a:bodyPr/>
+                    <a:lstStyle/>
+                    <a:p>
+                      <a:pPr algn="ctr"/>
+                      <a:r>
+                        <a:rPr sz="1200" b="1">
+                          <a:solidFill>
+                            <a:srgbClr val="FFFFFF"/>
+                          </a:solidFill>
+                          <a:latin typeface="Helvetica Neue"/>
+                        </a:rPr>
+                        <a:t>p</a:t>
+                      </a:r>
+                    </a:p>
+                  </a:txBody>
+                  <a:tcPr marL="73152" marR="73152" marT="27432" marB="27432" anchor="ctr">
+                    <a:solidFill>
+                      <a:srgbClr val="0B0B0B"/>
+                    </a:solidFill>
+                  </a:tcPr>
+                </a:tc>
+                <a:tc>
+                  <a:txBody>
+                    <a:bodyPr/>
+                    <a:lstStyle/>
+                    <a:p>
+                      <a:pPr algn="ctr"/>
+                      <a:r>
+                        <a:rPr sz="1200" b="1">
+                          <a:solidFill>
+                            <a:srgbClr val="FFFFFF"/>
+                          </a:solidFill>
+                          <a:latin typeface="Helvetica Neue"/>
+                        </a:rPr>
+                        <a:t>V</a:t>
+                      </a:r>
+                    </a:p>
+                  </a:txBody>
+                  <a:tcPr marL="73152" marR="73152" marT="27432" marB="27432" anchor="ctr">
+                    <a:solidFill>
+                      <a:srgbClr val="0B0B0B"/>
+                    </a:solidFill>
+                  </a:tcPr>
+                </a:tc>
+                <a:tc>
+                  <a:txBody>
+                    <a:bodyPr/>
+                    <a:lstStyle/>
+                    <a:p>
+                      <a:pPr algn="ctr"/>
+                      <a:r>
+                        <a:rPr sz="1200" b="1">
+                          <a:solidFill>
+                            <a:srgbClr val="FFFFFF"/>
+                          </a:solidFill>
+                          <a:latin typeface="Helvetica Neue"/>
+                        </a:rPr>
+                        <a:t>Effect</a:t>
+                      </a:r>
+                    </a:p>
+                  </a:txBody>
+                  <a:tcPr marL="73152" marR="73152" marT="27432" marB="27432" anchor="ctr">
+                    <a:solidFill>
+                      <a:srgbClr val="0B0B0B"/>
+                    </a:solidFill>
+                  </a:tcPr>
+                </a:tc>
+              </a:tr>
+              <a:tr h="365760">
+                <a:tc>
+                  <a:txBody>
+                    <a:bodyPr/>
+                    <a:lstStyle/>
+                    <a:p>
+                      <a:pPr algn="l"/>
+                      <a:r>
+                        <a:rPr sz="1200" b="0">
+                          <a:solidFill>
+                            <a:srgbClr val="0B0B0B"/>
+                          </a:solidFill>
+                          <a:latin typeface="Helvetica Neue"/>
+                        </a:rPr>
+                        <a:t>MMLU</a:t>
+                      </a:r>
+                    </a:p>
+                  </a:txBody>
+                  <a:tcPr marL="73152" marR="73152" marT="27432" marB="27432" anchor="ctr">
+                    <a:solidFill>
+                      <a:srgbClr val="FCFCFB"/>
+                    </a:solidFill>
+                  </a:tcPr>
+                </a:tc>
+                <a:tc>
+                  <a:txBody>
+                    <a:bodyPr/>
+                    <a:lstStyle/>
+                    <a:p>
+                      <a:pPr algn="ctr"/>
+                      <a:r>
+                        <a:rPr sz="1200" b="0">
+                          <a:solidFill>
+                            <a:srgbClr val="0B0B0B"/>
+                          </a:solidFill>
+                          <a:latin typeface="Helvetica Neue"/>
+                        </a:rPr>
+                        <a:t>subject category</a:t>
+                      </a:r>
+                    </a:p>
+                  </a:txBody>
+                  <a:tcPr marL="73152" marR="73152" marT="27432" marB="27432" anchor="ctr">
+                    <a:solidFill>
+                      <a:srgbClr val="FCFCFB"/>
+                    </a:solidFill>
+                  </a:tcPr>
+                </a:tc>
+                <a:tc>
+                  <a:txBody>
+                    <a:bodyPr/>
+                    <a:lstStyle/>
+                    <a:p>
+                      <a:pPr algn="ctr"/>
+                      <a:r>
+                        <a:rPr sz="1200" b="0">
+                          <a:solidFill>
+                            <a:srgbClr val="0B0B0B"/>
+                          </a:solidFill>
+                          <a:latin typeface="Helvetica Neue"/>
+                        </a:rPr>
+                        <a:t>11.3 pp</a:t>
+                      </a:r>
+                    </a:p>
+                  </a:txBody>
+                  <a:tcPr marL="73152" marR="73152" marT="27432" marB="27432" anchor="ctr">
+                    <a:solidFill>
+                      <a:srgbClr val="FCFCFB"/>
+                    </a:solidFill>
+                  </a:tcPr>
+                </a:tc>
+                <a:tc>
+                  <a:txBody>
+                    <a:bodyPr/>
+                    <a:lstStyle/>
+                    <a:p>
+                      <a:pPr algn="ctr"/>
+                      <a:r>
+                        <a:rPr sz="1200" b="0">
+                          <a:solidFill>
+                            <a:srgbClr val="0B0B0B"/>
+                          </a:solidFill>
+                          <a:latin typeface="Helvetica Neue"/>
+                        </a:rPr>
+                        <a:t>&lt; 0.0001</a:t>
+                      </a:r>
+                    </a:p>
+                  </a:txBody>
+                  <a:tcPr marL="73152" marR="73152" marT="27432" marB="27432" anchor="ctr">
+                    <a:solidFill>
+                      <a:srgbClr val="FCFCFB"/>
+                    </a:solidFill>
+                  </a:tcPr>
+                </a:tc>
+                <a:tc>
+                  <a:txBody>
+                    <a:bodyPr/>
+                    <a:lstStyle/>
+                    <a:p>
+                      <a:pPr algn="ctr"/>
+                      <a:r>
+                        <a:rPr sz="1200" b="0">
+                          <a:solidFill>
+                            <a:srgbClr val="0B0B0B"/>
+                          </a:solidFill>
+                          <a:latin typeface="Helvetica Neue"/>
+                        </a:rPr>
+                        <a:t>0.093</a:t>
+                      </a:r>
+                    </a:p>
+                  </a:txBody>
+                  <a:tcPr marL="73152" marR="73152" marT="27432" marB="27432" anchor="ctr">
+                    <a:solidFill>
+                      <a:srgbClr val="FCFCFB"/>
+                    </a:solidFill>
+                  </a:tcPr>
+                </a:tc>
+                <a:tc>
+                  <a:txBody>
+                    <a:bodyPr/>
+                    <a:lstStyle/>
+                    <a:p>
+                      <a:pPr algn="ctr"/>
+                      <a:r>
+                        <a:rPr sz="1200" b="0">
+                          <a:solidFill>
+                            <a:srgbClr val="0B0B0B"/>
+                          </a:solidFill>
+                          <a:latin typeface="Helvetica Neue"/>
+                        </a:rPr>
+                        <a:t>negligible</a:t>
+                      </a:r>
+                    </a:p>
+                  </a:txBody>
+                  <a:tcPr marL="73152" marR="73152" marT="27432" marB="27432" anchor="ctr">
+                    <a:solidFill>
+                      <a:srgbClr val="FCFCFB"/>
+                    </a:solidFill>
+                  </a:tcPr>
+                </a:tc>
+              </a:tr>
+              <a:tr h="365760">
+                <a:tc>
+                  <a:txBody>
+                    <a:bodyPr/>
+                    <a:lstStyle/>
+                    <a:p>
+                      <a:pPr algn="l"/>
+                      <a:r>
+                        <a:rPr sz="1200" b="0">
+                          <a:solidFill>
+                            <a:srgbClr val="0B0B0B"/>
+                          </a:solidFill>
+                          <a:latin typeface="Helvetica Neue"/>
+                        </a:rPr>
+                        <a:t>MMLU</a:t>
+                      </a:r>
+                    </a:p>
+                  </a:txBody>
+                  <a:tcPr marL="73152" marR="73152" marT="27432" marB="27432" anchor="ctr">
+                    <a:solidFill>
+                      <a:srgbClr val="FCFCFB"/>
+                    </a:solidFill>
+                  </a:tcPr>
+                </a:tc>
+                <a:tc>
+                  <a:txBody>
+                    <a:bodyPr/>
+                    <a:lstStyle/>
+                    <a:p>
+                      <a:pPr algn="ctr"/>
+                      <a:r>
+                        <a:rPr sz="1200" b="0">
+                          <a:solidFill>
+                            <a:srgbClr val="0B0B0B"/>
+                          </a:solidFill>
+                          <a:latin typeface="Helvetica Neue"/>
+                        </a:rPr>
+                        <a:t>correct-option position</a:t>
+                      </a:r>
+                    </a:p>
+                  </a:txBody>
+                  <a:tcPr marL="73152" marR="73152" marT="27432" marB="27432" anchor="ctr">
+                    <a:solidFill>
+                      <a:srgbClr val="FCFCFB"/>
+                    </a:solidFill>
+                  </a:tcPr>
+                </a:tc>
+                <a:tc>
+                  <a:txBody>
+                    <a:bodyPr/>
+                    <a:lstStyle/>
+                    <a:p>
+                      <a:pPr algn="ctr"/>
+                      <a:r>
+                        <a:rPr sz="1200" b="0">
+                          <a:solidFill>
+                            <a:srgbClr val="0B0B0B"/>
+                          </a:solidFill>
+                          <a:latin typeface="Helvetica Neue"/>
+                        </a:rPr>
+                        <a:t>7.0 pp</a:t>
+                      </a:r>
+                    </a:p>
+                  </a:txBody>
+                  <a:tcPr marL="73152" marR="73152" marT="27432" marB="27432" anchor="ctr">
+                    <a:solidFill>
+                      <a:srgbClr val="FCFCFB"/>
+                    </a:solidFill>
+                  </a:tcPr>
+                </a:tc>
+                <a:tc>
+                  <a:txBody>
+                    <a:bodyPr/>
+                    <a:lstStyle/>
+                    <a:p>
+                      <a:pPr algn="ctr"/>
+                      <a:r>
+                        <a:rPr sz="1200" b="0">
+                          <a:solidFill>
+                            <a:srgbClr val="0B0B0B"/>
+                          </a:solidFill>
+                          <a:latin typeface="Helvetica Neue"/>
+                        </a:rPr>
+                        <a:t>&lt; 0.0001</a:t>
+                      </a:r>
+                    </a:p>
+                  </a:txBody>
+                  <a:tcPr marL="73152" marR="73152" marT="27432" marB="27432" anchor="ctr">
+                    <a:solidFill>
+                      <a:srgbClr val="FCFCFB"/>
+                    </a:solidFill>
+                  </a:tcPr>
+                </a:tc>
+                <a:tc>
+                  <a:txBody>
+                    <a:bodyPr/>
+                    <a:lstStyle/>
+                    <a:p>
+                      <a:pPr algn="ctr"/>
+                      <a:r>
+                        <a:rPr sz="1200" b="0">
+                          <a:solidFill>
+                            <a:srgbClr val="0B0B0B"/>
+                          </a:solidFill>
+                          <a:latin typeface="Helvetica Neue"/>
+                        </a:rPr>
+                        <a:t>0.056</a:t>
+                      </a:r>
+                    </a:p>
+                  </a:txBody>
+                  <a:tcPr marL="73152" marR="73152" marT="27432" marB="27432" anchor="ctr">
+                    <a:solidFill>
+                      <a:srgbClr val="FCFCFB"/>
+                    </a:solidFill>
+                  </a:tcPr>
+                </a:tc>
+                <a:tc>
+                  <a:txBody>
+                    <a:bodyPr/>
+                    <a:lstStyle/>
+                    <a:p>
+                      <a:pPr algn="ctr"/>
+                      <a:r>
+                        <a:rPr sz="1200" b="0">
+                          <a:solidFill>
+                            <a:srgbClr val="0B0B0B"/>
+                          </a:solidFill>
+                          <a:latin typeface="Helvetica Neue"/>
+                        </a:rPr>
+                        <a:t>negligible</a:t>
+                      </a:r>
+                    </a:p>
+                  </a:txBody>
+                  <a:tcPr marL="73152" marR="73152" marT="27432" marB="27432" anchor="ctr">
+                    <a:solidFill>
+                      <a:srgbClr val="FCFCFB"/>
+                    </a:solidFill>
+                  </a:tcPr>
+                </a:tc>
+              </a:tr>
+              <a:tr h="365760">
+                <a:tc>
+                  <a:txBody>
+                    <a:bodyPr/>
+                    <a:lstStyle/>
+                    <a:p>
+                      <a:pPr algn="l"/>
+                      <a:r>
+                        <a:rPr sz="1200" b="0">
+                          <a:solidFill>
+                            <a:srgbClr val="0B0B0B"/>
+                          </a:solidFill>
+                          <a:latin typeface="Helvetica Neue"/>
+                        </a:rPr>
+                        <a:t>LAMBADA</a:t>
+                      </a:r>
+                    </a:p>
+                  </a:txBody>
+                  <a:tcPr marL="73152" marR="73152" marT="27432" marB="27432" anchor="ctr">
+                    <a:solidFill>
+                      <a:srgbClr val="FCFCFB"/>
+                    </a:solidFill>
+                  </a:tcPr>
+                </a:tc>
+                <a:tc>
+                  <a:txBody>
+                    <a:bodyPr/>
+                    <a:lstStyle/>
+                    <a:p>
+                      <a:pPr algn="ctr"/>
+                      <a:r>
+                        <a:rPr sz="1200" b="0">
+                          <a:solidFill>
+                            <a:srgbClr val="0B0B0B"/>
+                          </a:solidFill>
+                          <a:latin typeface="Helvetica Neue"/>
+                        </a:rPr>
+                        <a:t>passage length (true)</a:t>
+                      </a:r>
+                    </a:p>
+                  </a:txBody>
+                  <a:tcPr marL="73152" marR="73152" marT="27432" marB="27432" anchor="ctr">
+                    <a:solidFill>
+                      <a:srgbClr val="FCFCFB"/>
+                    </a:solidFill>
+                  </a:tcPr>
+                </a:tc>
+                <a:tc>
+                  <a:txBody>
+                    <a:bodyPr/>
+                    <a:lstStyle/>
+                    <a:p>
+                      <a:pPr algn="ctr"/>
+                      <a:r>
+                        <a:rPr sz="1200" b="0">
+                          <a:solidFill>
+                            <a:srgbClr val="0B0B0B"/>
+                          </a:solidFill>
+                          <a:latin typeface="Helvetica Neue"/>
+                        </a:rPr>
+                        <a:t>14.9 pp</a:t>
+                      </a:r>
+                    </a:p>
+                  </a:txBody>
+                  <a:tcPr marL="73152" marR="73152" marT="27432" marB="27432" anchor="ctr">
+                    <a:solidFill>
+                      <a:srgbClr val="FCFCFB"/>
+                    </a:solidFill>
+                  </a:tcPr>
+                </a:tc>
+                <a:tc>
+                  <a:txBody>
+                    <a:bodyPr/>
+                    <a:lstStyle/>
+                    <a:p>
+                      <a:pPr algn="ctr"/>
+                      <a:r>
+                        <a:rPr sz="1200" b="0">
+                          <a:solidFill>
+                            <a:srgbClr val="0B0B0B"/>
+                          </a:solidFill>
+                          <a:latin typeface="Helvetica Neue"/>
+                        </a:rPr>
+                        <a:t>0.0031</a:t>
+                      </a:r>
+                    </a:p>
+                  </a:txBody>
+                  <a:tcPr marL="73152" marR="73152" marT="27432" marB="27432" anchor="ctr">
+                    <a:solidFill>
+                      <a:srgbClr val="FCFCFB"/>
+                    </a:solidFill>
+                  </a:tcPr>
+                </a:tc>
+                <a:tc>
+                  <a:txBody>
+                    <a:bodyPr/>
+                    <a:lstStyle/>
+                    <a:p>
+                      <a:pPr algn="ctr"/>
+                      <a:r>
+                        <a:rPr sz="1200" b="0">
+                          <a:solidFill>
+                            <a:srgbClr val="0B0B0B"/>
+                          </a:solidFill>
+                          <a:latin typeface="Helvetica Neue"/>
+                        </a:rPr>
+                        <a:t>0.068</a:t>
+                      </a:r>
+                    </a:p>
+                  </a:txBody>
+                  <a:tcPr marL="73152" marR="73152" marT="27432" marB="27432" anchor="ctr">
+                    <a:solidFill>
+                      <a:srgbClr val="FCFCFB"/>
+                    </a:solidFill>
+                  </a:tcPr>
+                </a:tc>
+                <a:tc>
+                  <a:txBody>
+                    <a:bodyPr/>
+                    <a:lstStyle/>
+                    <a:p>
+                      <a:pPr algn="ctr"/>
+                      <a:r>
+                        <a:rPr sz="1200" b="0">
+                          <a:solidFill>
+                            <a:srgbClr val="0B0B0B"/>
+                          </a:solidFill>
+                          <a:latin typeface="Helvetica Neue"/>
+                        </a:rPr>
+                        <a:t>negligible</a:t>
+                      </a:r>
+                    </a:p>
+                  </a:txBody>
+                  <a:tcPr marL="73152" marR="73152" marT="27432" marB="27432" anchor="ctr">
+                    <a:solidFill>
+                      <a:srgbClr val="FCFCFB"/>
+                    </a:solidFill>
+                  </a:tcPr>
+                </a:tc>
+              </a:tr>
+              <a:tr h="365760">
+                <a:tc>
+                  <a:txBody>
+                    <a:bodyPr/>
+                    <a:lstStyle/>
+                    <a:p>
+                      <a:pPr algn="l"/>
+                      <a:r>
+                        <a:rPr sz="1200" b="0">
+                          <a:solidFill>
+                            <a:srgbClr val="0B0B0B"/>
+                          </a:solidFill>
+                          <a:latin typeface="Helvetica Neue"/>
+                        </a:rPr>
+                        <a:t>LAMBADA</a:t>
+                      </a:r>
+                    </a:p>
+                  </a:txBody>
+                  <a:tcPr marL="73152" marR="73152" marT="27432" marB="27432" anchor="ctr">
+                    <a:solidFill>
+                      <a:srgbClr val="FCFCFB"/>
+                    </a:solidFill>
+                  </a:tcPr>
+                </a:tc>
+                <a:tc>
+                  <a:txBody>
+                    <a:bodyPr/>
+                    <a:lstStyle/>
+                    <a:p>
+                      <a:pPr algn="ctr"/>
+                      <a:r>
+                        <a:rPr sz="1200" b="0">
+                          <a:solidFill>
+                            <a:srgbClr val="0B0B0B"/>
+                          </a:solidFill>
+                          <a:latin typeface="Helvetica Neue"/>
+                        </a:rPr>
+                        <a:t>target fragmentation - Gemma-3-4B</a:t>
+                      </a:r>
+                    </a:p>
+                  </a:txBody>
+                  <a:tcPr marL="73152" marR="73152" marT="27432" marB="27432" anchor="ctr">
+                    <a:solidFill>
+                      <a:srgbClr val="FCFCFB"/>
+                    </a:solidFill>
+                  </a:tcPr>
+                </a:tc>
+                <a:tc>
+                  <a:txBody>
+                    <a:bodyPr/>
+                    <a:lstStyle/>
+                    <a:p>
+                      <a:pPr algn="ctr"/>
+                      <a:r>
+                        <a:rPr sz="1200" b="0">
+                          <a:solidFill>
+                            <a:srgbClr val="0B0B0B"/>
+                          </a:solidFill>
+                          <a:latin typeface="Helvetica Neue"/>
+                        </a:rPr>
+                        <a:t>21.0 pp</a:t>
+                      </a:r>
+                    </a:p>
+                  </a:txBody>
+                  <a:tcPr marL="73152" marR="73152" marT="27432" marB="27432" anchor="ctr">
+                    <a:solidFill>
+                      <a:srgbClr val="FCFCFB"/>
+                    </a:solidFill>
+                  </a:tcPr>
+                </a:tc>
+                <a:tc>
+                  <a:txBody>
+                    <a:bodyPr/>
+                    <a:lstStyle/>
+                    <a:p>
+                      <a:pPr algn="ctr"/>
+                      <a:r>
+                        <a:rPr sz="1200" b="0">
+                          <a:solidFill>
+                            <a:srgbClr val="0B0B0B"/>
+                          </a:solidFill>
+                          <a:latin typeface="Helvetica Neue"/>
+                        </a:rPr>
+                        <a:t>&lt; 0.0001</a:t>
+                      </a:r>
+                    </a:p>
+                  </a:txBody>
+                  <a:tcPr marL="73152" marR="73152" marT="27432" marB="27432" anchor="ctr">
+                    <a:solidFill>
+                      <a:srgbClr val="FCFCFB"/>
+                    </a:solidFill>
+                  </a:tcPr>
+                </a:tc>
+                <a:tc>
+                  <a:txBody>
+                    <a:bodyPr/>
+                    <a:lstStyle/>
+                    <a:p>
+                      <a:pPr algn="ctr"/>
+                      <a:r>
+                        <a:rPr sz="1200" b="0">
+                          <a:solidFill>
+                            <a:srgbClr val="0B0B0B"/>
+                          </a:solidFill>
+                          <a:latin typeface="Helvetica Neue"/>
+                        </a:rPr>
+                        <a:t>0.180</a:t>
+                      </a:r>
+                    </a:p>
+                  </a:txBody>
+                  <a:tcPr marL="73152" marR="73152" marT="27432" marB="27432" anchor="ctr">
+                    <a:solidFill>
+                      <a:srgbClr val="FCFCFB"/>
+                    </a:solidFill>
+                  </a:tcPr>
+                </a:tc>
+                <a:tc>
+                  <a:txBody>
+                    <a:bodyPr/>
+                    <a:lstStyle/>
+                    <a:p>
+                      <a:pPr algn="ctr"/>
+                      <a:r>
+                        <a:rPr sz="1200" b="0">
+                          <a:solidFill>
+                            <a:srgbClr val="0B0B0B"/>
+                          </a:solidFill>
+                          <a:latin typeface="Helvetica Neue"/>
+                        </a:rPr>
+                        <a:t>small</a:t>
+                      </a:r>
+                    </a:p>
+                  </a:txBody>
+                  <a:tcPr marL="73152" marR="73152" marT="27432" marB="27432" anchor="ctr">
+                    <a:solidFill>
+                      <a:srgbClr val="FCFCFB"/>
+                    </a:solidFill>
+                  </a:tcPr>
+                </a:tc>
+              </a:tr>
+              <a:tr h="365760">
+                <a:tc>
+                  <a:txBody>
+                    <a:bodyPr/>
+                    <a:lstStyle/>
+                    <a:p>
+                      <a:pPr algn="l"/>
+                      <a:r>
+                        <a:rPr sz="1200" b="0">
+                          <a:solidFill>
+                            <a:srgbClr val="0B0B0B"/>
+                          </a:solidFill>
+                          <a:latin typeface="Helvetica Neue"/>
+                        </a:rPr>
+                        <a:t>LAMBADA</a:t>
+                      </a:r>
+                    </a:p>
+                  </a:txBody>
+                  <a:tcPr marL="73152" marR="73152" marT="27432" marB="27432" anchor="ctr">
+                    <a:solidFill>
+                      <a:srgbClr val="FCFCFB"/>
+                    </a:solidFill>
+                  </a:tcPr>
+                </a:tc>
+                <a:tc>
+                  <a:txBody>
+                    <a:bodyPr/>
+                    <a:lstStyle/>
+                    <a:p>
+                      <a:pPr algn="ctr"/>
+                      <a:r>
+                        <a:rPr sz="1200" b="0">
+                          <a:solidFill>
+                            <a:srgbClr val="0B0B0B"/>
+                          </a:solidFill>
+                          <a:latin typeface="Helvetica Neue"/>
+                        </a:rPr>
+                        <a:t>target fragmentation - Llama-3.2-3B</a:t>
+                      </a:r>
+                    </a:p>
+                  </a:txBody>
+                  <a:tcPr marL="73152" marR="73152" marT="27432" marB="27432" anchor="ctr">
+                    <a:solidFill>
+                      <a:srgbClr val="FCFCFB"/>
+                    </a:solidFill>
+                  </a:tcPr>
+                </a:tc>
+                <a:tc>
+                  <a:txBody>
+                    <a:bodyPr/>
+                    <a:lstStyle/>
+                    <a:p>
+                      <a:pPr algn="ctr"/>
+                      <a:r>
+                        <a:rPr sz="1200" b="0">
+                          <a:solidFill>
+                            <a:srgbClr val="0B0B0B"/>
+                          </a:solidFill>
+                          <a:latin typeface="Helvetica Neue"/>
+                        </a:rPr>
+                        <a:t>26.7 pp</a:t>
+                      </a:r>
+                    </a:p>
+                  </a:txBody>
+                  <a:tcPr marL="73152" marR="73152" marT="27432" marB="27432" anchor="ctr">
+                    <a:solidFill>
+                      <a:srgbClr val="FCFCFB"/>
+                    </a:solidFill>
+                  </a:tcPr>
+                </a:tc>
+                <a:tc>
+                  <a:txBody>
+                    <a:bodyPr/>
+                    <a:lstStyle/>
+                    <a:p>
+                      <a:pPr algn="ctr"/>
+                      <a:r>
+                        <a:rPr sz="1200" b="0">
+                          <a:solidFill>
+                            <a:srgbClr val="0B0B0B"/>
+                          </a:solidFill>
+                          <a:latin typeface="Helvetica Neue"/>
+                        </a:rPr>
+                        <a:t>&lt; 0.0001</a:t>
+                      </a:r>
+                    </a:p>
+                  </a:txBody>
+                  <a:tcPr marL="73152" marR="73152" marT="27432" marB="27432" anchor="ctr">
+                    <a:solidFill>
+                      <a:srgbClr val="FCFCFB"/>
+                    </a:solidFill>
+                  </a:tcPr>
+                </a:tc>
+                <a:tc>
+                  <a:txBody>
+                    <a:bodyPr/>
+                    <a:lstStyle/>
+                    <a:p>
+                      <a:pPr algn="ctr"/>
+                      <a:r>
+                        <a:rPr sz="1200" b="0">
+                          <a:solidFill>
+                            <a:srgbClr val="0B0B0B"/>
+                          </a:solidFill>
+                          <a:latin typeface="Helvetica Neue"/>
+                        </a:rPr>
+                        <a:t>0.206</a:t>
+                      </a:r>
+                    </a:p>
+                  </a:txBody>
+                  <a:tcPr marL="73152" marR="73152" marT="27432" marB="27432" anchor="ctr">
+                    <a:solidFill>
+                      <a:srgbClr val="FCFCFB"/>
+                    </a:solidFill>
+                  </a:tcPr>
+                </a:tc>
+                <a:tc>
+                  <a:txBody>
+                    <a:bodyPr/>
+                    <a:lstStyle/>
+                    <a:p>
+                      <a:pPr algn="ctr"/>
+                      <a:r>
+                        <a:rPr sz="1200" b="0">
+                          <a:solidFill>
+                            <a:srgbClr val="0B0B0B"/>
+                          </a:solidFill>
+                          <a:latin typeface="Helvetica Neue"/>
+                        </a:rPr>
+                        <a:t>small</a:t>
+                      </a:r>
+                    </a:p>
+                  </a:txBody>
+                  <a:tcPr marL="73152" marR="73152" marT="27432" marB="27432" anchor="ctr">
+                    <a:solidFill>
+                      <a:srgbClr val="FCFCFB"/>
+                    </a:solidFill>
+                  </a:tcPr>
+                </a:tc>
+              </a:tr>
+              <a:tr h="365760">
+                <a:tc>
+                  <a:txBody>
+                    <a:bodyPr/>
+                    <a:lstStyle/>
+                    <a:p>
+                      <a:pPr algn="l"/>
+                      <a:r>
+                        <a:rPr sz="1200" b="0">
+                          <a:solidFill>
+                            <a:srgbClr val="0B0B0B"/>
+                          </a:solidFill>
+                          <a:latin typeface="Helvetica Neue"/>
+                        </a:rPr>
+                        <a:t>LAMBADA</a:t>
+                      </a:r>
+                    </a:p>
+                  </a:txBody>
+                  <a:tcPr marL="73152" marR="73152" marT="27432" marB="27432" anchor="ctr">
+                    <a:solidFill>
+                      <a:srgbClr val="FCFCFB"/>
+                    </a:solidFill>
+                  </a:tcPr>
+                </a:tc>
+                <a:tc>
+                  <a:txBody>
+                    <a:bodyPr/>
+                    <a:lstStyle/>
+                    <a:p>
+                      <a:pPr algn="ctr"/>
+                      <a:r>
+                        <a:rPr sz="1200" b="0">
+                          <a:solidFill>
+                            <a:srgbClr val="0B0B0B"/>
+                          </a:solidFill>
+                          <a:latin typeface="Helvetica Neue"/>
+                        </a:rPr>
+                        <a:t>target fragmentation - Ministral-8B</a:t>
+                      </a:r>
+                    </a:p>
+                  </a:txBody>
+                  <a:tcPr marL="73152" marR="73152" marT="27432" marB="27432" anchor="ctr">
+                    <a:solidFill>
+                      <a:srgbClr val="FCFCFB"/>
+                    </a:solidFill>
+                  </a:tcPr>
+                </a:tc>
+                <a:tc>
+                  <a:txBody>
+                    <a:bodyPr/>
+                    <a:lstStyle/>
+                    <a:p>
+                      <a:pPr algn="ctr"/>
+                      <a:r>
+                        <a:rPr sz="1200" b="0">
+                          <a:solidFill>
+                            <a:srgbClr val="0B0B0B"/>
+                          </a:solidFill>
+                          <a:latin typeface="Helvetica Neue"/>
+                        </a:rPr>
+                        <a:t>13.1 pp</a:t>
+                      </a:r>
+                    </a:p>
+                  </a:txBody>
+                  <a:tcPr marL="73152" marR="73152" marT="27432" marB="27432" anchor="ctr">
+                    <a:solidFill>
+                      <a:srgbClr val="FCFCFB"/>
+                    </a:solidFill>
+                  </a:tcPr>
+                </a:tc>
+                <a:tc>
+                  <a:txBody>
+                    <a:bodyPr/>
+                    <a:lstStyle/>
+                    <a:p>
+                      <a:pPr algn="ctr"/>
+                      <a:r>
+                        <a:rPr sz="1200" b="0">
+                          <a:solidFill>
+                            <a:srgbClr val="0B0B0B"/>
+                          </a:solidFill>
+                          <a:latin typeface="Helvetica Neue"/>
+                        </a:rPr>
+                        <a:t>0.0047</a:t>
+                      </a:r>
+                    </a:p>
+                  </a:txBody>
+                  <a:tcPr marL="73152" marR="73152" marT="27432" marB="27432" anchor="ctr">
+                    <a:solidFill>
+                      <a:srgbClr val="FCFCFB"/>
+                    </a:solidFill>
+                  </a:tcPr>
+                </a:tc>
+                <a:tc>
+                  <a:txBody>
+                    <a:bodyPr/>
+                    <a:lstStyle/>
+                    <a:p>
+                      <a:pPr algn="ctr"/>
+                      <a:r>
+                        <a:rPr sz="1200" b="0">
+                          <a:solidFill>
+                            <a:srgbClr val="0B0B0B"/>
+                          </a:solidFill>
+                          <a:latin typeface="Helvetica Neue"/>
+                        </a:rPr>
+                        <a:t>0.103</a:t>
+                      </a:r>
+                    </a:p>
+                  </a:txBody>
+                  <a:tcPr marL="73152" marR="73152" marT="27432" marB="27432" anchor="ctr">
+                    <a:solidFill>
+                      <a:srgbClr val="FCFCFB"/>
+                    </a:solidFill>
+                  </a:tcPr>
+                </a:tc>
+                <a:tc>
+                  <a:txBody>
+                    <a:bodyPr/>
+                    <a:lstStyle/>
+                    <a:p>
+                      <a:pPr algn="ctr"/>
+                      <a:r>
+                        <a:rPr sz="1200" b="0">
+                          <a:solidFill>
+                            <a:srgbClr val="0B0B0B"/>
+                          </a:solidFill>
+                          <a:latin typeface="Helvetica Neue"/>
+                        </a:rPr>
+                        <a:t>small</a:t>
+                      </a:r>
+                    </a:p>
+                  </a:txBody>
+                  <a:tcPr marL="73152" marR="73152" marT="27432" marB="27432" anchor="ctr">
+                    <a:solidFill>
+                      <a:srgbClr val="FCFCFB"/>
+                    </a:solidFill>
+                  </a:tcPr>
+                </a:tc>
+              </a:tr>
+            </a:tbl>
+          </a:graphicData>
+        </a:graphic>
+      </p:graphicFrame>
+      <p:sp>
+        <p:nvSpPr>
+          <p:cNvPr id="10" name="TextBox 9"/>
+          <p:cNvSpPr txBox="1"/>
+          <p:nvPr/>
+        </p:nvSpPr>
+        <p:spPr>
+          <a:xfrm>
+            <a:off x="548640" y="4617720"/>
+            <a:ext cx="2743200" cy="274320"/>
+          </a:xfrm>
+          <a:prstGeom prst="rect">
+            <a:avLst/>
+          </a:prstGeom>
+          <a:noFill/>
+        </p:spPr>
+        <p:txBody>
+          <a:bodyPr wrap="square">
+            <a:spAutoFit/>
+          </a:bodyPr>
+          <a:lstStyle/>
+          <a:p>
+            <a:pPr algn="l">
+              <a:lnSpc>
+                <a:spcPct val="115000"/>
+              </a:lnSpc>
+            </a:pPr>
+            <a:r>
+              <a:rPr sz="1100" b="1" i="0">
+                <a:solidFill>
+                  <a:srgbClr val="898781"/>
+                </a:solidFill>
+                <a:latin typeface="Helvetica Neue"/>
+              </a:rPr>
+              <a:t>READING IT</a:t>
+            </a:r>
+          </a:p>
+        </p:txBody>
+      </p:sp>
+      <p:sp>
+        <p:nvSpPr>
+          <p:cNvPr id="11" name="TextBox 10"/>
+          <p:cNvSpPr txBox="1"/>
+          <p:nvPr/>
+        </p:nvSpPr>
+        <p:spPr>
+          <a:xfrm>
+            <a:off x="548640" y="4910328"/>
+            <a:ext cx="11064240" cy="1371600"/>
+          </a:xfrm>
+          <a:prstGeom prst="rect">
+            <a:avLst/>
+          </a:prstGeom>
+          <a:noFill/>
+        </p:spPr>
+        <p:txBody>
+          <a:bodyPr wrap="square">
+            <a:spAutoFit/>
+          </a:bodyPr>
+          <a:lstStyle/>
+          <a:p>
+            <a:pPr algn="l">
+              <a:lnSpc>
+                <a:spcPct val="135000"/>
+              </a:lnSpc>
+              <a:spcAft>
+                <a:spcPts val="700"/>
+              </a:spcAft>
+            </a:pPr>
+            <a:r>
+              <a:rPr sz="1300" b="0" i="0">
+                <a:solidFill>
+                  <a:srgbClr val="52514E"/>
+                </a:solidFill>
+                <a:latin typeface="Helvetica Neue"/>
+              </a:rPr>
+              <a:t>—  MMLU subject spread is real, not noise: observed SD 13.3 pp, and after removing the binomial variance of ~50 questions per subject, 92% of it survives (a null of identical subjects averages ~8%).</a:t>
+            </a:r>
+          </a:p>
+          <a:p>
+            <a:pPr algn="l">
+              <a:lnSpc>
+                <a:spcPct val="135000"/>
+              </a:lnSpc>
+              <a:spcAft>
+                <a:spcPts val="700"/>
+              </a:spcAft>
+            </a:pPr>
+            <a:r>
+              <a:rPr sz="1300" b="0" i="0">
+                <a:solidFill>
+                  <a:srgbClr val="52514E"/>
+                </a:solidFill>
+                <a:latin typeface="Helvetica Neue"/>
+              </a:rPr>
+              <a:t>—  LAMBADA: target fragmentation outweighs passage length two to three times over. The gap is a vocabulary handicap, not a context-window one.</a:t>
+            </a:r>
+          </a:p>
+          <a:p>
+            <a:pPr algn="l">
+              <a:lnSpc>
+                <a:spcPct val="135000"/>
+              </a:lnSpc>
+              <a:spcAft>
+                <a:spcPts val="700"/>
+              </a:spcAft>
+            </a:pPr>
+            <a:r>
+              <a:rPr sz="1300" b="0" i="0">
+                <a:solidFill>
+                  <a:srgbClr val="52514E"/>
+                </a:solidFill>
+                <a:latin typeface="Helvetica Neue"/>
+              </a:rPr>
+              <a:t>—  MMLU: the correct option's position shifts accuracy by 7 points - a property of the harness, not of the knowledge tested, which is why the robustness stage permutes options.</a:t>
+            </a:r>
+          </a:p>
+        </p:txBody>
+      </p:sp>
+    </p:spTree>
+  </p:cSld>
+  <p:clrMapOvr>
+    <a:masterClrMapping/>
+  </p:clrMapOvr>
+</p:sld>
+</file>
+
+<file path=ppt/slides/slide31.xml><?xml version="1.0" encoding="utf-8"?>
+<p:sld xmlns:a="http://schemas.openxmlformats.org/drawingml/2006/main" xmlns:p="http://schemas.openxmlformats.org/presentationml/2006/main" xmlns:r="http://schemas.openxmlformats.org/officeDocument/2006/relationships">
+  <p:cSld>
+    <p:spTree>
+      <p:nvGrpSpPr>
+        <p:cNvPr id="1" name=""/>
+        <p:cNvGrpSpPr/>
+        <p:nvPr/>
+      </p:nvGrpSpPr>
+      <p:grpSpPr/>
+      <p:sp>
+        <p:nvSpPr>
+          <p:cNvPr id="2" name="Rectangle 1"/>
+          <p:cNvSpPr/>
+          <p:nvPr/>
+        </p:nvSpPr>
+        <p:spPr>
+          <a:xfrm>
+            <a:off x="0" y="0"/>
+            <a:ext cx="12191695" cy="6858000"/>
+          </a:xfrm>
+          <a:prstGeom prst="rect">
+            <a:avLst/>
+          </a:prstGeom>
+          <a:solidFill>
+            <a:srgbClr val="FCFCFB"/>
+          </a:solidFill>
+          <a:ln>
+            <a:noFill/>
+          </a:ln>
+          <a:effectLst/>
+        </p:spPr>
+        <p:style>
+          <a:lnRef idx="1">
+            <a:schemeClr val="accent1"/>
+          </a:lnRef>
+          <a:fillRef idx="3">
+            <a:schemeClr val="accent1"/>
+          </a:fillRef>
+          <a:effectRef idx="2">
+            <a:schemeClr val="accent1"/>
+          </a:effectRef>
+          <a:fontRef idx="minor">
+            <a:schemeClr val="lt1"/>
+          </a:fontRef>
+        </p:style>
+        <p:txBody>
+          <a:bodyPr rtlCol="0" anchor="ctr"/>
+          <a:lstStyle/>
+          <a:p>
+            <a:pPr algn="ctr"/>
+          </a:p>
+        </p:txBody>
+      </p:sp>
+      <p:sp>
+        <p:nvSpPr>
+          <p:cNvPr id="3" name="TextBox 2"/>
+          <p:cNvSpPr txBox="1"/>
+          <p:nvPr/>
+        </p:nvSpPr>
+        <p:spPr>
+          <a:xfrm>
+            <a:off x="548640" y="6510528"/>
+            <a:ext cx="5486400" cy="274320"/>
+          </a:xfrm>
+          <a:prstGeom prst="rect">
+            <a:avLst/>
+          </a:prstGeom>
+          <a:noFill/>
+        </p:spPr>
+        <p:txBody>
+          <a:bodyPr wrap="square">
+            <a:spAutoFit/>
+          </a:bodyPr>
+          <a:lstStyle/>
+          <a:p>
+            <a:pPr algn="l">
+              <a:lnSpc>
+                <a:spcPct val="115000"/>
+              </a:lnSpc>
+            </a:pPr>
+            <a:r>
+              <a:rPr sz="900" b="0" i="0">
+                <a:solidFill>
+                  <a:srgbClr val="898781"/>
+                </a:solidFill>
+                <a:latin typeface="Helvetica Neue"/>
+              </a:rPr>
+              <a:t>LAMBADA &amp; MMLU Benchmark Evaluation — Extended</a:t>
+            </a:r>
+          </a:p>
+        </p:txBody>
+      </p:sp>
+      <p:sp>
+        <p:nvSpPr>
+          <p:cNvPr id="4" name="TextBox 3"/>
+          <p:cNvSpPr txBox="1"/>
+          <p:nvPr/>
+        </p:nvSpPr>
+        <p:spPr>
+          <a:xfrm>
+            <a:off x="11338560" y="6510528"/>
+            <a:ext cx="457200" cy="274320"/>
+          </a:xfrm>
+          <a:prstGeom prst="rect">
+            <a:avLst/>
+          </a:prstGeom>
+          <a:noFill/>
+        </p:spPr>
+        <p:txBody>
+          <a:bodyPr wrap="square">
+            <a:spAutoFit/>
+          </a:bodyPr>
+          <a:lstStyle/>
+          <a:p>
+            <a:pPr algn="r">
+              <a:lnSpc>
+                <a:spcPct val="115000"/>
+              </a:lnSpc>
+            </a:pPr>
+            <a:r>
+              <a:rPr sz="900" b="0" i="0">
+                <a:solidFill>
+                  <a:srgbClr val="898781"/>
+                </a:solidFill>
+                <a:latin typeface="Helvetica Neue"/>
+              </a:rPr>
+              <a:t>30</a:t>
+            </a:r>
+          </a:p>
+        </p:txBody>
+      </p:sp>
+      <p:sp>
+        <p:nvSpPr>
+          <p:cNvPr id="5" name="TextBox 4"/>
+          <p:cNvSpPr txBox="1"/>
+          <p:nvPr/>
+        </p:nvSpPr>
+        <p:spPr>
+          <a:xfrm>
+            <a:off x="548640" y="320040"/>
+            <a:ext cx="10058400" cy="320040"/>
+          </a:xfrm>
+          <a:prstGeom prst="rect">
+            <a:avLst/>
+          </a:prstGeom>
+          <a:noFill/>
+        </p:spPr>
+        <p:txBody>
+          <a:bodyPr wrap="square">
+            <a:spAutoFit/>
+          </a:bodyPr>
+          <a:lstStyle/>
+          <a:p>
+            <a:pPr algn="l">
+              <a:lnSpc>
+                <a:spcPct val="115000"/>
+              </a:lnSpc>
+            </a:pPr>
+            <a:r>
+              <a:rPr sz="1250" b="1" i="0">
+                <a:solidFill>
+                  <a:srgbClr val="2A78D6"/>
+                </a:solidFill>
+                <a:latin typeface="Helvetica Neue"/>
+              </a:rPr>
+              <a:t>DISCUSSION OF THE RESULTS</a:t>
+            </a:r>
+          </a:p>
+        </p:txBody>
+      </p:sp>
+      <p:sp>
+        <p:nvSpPr>
+          <p:cNvPr id="6" name="TextBox 5"/>
+          <p:cNvSpPr txBox="1"/>
+          <p:nvPr/>
+        </p:nvSpPr>
+        <p:spPr>
+          <a:xfrm>
+            <a:off x="548640" y="914400"/>
+            <a:ext cx="11064240" cy="640080"/>
+          </a:xfrm>
+          <a:prstGeom prst="rect">
+            <a:avLst/>
+          </a:prstGeom>
+          <a:noFill/>
+        </p:spPr>
+        <p:txBody>
+          <a:bodyPr wrap="square">
+            <a:spAutoFit/>
+          </a:bodyPr>
+          <a:lstStyle/>
+          <a:p>
+            <a:pPr algn="l">
+              <a:lnSpc>
+                <a:spcPct val="115000"/>
+              </a:lnSpc>
+            </a:pPr>
+            <a:r>
+              <a:rPr sz="2600" b="1" i="0">
+                <a:solidFill>
+                  <a:srgbClr val="0B0B0B"/>
+                </a:solidFill>
+                <a:latin typeface="Helvetica Neue"/>
+              </a:rPr>
+              <a:t>Findings accuracy alone would have missed</a:t>
             </a:r>
           </a:p>
         </p:txBody>
@@ -18351,8 +23002,8 @@
           <p:nvPr/>
         </p:nvGraphicFramePr>
         <p:xfrm>
-          <a:off x="548640" y="1783080"/>
-          <a:ext cx="11064237" cy="1682496"/>
+          <a:off x="548640" y="1737360"/>
+          <a:ext cx="11064239" cy="3401568"/>
         </p:xfrm>
         <a:graphic>
           <a:graphicData uri="http://schemas.openxmlformats.org/drawingml/2006/table">
@@ -18361,14 +23012,10 @@
                 <a:tableStyleId>{5C22544A-7EE6-4342-B048-85BDC9FD1C3A}</a:tableStyleId>
               </a:tblPr>
               <a:tblGrid>
-                <a:gridCol w="2434132"/>
-                <a:gridCol w="1880920"/>
-                <a:gridCol w="1438351"/>
-                <a:gridCol w="1548993"/>
-                <a:gridCol w="1548993"/>
-                <a:gridCol w="2212848"/>
+                <a:gridCol w="1991563"/>
+                <a:gridCol w="9072676"/>
               </a:tblGrid>
-              <a:tr h="420624">
+              <a:tr h="566928">
                 <a:tc>
                   <a:txBody>
                     <a:bodyPr/>
@@ -18376,13 +23023,13 @@
                     <a:p>
                       <a:pPr algn="l"/>
                       <a:r>
-                        <a:rPr sz="1250" b="1">
+                        <a:rPr sz="1200" b="1">
                           <a:solidFill>
                             <a:srgbClr val="FFFFFF"/>
                           </a:solidFill>
                           <a:latin typeface="Helvetica Neue"/>
                         </a:rPr>
-                        <a:t>Model</a:t>
+                        <a:t>Stage</a:t>
                       </a:r>
                     </a:p>
                   </a:txBody>
@@ -18399,13 +23046,13 @@
                     <a:p>
                       <a:pPr algn="ctr"/>
                       <a:r>
-                        <a:rPr sz="1250" b="1">
+                        <a:rPr sz="1200" b="1">
                           <a:solidFill>
                             <a:srgbClr val="FFFFFF"/>
                           </a:solidFill>
                           <a:latin typeface="Helvetica Neue"/>
                         </a:rPr>
-                        <a:t>1-token targets</a:t>
+                        <a:t>Finding</a:t>
                       </a:r>
                     </a:p>
                   </a:txBody>
@@ -18415,100 +23062,8 @@
                     </a:solidFill>
                   </a:tcPr>
                 </a:tc>
-                <a:tc>
-                  <a:txBody>
-                    <a:bodyPr/>
-                    <a:lstStyle/>
-                    <a:p>
-                      <a:pPr algn="ctr"/>
-                      <a:r>
-                        <a:rPr sz="1250" b="1">
-                          <a:solidFill>
-                            <a:srgbClr val="FFFFFF"/>
-                          </a:solidFill>
-                          <a:latin typeface="Helvetica Neue"/>
-                        </a:rPr>
-                        <a:t>2-token</a:t>
-                      </a:r>
-                    </a:p>
-                  </a:txBody>
-                  <a:tcPr marL="73152" marR="73152" marT="27432" marB="27432" anchor="ctr">
-                    <a:solidFill>
-                      <a:srgbClr val="0B0B0B"/>
-                    </a:solidFill>
-                  </a:tcPr>
-                </a:tc>
-                <a:tc>
-                  <a:txBody>
-                    <a:bodyPr/>
-                    <a:lstStyle/>
-                    <a:p>
-                      <a:pPr algn="ctr"/>
-                      <a:r>
-                        <a:rPr sz="1250" b="1">
-                          <a:solidFill>
-                            <a:srgbClr val="FFFFFF"/>
-                          </a:solidFill>
-                          <a:latin typeface="Helvetica Neue"/>
-                        </a:rPr>
-                        <a:t>3+-token</a:t>
-                      </a:r>
-                    </a:p>
-                  </a:txBody>
-                  <a:tcPr marL="73152" marR="73152" marT="27432" marB="27432" anchor="ctr">
-                    <a:solidFill>
-                      <a:srgbClr val="0B0B0B"/>
-                    </a:solidFill>
-                  </a:tcPr>
-                </a:tc>
-                <a:tc>
-                  <a:txBody>
-                    <a:bodyPr/>
-                    <a:lstStyle/>
-                    <a:p>
-                      <a:pPr algn="ctr"/>
-                      <a:r>
-                        <a:rPr sz="1250" b="1">
-                          <a:solidFill>
-                            <a:srgbClr val="FFFFFF"/>
-                          </a:solidFill>
-                          <a:latin typeface="Helvetica Neue"/>
-                        </a:rPr>
-                        <a:t>Collapse</a:t>
-                      </a:r>
-                    </a:p>
-                  </a:txBody>
-                  <a:tcPr marL="73152" marR="73152" marT="27432" marB="27432" anchor="ctr">
-                    <a:solidFill>
-                      <a:srgbClr val="0B0B0B"/>
-                    </a:solidFill>
-                  </a:tcPr>
-                </a:tc>
-                <a:tc>
-                  <a:txBody>
-                    <a:bodyPr/>
-                    <a:lstStyle/>
-                    <a:p>
-                      <a:pPr algn="ctr"/>
-                      <a:r>
-                        <a:rPr sz="1250" b="1">
-                          <a:solidFill>
-                            <a:srgbClr val="FFFFFF"/>
-                          </a:solidFill>
-                          <a:latin typeface="Helvetica Neue"/>
-                        </a:rPr>
-                        <a:t>Tokenizer exact?</a:t>
-                      </a:r>
-                    </a:p>
-                  </a:txBody>
-                  <a:tcPr marL="73152" marR="73152" marT="27432" marB="27432" anchor="ctr">
-                    <a:solidFill>
-                      <a:srgbClr val="0B0B0B"/>
-                    </a:solidFill>
-                  </a:tcPr>
-                </a:tc>
               </a:tr>
-              <a:tr h="420624">
+              <a:tr h="566928">
                 <a:tc>
                   <a:txBody>
                     <a:bodyPr/>
@@ -18516,128 +23071,36 @@
                     <a:p>
                       <a:pPr algn="l"/>
                       <a:r>
-                        <a:rPr sz="1250" b="0">
-                          <a:solidFill>
-                            <a:srgbClr val="0B0B0B"/>
-                          </a:solidFill>
-                          <a:latin typeface="Helvetica Neue"/>
-                        </a:rPr>
-                        <a:t>Gemma-3-4B</a:t>
-                      </a:r>
-                    </a:p>
-                  </a:txBody>
-                  <a:tcPr marL="73152" marR="73152" marT="27432" marB="27432" anchor="ctr">
-                    <a:solidFill>
-                      <a:srgbClr val="FCFCFB"/>
-                    </a:solidFill>
-                  </a:tcPr>
-                </a:tc>
-                <a:tc>
-                  <a:txBody>
-                    <a:bodyPr/>
-                    <a:lstStyle/>
-                    <a:p>
-                      <a:pPr algn="ctr"/>
-                      <a:r>
-                        <a:rPr sz="1250" b="0">
-                          <a:solidFill>
-                            <a:srgbClr val="0B0B0B"/>
-                          </a:solidFill>
-                          <a:latin typeface="Helvetica Neue"/>
-                        </a:rPr>
-                        <a:t>23.6%</a:t>
-                      </a:r>
-                    </a:p>
-                  </a:txBody>
-                  <a:tcPr marL="73152" marR="73152" marT="27432" marB="27432" anchor="ctr">
-                    <a:solidFill>
-                      <a:srgbClr val="FCFCFB"/>
-                    </a:solidFill>
-                  </a:tcPr>
-                </a:tc>
-                <a:tc>
-                  <a:txBody>
-                    <a:bodyPr/>
-                    <a:lstStyle/>
-                    <a:p>
-                      <a:pPr algn="ctr"/>
-                      <a:r>
-                        <a:rPr sz="1250" b="0">
-                          <a:solidFill>
-                            <a:srgbClr val="0B0B0B"/>
-                          </a:solidFill>
-                          <a:latin typeface="Helvetica Neue"/>
-                        </a:rPr>
-                        <a:t>10.6%</a:t>
-                      </a:r>
-                    </a:p>
-                  </a:txBody>
-                  <a:tcPr marL="73152" marR="73152" marT="27432" marB="27432" anchor="ctr">
-                    <a:solidFill>
-                      <a:srgbClr val="FCFCFB"/>
-                    </a:solidFill>
-                  </a:tcPr>
-                </a:tc>
-                <a:tc>
-                  <a:txBody>
-                    <a:bodyPr/>
-                    <a:lstStyle/>
-                    <a:p>
-                      <a:pPr algn="ctr"/>
-                      <a:r>
-                        <a:rPr sz="1250" b="0">
-                          <a:solidFill>
-                            <a:srgbClr val="0B0B0B"/>
-                          </a:solidFill>
-                          <a:latin typeface="Helvetica Neue"/>
-                        </a:rPr>
-                        <a:t>2.6%</a:t>
-                      </a:r>
-                    </a:p>
-                  </a:txBody>
-                  <a:tcPr marL="73152" marR="73152" marT="27432" marB="27432" anchor="ctr">
-                    <a:solidFill>
-                      <a:srgbClr val="FCFCFB"/>
-                    </a:solidFill>
-                  </a:tcPr>
-                </a:tc>
-                <a:tc>
-                  <a:txBody>
-                    <a:bodyPr/>
-                    <a:lstStyle/>
-                    <a:p>
-                      <a:pPr algn="ctr"/>
-                      <a:r>
-                        <a:rPr sz="1250" b="0">
-                          <a:solidFill>
-                            <a:srgbClr val="0B0B0B"/>
-                          </a:solidFill>
-                          <a:latin typeface="Helvetica Neue"/>
-                        </a:rPr>
-                        <a:t>+21.0 pp</a:t>
-                      </a:r>
-                    </a:p>
-                  </a:txBody>
-                  <a:tcPr marL="73152" marR="73152" marT="27432" marB="27432" anchor="ctr">
-                    <a:solidFill>
-                      <a:srgbClr val="FCFCFB"/>
-                    </a:solidFill>
-                  </a:tcPr>
-                </a:tc>
-                <a:tc>
-                  <a:txBody>
-                    <a:bodyPr/>
-                    <a:lstStyle/>
-                    <a:p>
-                      <a:pPr algn="ctr"/>
-                      <a:r>
-                        <a:rPr sz="1250" b="0">
-                          <a:solidFill>
-                            <a:srgbClr val="0B0B0B"/>
-                          </a:solidFill>
-                          <a:latin typeface="Helvetica Neue"/>
-                        </a:rPr>
-                        <a:t>no — fallback</a:t>
+                        <a:rPr sz="1200" b="0">
+                          <a:solidFill>
+                            <a:srgbClr val="0B0B0B"/>
+                          </a:solidFill>
+                          <a:latin typeface="Helvetica Neue"/>
+                        </a:rPr>
+                        <a:t>1 · Task Quality</a:t>
+                      </a:r>
+                    </a:p>
+                  </a:txBody>
+                  <a:tcPr marL="73152" marR="73152" marT="27432" marB="27432" anchor="ctr">
+                    <a:solidFill>
+                      <a:srgbClr val="FCFCFB"/>
+                    </a:solidFill>
+                  </a:tcPr>
+                </a:tc>
+                <a:tc>
+                  <a:txBody>
+                    <a:bodyPr/>
+                    <a:lstStyle/>
+                    <a:p>
+                      <a:pPr algn="ctr"/>
+                      <a:r>
+                        <a:rPr sz="1200" b="0">
+                          <a:solidFill>
+                            <a:srgbClr val="0B0B0B"/>
+                          </a:solidFill>
+                          <a:latin typeface="Helvetica Neue"/>
+                        </a:rPr>
+                        <a:t>Llama-3.2-3B returns no parseable answer on 11.7% of questions — disobedience scored as ignorance.</a:t>
                       </a:r>
                     </a:p>
                   </a:txBody>
@@ -18648,7 +23111,7 @@
                   </a:tcPr>
                 </a:tc>
               </a:tr>
-              <a:tr h="420624">
+              <a:tr h="566928">
                 <a:tc>
                   <a:txBody>
                     <a:bodyPr/>
@@ -18656,128 +23119,36 @@
                     <a:p>
                       <a:pPr algn="l"/>
                       <a:r>
-                        <a:rPr sz="1250" b="0">
-                          <a:solidFill>
-                            <a:srgbClr val="0B0B0B"/>
-                          </a:solidFill>
-                          <a:latin typeface="Helvetica Neue"/>
-                        </a:rPr>
-                        <a:t>Llama-3.2-3B</a:t>
-                      </a:r>
-                    </a:p>
-                  </a:txBody>
-                  <a:tcPr marL="73152" marR="73152" marT="27432" marB="27432" anchor="ctr">
-                    <a:solidFill>
-                      <a:srgbClr val="FCFCFB"/>
-                    </a:solidFill>
-                  </a:tcPr>
-                </a:tc>
-                <a:tc>
-                  <a:txBody>
-                    <a:bodyPr/>
-                    <a:lstStyle/>
-                    <a:p>
-                      <a:pPr algn="ctr"/>
-                      <a:r>
-                        <a:rPr sz="1250" b="0">
-                          <a:solidFill>
-                            <a:srgbClr val="0B0B0B"/>
-                          </a:solidFill>
-                          <a:latin typeface="Helvetica Neue"/>
-                        </a:rPr>
-                        <a:t>29.5%</a:t>
-                      </a:r>
-                    </a:p>
-                  </a:txBody>
-                  <a:tcPr marL="73152" marR="73152" marT="27432" marB="27432" anchor="ctr">
-                    <a:solidFill>
-                      <a:srgbClr val="FCFCFB"/>
-                    </a:solidFill>
-                  </a:tcPr>
-                </a:tc>
-                <a:tc>
-                  <a:txBody>
-                    <a:bodyPr/>
-                    <a:lstStyle/>
-                    <a:p>
-                      <a:pPr algn="ctr"/>
-                      <a:r>
-                        <a:rPr sz="1250" b="0">
-                          <a:solidFill>
-                            <a:srgbClr val="0B0B0B"/>
-                          </a:solidFill>
-                          <a:latin typeface="Helvetica Neue"/>
-                        </a:rPr>
-                        <a:t>13.4%</a:t>
-                      </a:r>
-                    </a:p>
-                  </a:txBody>
-                  <a:tcPr marL="73152" marR="73152" marT="27432" marB="27432" anchor="ctr">
-                    <a:solidFill>
-                      <a:srgbClr val="FCFCFB"/>
-                    </a:solidFill>
-                  </a:tcPr>
-                </a:tc>
-                <a:tc>
-                  <a:txBody>
-                    <a:bodyPr/>
-                    <a:lstStyle/>
-                    <a:p>
-                      <a:pPr algn="ctr"/>
-                      <a:r>
-                        <a:rPr sz="1250" b="0">
-                          <a:solidFill>
-                            <a:srgbClr val="0B0B0B"/>
-                          </a:solidFill>
-                          <a:latin typeface="Helvetica Neue"/>
-                        </a:rPr>
-                        <a:t>2.6%</a:t>
-                      </a:r>
-                    </a:p>
-                  </a:txBody>
-                  <a:tcPr marL="73152" marR="73152" marT="27432" marB="27432" anchor="ctr">
-                    <a:solidFill>
-                      <a:srgbClr val="FCFCFB"/>
-                    </a:solidFill>
-                  </a:tcPr>
-                </a:tc>
-                <a:tc>
-                  <a:txBody>
-                    <a:bodyPr/>
-                    <a:lstStyle/>
-                    <a:p>
-                      <a:pPr algn="ctr"/>
-                      <a:r>
-                        <a:rPr sz="1250" b="0">
-                          <a:solidFill>
-                            <a:srgbClr val="0B0B0B"/>
-                          </a:solidFill>
-                          <a:latin typeface="Helvetica Neue"/>
-                        </a:rPr>
-                        <a:t>+26.9 pp</a:t>
-                      </a:r>
-                    </a:p>
-                  </a:txBody>
-                  <a:tcPr marL="73152" marR="73152" marT="27432" marB="27432" anchor="ctr">
-                    <a:solidFill>
-                      <a:srgbClr val="FCFCFB"/>
-                    </a:solidFill>
-                  </a:tcPr>
-                </a:tc>
-                <a:tc>
-                  <a:txBody>
-                    <a:bodyPr/>
-                    <a:lstStyle/>
-                    <a:p>
-                      <a:pPr algn="ctr"/>
-                      <a:r>
-                        <a:rPr sz="1250" b="0">
-                          <a:solidFill>
-                            <a:srgbClr val="0B0B0B"/>
-                          </a:solidFill>
-                          <a:latin typeface="Helvetica Neue"/>
-                        </a:rPr>
-                        <a:t>no — fallback</a:t>
+                        <a:rPr sz="1200" b="0">
+                          <a:solidFill>
+                            <a:srgbClr val="0B0B0B"/>
+                          </a:solidFill>
+                          <a:latin typeface="Helvetica Neue"/>
+                        </a:rPr>
+                        <a:t>Tokenization</a:t>
+                      </a:r>
+                    </a:p>
+                  </a:txBody>
+                  <a:tcPr marL="73152" marR="73152" marT="27432" marB="27432" anchor="ctr">
+                    <a:solidFill>
+                      <a:srgbClr val="FCFCFB"/>
+                    </a:solidFill>
+                  </a:tcPr>
+                </a:tc>
+                <a:tc>
+                  <a:txBody>
+                    <a:bodyPr/>
+                    <a:lstStyle/>
+                    <a:p>
+                      <a:pPr algn="ctr"/>
+                      <a:r>
+                        <a:rPr sz="1200" b="0">
+                          <a:solidFill>
+                            <a:srgbClr val="0B0B0B"/>
+                          </a:solidFill>
+                          <a:latin typeface="Helvetica Neue"/>
+                        </a:rPr>
+                        <a:t>On 3+-token targets Ministral-8B holds 34% while Gemma-3-4B collapses to 3% — a vocabulary handicap, not a comprehension gap.</a:t>
                       </a:r>
                     </a:p>
                   </a:txBody>
@@ -18788,7 +23159,7 @@
                   </a:tcPr>
                 </a:tc>
               </a:tr>
-              <a:tr h="420624">
+              <a:tr h="566928">
                 <a:tc>
                   <a:txBody>
                     <a:bodyPr/>
@@ -18796,128 +23167,132 @@
                     <a:p>
                       <a:pPr algn="l"/>
                       <a:r>
-                        <a:rPr sz="1250" b="0">
-                          <a:solidFill>
-                            <a:srgbClr val="0B0B0B"/>
-                          </a:solidFill>
-                          <a:latin typeface="Helvetica Neue"/>
-                        </a:rPr>
-                        <a:t>Ministral-8B</a:t>
-                      </a:r>
-                    </a:p>
-                  </a:txBody>
-                  <a:tcPr marL="73152" marR="73152" marT="27432" marB="27432" anchor="ctr">
-                    <a:solidFill>
-                      <a:srgbClr val="FCFCFB"/>
-                    </a:solidFill>
-                  </a:tcPr>
-                </a:tc>
-                <a:tc>
-                  <a:txBody>
-                    <a:bodyPr/>
-                    <a:lstStyle/>
-                    <a:p>
-                      <a:pPr algn="ctr"/>
-                      <a:r>
-                        <a:rPr sz="1250" b="0">
-                          <a:solidFill>
-                            <a:srgbClr val="0B0B0B"/>
-                          </a:solidFill>
-                          <a:latin typeface="Helvetica Neue"/>
-                        </a:rPr>
-                        <a:t>44.3%</a:t>
-                      </a:r>
-                    </a:p>
-                  </a:txBody>
-                  <a:tcPr marL="73152" marR="73152" marT="27432" marB="27432" anchor="ctr">
-                    <a:solidFill>
-                      <a:srgbClr val="FCFCFB"/>
-                    </a:solidFill>
-                  </a:tcPr>
-                </a:tc>
-                <a:tc>
-                  <a:txBody>
-                    <a:bodyPr/>
-                    <a:lstStyle/>
-                    <a:p>
-                      <a:pPr algn="ctr"/>
-                      <a:r>
-                        <a:rPr sz="1250" b="0">
-                          <a:solidFill>
-                            <a:srgbClr val="0B0B0B"/>
-                          </a:solidFill>
-                          <a:latin typeface="Helvetica Neue"/>
-                        </a:rPr>
-                        <a:t>34.8%</a:t>
-                      </a:r>
-                    </a:p>
-                  </a:txBody>
-                  <a:tcPr marL="73152" marR="73152" marT="27432" marB="27432" anchor="ctr">
-                    <a:solidFill>
-                      <a:srgbClr val="FCFCFB"/>
-                    </a:solidFill>
-                  </a:tcPr>
-                </a:tc>
-                <a:tc>
-                  <a:txBody>
-                    <a:bodyPr/>
-                    <a:lstStyle/>
-                    <a:p>
-                      <a:pPr algn="ctr"/>
-                      <a:r>
-                        <a:rPr sz="1250" b="0">
-                          <a:solidFill>
-                            <a:srgbClr val="0B0B0B"/>
-                          </a:solidFill>
-                          <a:latin typeface="Helvetica Neue"/>
-                        </a:rPr>
-                        <a:t>34.5%</a:t>
-                      </a:r>
-                    </a:p>
-                  </a:txBody>
-                  <a:tcPr marL="73152" marR="73152" marT="27432" marB="27432" anchor="ctr">
-                    <a:solidFill>
-                      <a:srgbClr val="FCFCFB"/>
-                    </a:solidFill>
-                  </a:tcPr>
-                </a:tc>
-                <a:tc>
-                  <a:txBody>
-                    <a:bodyPr/>
-                    <a:lstStyle/>
-                    <a:p>
-                      <a:pPr algn="ctr"/>
-                      <a:r>
-                        <a:rPr sz="1250" b="0">
-                          <a:solidFill>
-                            <a:srgbClr val="0B0B0B"/>
-                          </a:solidFill>
-                          <a:latin typeface="Helvetica Neue"/>
-                        </a:rPr>
-                        <a:t>+9.8 pp</a:t>
-                      </a:r>
-                    </a:p>
-                  </a:txBody>
-                  <a:tcPr marL="73152" marR="73152" marT="27432" marB="27432" anchor="ctr">
-                    <a:solidFill>
-                      <a:srgbClr val="FCFCFB"/>
-                    </a:solidFill>
-                  </a:tcPr>
-                </a:tc>
-                <a:tc>
-                  <a:txBody>
-                    <a:bodyPr/>
-                    <a:lstStyle/>
-                    <a:p>
-                      <a:pPr algn="ctr"/>
-                      <a:r>
-                        <a:rPr sz="1250" b="0">
-                          <a:solidFill>
-                            <a:srgbClr val="0B0B0B"/>
-                          </a:solidFill>
-                          <a:latin typeface="Helvetica Neue"/>
-                        </a:rPr>
-                        <a:t>yes</a:t>
+                        <a:rPr sz="1200" b="0">
+                          <a:solidFill>
+                            <a:srgbClr val="0B0B0B"/>
+                          </a:solidFill>
+                          <a:latin typeface="Helvetica Neue"/>
+                        </a:rPr>
+                        <a:t>9 · Reliability</a:t>
+                      </a:r>
+                    </a:p>
+                  </a:txBody>
+                  <a:tcPr marL="73152" marR="73152" marT="27432" marB="27432" anchor="ctr">
+                    <a:solidFill>
+                      <a:srgbClr val="FCFCFB"/>
+                    </a:solidFill>
+                  </a:tcPr>
+                </a:tc>
+                <a:tc>
+                  <a:txBody>
+                    <a:bodyPr/>
+                    <a:lstStyle/>
+                    <a:p>
+                      <a:pPr algn="ctr"/>
+                      <a:r>
+                        <a:rPr sz="1200" b="0">
+                          <a:solidFill>
+                            <a:srgbClr val="0B0B0B"/>
+                          </a:solidFill>
+                          <a:latin typeface="Helvetica Neue"/>
+                        </a:rPr>
+                        <a:t>Gemma-3-4B: 40 retries, 0.1% transport failures — invisible in an accuracy table and unrecoverable after the fact without this stage.</a:t>
+                      </a:r>
+                    </a:p>
+                  </a:txBody>
+                  <a:tcPr marL="73152" marR="73152" marT="27432" marB="27432" anchor="ctr">
+                    <a:solidFill>
+                      <a:srgbClr val="FCFCFB"/>
+                    </a:solidFill>
+                  </a:tcPr>
+                </a:tc>
+              </a:tr>
+              <a:tr h="566928">
+                <a:tc>
+                  <a:txBody>
+                    <a:bodyPr/>
+                    <a:lstStyle/>
+                    <a:p>
+                      <a:pPr algn="l"/>
+                      <a:r>
+                        <a:rPr sz="1200" b="0">
+                          <a:solidFill>
+                            <a:srgbClr val="0B0B0B"/>
+                          </a:solidFill>
+                          <a:latin typeface="Helvetica Neue"/>
+                        </a:rPr>
+                        <a:t>8 · Economics</a:t>
+                      </a:r>
+                    </a:p>
+                  </a:txBody>
+                  <a:tcPr marL="73152" marR="73152" marT="27432" marB="27432" anchor="ctr">
+                    <a:solidFill>
+                      <a:srgbClr val="FCFCFB"/>
+                    </a:solidFill>
+                  </a:tcPr>
+                </a:tc>
+                <a:tc>
+                  <a:txBody>
+                    <a:bodyPr/>
+                    <a:lstStyle/>
+                    <a:p>
+                      <a:pPr algn="ctr"/>
+                      <a:r>
+                        <a:rPr sz="1200" b="0">
+                          <a:solidFill>
+                            <a:srgbClr val="0B0B0B"/>
+                          </a:solidFill>
+                          <a:latin typeface="Helvetica Neue"/>
+                        </a:rPr>
+                        <a:t>Llama-3.2-3B costs 1.8× more per correct answer than Gemma-3-4B — token price inverts once accuracy is applied.</a:t>
+                      </a:r>
+                    </a:p>
+                  </a:txBody>
+                  <a:tcPr marL="73152" marR="73152" marT="27432" marB="27432" anchor="ctr">
+                    <a:solidFill>
+                      <a:srgbClr val="FCFCFB"/>
+                    </a:solidFill>
+                  </a:tcPr>
+                </a:tc>
+              </a:tr>
+              <a:tr h="566928">
+                <a:tc>
+                  <a:txBody>
+                    <a:bodyPr/>
+                    <a:lstStyle/>
+                    <a:p>
+                      <a:pPr algn="l"/>
+                      <a:r>
+                        <a:rPr sz="1200" b="0">
+                          <a:solidFill>
+                            <a:srgbClr val="0B0B0B"/>
+                          </a:solidFill>
+                          <a:latin typeface="Helvetica Neue"/>
+                        </a:rPr>
+                        <a:t>2 · Probabilistic</a:t>
+                      </a:r>
+                    </a:p>
+                  </a:txBody>
+                  <a:tcPr marL="73152" marR="73152" marT="27432" marB="27432" anchor="ctr">
+                    <a:solidFill>
+                      <a:srgbClr val="FCFCFB"/>
+                    </a:solidFill>
+                  </a:tcPr>
+                </a:tc>
+                <a:tc>
+                  <a:txBody>
+                    <a:bodyPr/>
+                    <a:lstStyle/>
+                    <a:p>
+                      <a:pPr algn="ctr"/>
+                      <a:r>
+                        <a:rPr sz="1200" b="0">
+                          <a:solidFill>
+                            <a:srgbClr val="0B0B0B"/>
+                          </a:solidFill>
+                          <a:latin typeface="Helvetica Neue"/>
+                        </a:rPr>
+                        <a:t>Whether calibration is obtainable at all depends on which provider OpenRouter routes to — a property of the serving path, not the model.</a:t>
                       </a:r>
                     </a:p>
                   </a:txBody>
@@ -18932,106 +23307,6 @@
           </a:graphicData>
         </a:graphic>
       </p:graphicFrame>
-      <p:sp>
-        <p:nvSpPr>
-          <p:cNvPr id="9" name="TextBox 8"/>
-          <p:cNvSpPr txBox="1"/>
-          <p:nvPr/>
-        </p:nvSpPr>
-        <p:spPr>
-          <a:xfrm>
-            <a:off x="548640" y="3703320"/>
-            <a:ext cx="11064240" cy="1005840"/>
-          </a:xfrm>
-          <a:prstGeom prst="rect">
-            <a:avLst/>
-          </a:prstGeom>
-          <a:noFill/>
-        </p:spPr>
-        <p:txBody>
-          <a:bodyPr wrap="square">
-            <a:spAutoFit/>
-          </a:bodyPr>
-          <a:lstStyle/>
-          <a:p>
-            <a:pPr algn="l">
-              <a:lnSpc>
-                <a:spcPct val="135000"/>
-              </a:lnSpc>
-              <a:spcAft>
-                <a:spcPts val="700"/>
-              </a:spcAft>
-            </a:pPr>
-            <a:r>
-              <a:rPr sz="1350" b="0" i="0">
-                <a:solidFill>
-                  <a:srgbClr val="52514E"/>
-                </a:solidFill>
-                <a:latin typeface="Helvetica Neue"/>
-              </a:rPr>
-              <a:t>—  A multi-token target must be produced correctly several times over — a mechanical handicap, not a comprehension one.</a:t>
-            </a:r>
-          </a:p>
-          <a:p>
-            <a:pPr algn="l">
-              <a:lnSpc>
-                <a:spcPct val="135000"/>
-              </a:lnSpc>
-              <a:spcAft>
-                <a:spcPts val="700"/>
-              </a:spcAft>
-            </a:pPr>
-            <a:r>
-              <a:rPr sz="1350" b="0" i="0">
-                <a:solidFill>
-                  <a:srgbClr val="52514E"/>
-                </a:solidFill>
-                <a:latin typeface="Helvetica Neue"/>
-              </a:rPr>
-              <a:t>—  Comparing raw LAMBADA scores without this split treats a vocabulary difference as a capability difference.</a:t>
-            </a:r>
-          </a:p>
-        </p:txBody>
-      </p:sp>
-      <p:sp>
-        <p:nvSpPr>
-          <p:cNvPr id="10" name="TextBox 9"/>
-          <p:cNvSpPr txBox="1"/>
-          <p:nvPr/>
-        </p:nvSpPr>
-        <p:spPr>
-          <a:xfrm>
-            <a:off x="548640" y="4846320"/>
-            <a:ext cx="11064240" cy="777240"/>
-          </a:xfrm>
-          <a:prstGeom prst="rect">
-            <a:avLst/>
-          </a:prstGeom>
-          <a:noFill/>
-        </p:spPr>
-        <p:txBody>
-          <a:bodyPr wrap="square">
-            <a:spAutoFit/>
-          </a:bodyPr>
-          <a:lstStyle/>
-          <a:p>
-            <a:pPr algn="l">
-              <a:lnSpc>
-                <a:spcPct val="130000"/>
-              </a:lnSpc>
-            </a:pPr>
-            <a:r>
-              <a:rPr sz="1250" b="0" i="0">
-                <a:solidFill>
-                  <a:srgbClr val="2A78D6"/>
-                </a:solidFill>
-                <a:latin typeface="Helvetica Neue"/>
-              </a:rPr>
-              <a:t>Caveat: Gemma-3-4B, Llama-3.2-3B fell back to a generic BPE vocabulary because their Hugging Face tokenizers are gated. The trend within each model holds; the fragmentation rates are not comparable across models.</a:t>
-            </a:r>
-          </a:p>
-        </p:txBody>
-      </p:sp>
     </p:spTree>
   </p:cSld>
   <p:clrMapOvr>
@@ -19040,7 +23315,7 @@
 </p:sld>
 </file>
 
-<file path=ppt/slides/slide29.xml><?xml version="1.0" encoding="utf-8"?>
+<file path=ppt/slides/slide32.xml><?xml version="1.0" encoding="utf-8"?>
 <p:sld xmlns:a="http://schemas.openxmlformats.org/drawingml/2006/main" xmlns:p="http://schemas.openxmlformats.org/presentationml/2006/main" xmlns:r="http://schemas.openxmlformats.org/officeDocument/2006/relationships">
   <p:cSld>
     <p:spTree>
@@ -19167,7 +23442,7 @@
                 </a:solidFill>
                 <a:latin typeface="Helvetica Neue"/>
               </a:rPr>
-              <a:t>28</a:t>
+              <a:t>31</a:t>
             </a:r>
           </a:p>
         </p:txBody>
@@ -19180,8 +23455,8 @@
         </p:nvSpPr>
         <p:spPr>
           <a:xfrm>
-            <a:off x="548640" y="502920"/>
-            <a:ext cx="11064240" cy="640080"/>
+            <a:off x="548640" y="320040"/>
+            <a:ext cx="10058400" cy="320040"/>
           </a:xfrm>
           <a:prstGeom prst="rect">
             <a:avLst/>
@@ -19200,62 +23475,27 @@
               </a:lnSpc>
             </a:pPr>
             <a:r>
-              <a:rPr sz="3000" b="1" i="0">
-                <a:solidFill>
-                  <a:srgbClr val="0B0B0B"/>
+              <a:rPr sz="1250" b="1" i="0">
+                <a:solidFill>
+                  <a:srgbClr val="2A78D6"/>
                 </a:solidFill>
                 <a:latin typeface="Helvetica Neue"/>
               </a:rPr>
-              <a:t>Conclusions</a:t>
-            </a:r>
-          </a:p>
-        </p:txBody>
-      </p:sp>
-      <p:cxnSp>
-        <p:nvCxnSpPr>
-          <p:cNvPr id="6" name="Connector 5"/>
-          <p:cNvCxnSpPr/>
-          <p:nvPr/>
-        </p:nvCxnSpPr>
-        <p:spPr>
-          <a:xfrm>
-            <a:off x="548640" y="1188720"/>
-            <a:ext cx="11091672" cy="0"/>
-          </a:xfrm>
-          <a:prstGeom prst="line">
-            <a:avLst/>
-          </a:prstGeom>
-          <a:ln w="9525">
-            <a:solidFill>
-              <a:srgbClr val="E1E0D9"/>
-            </a:solidFill>
-          </a:ln>
-        </p:spPr>
-        <p:style>
-          <a:lnRef idx="2">
-            <a:schemeClr val="accent1"/>
-          </a:lnRef>
-          <a:fillRef idx="0">
-            <a:schemeClr val="accent1"/>
-          </a:fillRef>
-          <a:effectRef idx="1">
-            <a:schemeClr val="accent1"/>
-          </a:effectRef>
-          <a:fontRef idx="minor">
-            <a:schemeClr val="tx1"/>
-          </a:fontRef>
-        </p:style>
-      </p:cxnSp>
-      <p:sp>
-        <p:nvSpPr>
-          <p:cNvPr id="7" name="TextBox 6"/>
+              <a:t>DISCUSSION OF THE RESULTS</a:t>
+            </a:r>
+          </a:p>
+        </p:txBody>
+      </p:sp>
+      <p:sp>
+        <p:nvSpPr>
+          <p:cNvPr id="6" name="TextBox 5"/>
           <p:cNvSpPr txBox="1"/>
           <p:nvPr/>
         </p:nvSpPr>
         <p:spPr>
           <a:xfrm>
-            <a:off x="548640" y="1508760"/>
-            <a:ext cx="11064240" cy="384048"/>
+            <a:off x="548640" y="914400"/>
+            <a:ext cx="11064240" cy="640080"/>
           </a:xfrm>
           <a:prstGeom prst="rect">
             <a:avLst/>
@@ -19274,500 +23514,13 @@
               </a:lnSpc>
             </a:pPr>
             <a:r>
-              <a:rPr sz="1700" b="1" i="0">
+              <a:rPr sz="2600" b="1" i="0">
                 <a:solidFill>
                   <a:srgbClr val="0B0B0B"/>
                 </a:solidFill>
                 <a:latin typeface="Helvetica Neue"/>
               </a:rPr>
-              <a:t>Does a larger, non-distilled model beat smaller compressed ones?</a:t>
-            </a:r>
-          </a:p>
-        </p:txBody>
-      </p:sp>
-      <p:sp>
-        <p:nvSpPr>
-          <p:cNvPr id="8" name="TextBox 7"/>
-          <p:cNvSpPr txBox="1"/>
-          <p:nvPr/>
-        </p:nvSpPr>
-        <p:spPr>
-          <a:xfrm>
-            <a:off x="548640" y="1929384"/>
-            <a:ext cx="11064240" cy="1051560"/>
-          </a:xfrm>
-          <a:prstGeom prst="rect">
-            <a:avLst/>
-          </a:prstGeom>
-          <a:noFill/>
-        </p:spPr>
-        <p:txBody>
-          <a:bodyPr wrap="square">
-            <a:spAutoFit/>
-          </a:bodyPr>
-          <a:lstStyle/>
-          <a:p>
-            <a:pPr algn="l">
-              <a:lnSpc>
-                <a:spcPct val="130000"/>
-              </a:lnSpc>
-            </a:pPr>
-            <a:r>
-              <a:rPr sz="1400" b="0" i="0">
-                <a:solidFill>
-                  <a:srgbClr val="52514E"/>
-                </a:solidFill>
-                <a:latin typeface="Helvetica Neue"/>
-              </a:rPr>
-              <a:t>On task quality, consistently — Ministral-8B leads both benchmarks. But the nine-stage view shows the answer is not one-dimensional: the smaller models win on latency and, on MMLU, on cost per correct answer, and second place changes hands depending on whether reliability is counted.</a:t>
-            </a:r>
-          </a:p>
-        </p:txBody>
-      </p:sp>
-      <p:sp>
-        <p:nvSpPr>
-          <p:cNvPr id="9" name="TextBox 8"/>
-          <p:cNvSpPr txBox="1"/>
-          <p:nvPr/>
-        </p:nvSpPr>
-        <p:spPr>
-          <a:xfrm>
-            <a:off x="548640" y="3081528"/>
-            <a:ext cx="11064240" cy="384048"/>
-          </a:xfrm>
-          <a:prstGeom prst="rect">
-            <a:avLst/>
-          </a:prstGeom>
-          <a:noFill/>
-        </p:spPr>
-        <p:txBody>
-          <a:bodyPr wrap="square">
-            <a:spAutoFit/>
-          </a:bodyPr>
-          <a:lstStyle/>
-          <a:p>
-            <a:pPr algn="l">
-              <a:lnSpc>
-                <a:spcPct val="115000"/>
-              </a:lnSpc>
-            </a:pPr>
-            <a:r>
-              <a:rPr sz="1700" b="1" i="0">
-                <a:solidFill>
-                  <a:srgbClr val="0B0B0B"/>
-                </a:solidFill>
-                <a:latin typeface="Helvetica Neue"/>
-              </a:rPr>
-              <a:t>What the extra stages bought.</a:t>
-            </a:r>
-          </a:p>
-        </p:txBody>
-      </p:sp>
-      <p:sp>
-        <p:nvSpPr>
-          <p:cNvPr id="10" name="TextBox 9"/>
-          <p:cNvSpPr txBox="1"/>
-          <p:nvPr/>
-        </p:nvSpPr>
-        <p:spPr>
-          <a:xfrm>
-            <a:off x="548640" y="3502152"/>
-            <a:ext cx="11064240" cy="1051560"/>
-          </a:xfrm>
-          <a:prstGeom prst="rect">
-            <a:avLst/>
-          </a:prstGeom>
-          <a:noFill/>
-        </p:spPr>
-        <p:txBody>
-          <a:bodyPr wrap="square">
-            <a:spAutoFit/>
-          </a:bodyPr>
-          <a:lstStyle/>
-          <a:p>
-            <a:pPr algn="l">
-              <a:lnSpc>
-                <a:spcPct val="130000"/>
-              </a:lnSpc>
-            </a:pPr>
-            <a:r>
-              <a:rPr sz="1400" b="0" i="0">
-                <a:solidFill>
-                  <a:srgbClr val="52514E"/>
-                </a:solidFill>
-                <a:latin typeface="Helvetica Neue"/>
-              </a:rPr>
-              <a:t>Findings invisible to accuracy alone: an instruction-following failure mistaken for ignorance; a tokenizer handicap mistaken for a comprehension gap; a token price that inverts once accuracy is applied; and serving failures hidden inside a clean score.</a:t>
-            </a:r>
-          </a:p>
-        </p:txBody>
-      </p:sp>
-      <p:sp>
-        <p:nvSpPr>
-          <p:cNvPr id="11" name="TextBox 10"/>
-          <p:cNvSpPr txBox="1"/>
-          <p:nvPr/>
-        </p:nvSpPr>
-        <p:spPr>
-          <a:xfrm>
-            <a:off x="548640" y="4654296"/>
-            <a:ext cx="11064240" cy="384048"/>
-          </a:xfrm>
-          <a:prstGeom prst="rect">
-            <a:avLst/>
-          </a:prstGeom>
-          <a:noFill/>
-        </p:spPr>
-        <p:txBody>
-          <a:bodyPr wrap="square">
-            <a:spAutoFit/>
-          </a:bodyPr>
-          <a:lstStyle/>
-          <a:p>
-            <a:pPr algn="l">
-              <a:lnSpc>
-                <a:spcPct val="115000"/>
-              </a:lnSpc>
-            </a:pPr>
-            <a:r>
-              <a:rPr sz="1700" b="1" i="0">
-                <a:solidFill>
-                  <a:srgbClr val="0B0B0B"/>
-                </a:solidFill>
-                <a:latin typeface="Helvetica Neue"/>
-              </a:rPr>
-              <a:t>The methodological point.</a:t>
-            </a:r>
-          </a:p>
-        </p:txBody>
-      </p:sp>
-      <p:sp>
-        <p:nvSpPr>
-          <p:cNvPr id="12" name="TextBox 11"/>
-          <p:cNvSpPr txBox="1"/>
-          <p:nvPr/>
-        </p:nvSpPr>
-        <p:spPr>
-          <a:xfrm>
-            <a:off x="548640" y="5074920"/>
-            <a:ext cx="11064240" cy="1051560"/>
-          </a:xfrm>
-          <a:prstGeom prst="rect">
-            <a:avLst/>
-          </a:prstGeom>
-          <a:noFill/>
-        </p:spPr>
-        <p:txBody>
-          <a:bodyPr wrap="square">
-            <a:spAutoFit/>
-          </a:bodyPr>
-          <a:lstStyle/>
-          <a:p>
-            <a:pPr algn="l">
-              <a:lnSpc>
-                <a:spcPct val="130000"/>
-              </a:lnSpc>
-            </a:pPr>
-            <a:r>
-              <a:rPr sz="1400" b="0" i="0">
-                <a:solidFill>
-                  <a:srgbClr val="52514E"/>
-                </a:solidFill>
-                <a:latin typeface="Helvetica Neue"/>
-              </a:rPr>
-              <a:t>Configuration and measurement are kept apart — parallelism degrees and decoding settings are inputs recorded in a run manifest, never folded into a score. That is what lets the comparison layer refuse to rank runs that are not comparable, which is the correct output in that case.</a:t>
-            </a:r>
-          </a:p>
-        </p:txBody>
-      </p:sp>
-      <p:cxnSp>
-        <p:nvCxnSpPr>
-          <p:cNvPr id="13" name="Connector 12"/>
-          <p:cNvCxnSpPr/>
-          <p:nvPr/>
-        </p:nvCxnSpPr>
-        <p:spPr>
-          <a:xfrm>
-            <a:off x="548640" y="6172200"/>
-            <a:ext cx="11091672" cy="0"/>
-          </a:xfrm>
-          <a:prstGeom prst="line">
-            <a:avLst/>
-          </a:prstGeom>
-          <a:ln w="9525">
-            <a:solidFill>
-              <a:srgbClr val="E1E0D9"/>
-            </a:solidFill>
-          </a:ln>
-        </p:spPr>
-        <p:style>
-          <a:lnRef idx="2">
-            <a:schemeClr val="accent1"/>
-          </a:lnRef>
-          <a:fillRef idx="0">
-            <a:schemeClr val="accent1"/>
-          </a:fillRef>
-          <a:effectRef idx="1">
-            <a:schemeClr val="accent1"/>
-          </a:effectRef>
-          <a:fontRef idx="minor">
-            <a:schemeClr val="tx1"/>
-          </a:fontRef>
-        </p:style>
-      </p:cxnSp>
-      <p:sp>
-        <p:nvSpPr>
-          <p:cNvPr id="14" name="TextBox 13"/>
-          <p:cNvSpPr txBox="1"/>
-          <p:nvPr/>
-        </p:nvSpPr>
-        <p:spPr>
-          <a:xfrm>
-            <a:off x="548640" y="6309360"/>
-            <a:ext cx="11064240" cy="365760"/>
-          </a:xfrm>
-          <a:prstGeom prst="rect">
-            <a:avLst/>
-          </a:prstGeom>
-          <a:noFill/>
-        </p:spPr>
-        <p:txBody>
-          <a:bodyPr wrap="square">
-            <a:spAutoFit/>
-          </a:bodyPr>
-          <a:lstStyle/>
-          <a:p>
-            <a:pPr algn="l">
-              <a:lnSpc>
-                <a:spcPct val="115000"/>
-              </a:lnSpc>
-            </a:pPr>
-            <a:r>
-              <a:rPr sz="1400" b="1" i="0">
-                <a:solidFill>
-                  <a:srgbClr val="2A78D6"/>
-                </a:solidFill>
-                <a:latin typeface="Helvetica Neue"/>
-              </a:rPr>
-              <a:t>Absence is reported, not filled in — the difference between a benchmark you can cite and one you cannot.</a:t>
-            </a:r>
-          </a:p>
-        </p:txBody>
-      </p:sp>
-    </p:spTree>
-  </p:cSld>
-  <p:clrMapOvr>
-    <a:masterClrMapping/>
-  </p:clrMapOvr>
-</p:sld>
-</file>
-
-<file path=ppt/slides/slide3.xml><?xml version="1.0" encoding="utf-8"?>
-<p:sld xmlns:a="http://schemas.openxmlformats.org/drawingml/2006/main" xmlns:p="http://schemas.openxmlformats.org/presentationml/2006/main" xmlns:r="http://schemas.openxmlformats.org/officeDocument/2006/relationships">
-  <p:cSld>
-    <p:spTree>
-      <p:nvGrpSpPr>
-        <p:cNvPr id="1" name=""/>
-        <p:cNvGrpSpPr/>
-        <p:nvPr/>
-      </p:nvGrpSpPr>
-      <p:grpSpPr/>
-      <p:sp>
-        <p:nvSpPr>
-          <p:cNvPr id="2" name="Rectangle 1"/>
-          <p:cNvSpPr/>
-          <p:nvPr/>
-        </p:nvSpPr>
-        <p:spPr>
-          <a:xfrm>
-            <a:off x="0" y="0"/>
-            <a:ext cx="12191695" cy="6858000"/>
-          </a:xfrm>
-          <a:prstGeom prst="rect">
-            <a:avLst/>
-          </a:prstGeom>
-          <a:solidFill>
-            <a:srgbClr val="FCFCFB"/>
-          </a:solidFill>
-          <a:ln>
-            <a:noFill/>
-          </a:ln>
-          <a:effectLst/>
-        </p:spPr>
-        <p:style>
-          <a:lnRef idx="1">
-            <a:schemeClr val="accent1"/>
-          </a:lnRef>
-          <a:fillRef idx="3">
-            <a:schemeClr val="accent1"/>
-          </a:fillRef>
-          <a:effectRef idx="2">
-            <a:schemeClr val="accent1"/>
-          </a:effectRef>
-          <a:fontRef idx="minor">
-            <a:schemeClr val="lt1"/>
-          </a:fontRef>
-        </p:style>
-        <p:txBody>
-          <a:bodyPr rtlCol="0" anchor="ctr"/>
-          <a:lstStyle/>
-          <a:p>
-            <a:pPr algn="ctr"/>
-          </a:p>
-        </p:txBody>
-      </p:sp>
-      <p:sp>
-        <p:nvSpPr>
-          <p:cNvPr id="3" name="TextBox 2"/>
-          <p:cNvSpPr txBox="1"/>
-          <p:nvPr/>
-        </p:nvSpPr>
-        <p:spPr>
-          <a:xfrm>
-            <a:off x="548640" y="6510528"/>
-            <a:ext cx="5486400" cy="274320"/>
-          </a:xfrm>
-          <a:prstGeom prst="rect">
-            <a:avLst/>
-          </a:prstGeom>
-          <a:noFill/>
-        </p:spPr>
-        <p:txBody>
-          <a:bodyPr wrap="square">
-            <a:spAutoFit/>
-          </a:bodyPr>
-          <a:lstStyle/>
-          <a:p>
-            <a:pPr algn="l">
-              <a:lnSpc>
-                <a:spcPct val="115000"/>
-              </a:lnSpc>
-            </a:pPr>
-            <a:r>
-              <a:rPr sz="900" b="0" i="0">
-                <a:solidFill>
-                  <a:srgbClr val="898781"/>
-                </a:solidFill>
-                <a:latin typeface="Helvetica Neue"/>
-              </a:rPr>
-              <a:t>LAMBADA &amp; MMLU Benchmark Evaluation — Extended</a:t>
-            </a:r>
-          </a:p>
-        </p:txBody>
-      </p:sp>
-      <p:sp>
-        <p:nvSpPr>
-          <p:cNvPr id="4" name="TextBox 3"/>
-          <p:cNvSpPr txBox="1"/>
-          <p:nvPr/>
-        </p:nvSpPr>
-        <p:spPr>
-          <a:xfrm>
-            <a:off x="11338560" y="6510528"/>
-            <a:ext cx="457200" cy="274320"/>
-          </a:xfrm>
-          <a:prstGeom prst="rect">
-            <a:avLst/>
-          </a:prstGeom>
-          <a:noFill/>
-        </p:spPr>
-        <p:txBody>
-          <a:bodyPr wrap="square">
-            <a:spAutoFit/>
-          </a:bodyPr>
-          <a:lstStyle/>
-          <a:p>
-            <a:pPr algn="r">
-              <a:lnSpc>
-                <a:spcPct val="115000"/>
-              </a:lnSpc>
-            </a:pPr>
-            <a:r>
-              <a:rPr sz="900" b="0" i="0">
-                <a:solidFill>
-                  <a:srgbClr val="898781"/>
-                </a:solidFill>
-                <a:latin typeface="Helvetica Neue"/>
-              </a:rPr>
-              <a:t>2</a:t>
-            </a:r>
-          </a:p>
-        </p:txBody>
-      </p:sp>
-      <p:sp>
-        <p:nvSpPr>
-          <p:cNvPr id="5" name="TextBox 4"/>
-          <p:cNvSpPr txBox="1"/>
-          <p:nvPr/>
-        </p:nvSpPr>
-        <p:spPr>
-          <a:xfrm>
-            <a:off x="548640" y="320040"/>
-            <a:ext cx="10058400" cy="320040"/>
-          </a:xfrm>
-          <a:prstGeom prst="rect">
-            <a:avLst/>
-          </a:prstGeom>
-          <a:noFill/>
-        </p:spPr>
-        <p:txBody>
-          <a:bodyPr wrap="square">
-            <a:spAutoFit/>
-          </a:bodyPr>
-          <a:lstStyle/>
-          <a:p>
-            <a:pPr algn="l">
-              <a:lnSpc>
-                <a:spcPct val="115000"/>
-              </a:lnSpc>
-            </a:pPr>
-            <a:r>
-              <a:rPr sz="1250" b="1" i="0">
-                <a:solidFill>
-                  <a:srgbClr val="2A78D6"/>
-                </a:solidFill>
-                <a:latin typeface="Helvetica Neue"/>
-              </a:rPr>
-              <a:t>RESEARCH QUESTION</a:t>
-            </a:r>
-          </a:p>
-        </p:txBody>
-      </p:sp>
-      <p:sp>
-        <p:nvSpPr>
-          <p:cNvPr id="6" name="TextBox 5"/>
-          <p:cNvSpPr txBox="1"/>
-          <p:nvPr/>
-        </p:nvSpPr>
-        <p:spPr>
-          <a:xfrm>
-            <a:off x="548640" y="914400"/>
-            <a:ext cx="11064240" cy="640080"/>
-          </a:xfrm>
-          <a:prstGeom prst="rect">
-            <a:avLst/>
-          </a:prstGeom>
-          <a:noFill/>
-        </p:spPr>
-        <p:txBody>
-          <a:bodyPr wrap="square">
-            <a:spAutoFit/>
-          </a:bodyPr>
-          <a:lstStyle/>
-          <a:p>
-            <a:pPr algn="l">
-              <a:lnSpc>
-                <a:spcPct val="115000"/>
-              </a:lnSpc>
-            </a:pPr>
-            <a:r>
-              <a:rPr sz="2600" b="1" i="0">
-                <a:solidFill>
-                  <a:srgbClr val="0B0B0B"/>
-                </a:solidFill>
-                <a:latin typeface="Helvetica Neue"/>
-              </a:rPr>
-              <a:t>Why accuracy alone cannot answer it</a:t>
+              <a:t>Part of the LAMBADA gap is the tokenizer</a:t>
             </a:r>
           </a:p>
         </p:txBody>
@@ -19817,7 +23570,7 @@
         </p:nvGraphicFramePr>
         <p:xfrm>
           <a:off x="548640" y="1783080"/>
-          <a:ext cx="11064239" cy="3291840"/>
+          <a:ext cx="11064237" cy="1682496"/>
         </p:xfrm>
         <a:graphic>
           <a:graphicData uri="http://schemas.openxmlformats.org/drawingml/2006/table">
@@ -19826,10 +23579,14 @@
                 <a:tableStyleId>{5C22544A-7EE6-4342-B048-85BDC9FD1C3A}</a:tableStyleId>
               </a:tblPr>
               <a:tblGrid>
-                <a:gridCol w="6859828"/>
-                <a:gridCol w="4204411"/>
+                <a:gridCol w="2434132"/>
+                <a:gridCol w="1880920"/>
+                <a:gridCol w="1438351"/>
+                <a:gridCol w="1548993"/>
+                <a:gridCol w="1548993"/>
+                <a:gridCol w="2212848"/>
               </a:tblGrid>
-              <a:tr h="365760">
+              <a:tr h="420624">
                 <a:tc>
                   <a:txBody>
                     <a:bodyPr/>
@@ -19837,13 +23594,13 @@
                     <a:p>
                       <a:pPr algn="l"/>
                       <a:r>
-                        <a:rPr sz="1300" b="1">
+                        <a:rPr sz="1250" b="1">
                           <a:solidFill>
                             <a:srgbClr val="FFFFFF"/>
                           </a:solidFill>
                           <a:latin typeface="Helvetica Neue"/>
                         </a:rPr>
-                        <a:t>A single accuracy number cannot distinguish…</a:t>
+                        <a:t>Model</a:t>
                       </a:r>
                     </a:p>
                   </a:txBody>
@@ -19860,13 +23617,13 @@
                     <a:p>
                       <a:pPr algn="ctr"/>
                       <a:r>
-                        <a:rPr sz="1300" b="1">
+                        <a:rPr sz="1250" b="1">
                           <a:solidFill>
                             <a:srgbClr val="FFFFFF"/>
                           </a:solidFill>
                           <a:latin typeface="Helvetica Neue"/>
                         </a:rPr>
-                        <a:t>Stage that can</a:t>
+                        <a:t>1-token targets</a:t>
                       </a:r>
                     </a:p>
                   </a:txBody>
@@ -19876,8 +23633,100 @@
                     </a:solidFill>
                   </a:tcPr>
                 </a:tc>
+                <a:tc>
+                  <a:txBody>
+                    <a:bodyPr/>
+                    <a:lstStyle/>
+                    <a:p>
+                      <a:pPr algn="ctr"/>
+                      <a:r>
+                        <a:rPr sz="1250" b="1">
+                          <a:solidFill>
+                            <a:srgbClr val="FFFFFF"/>
+                          </a:solidFill>
+                          <a:latin typeface="Helvetica Neue"/>
+                        </a:rPr>
+                        <a:t>2-token</a:t>
+                      </a:r>
+                    </a:p>
+                  </a:txBody>
+                  <a:tcPr marL="73152" marR="73152" marT="27432" marB="27432" anchor="ctr">
+                    <a:solidFill>
+                      <a:srgbClr val="0B0B0B"/>
+                    </a:solidFill>
+                  </a:tcPr>
+                </a:tc>
+                <a:tc>
+                  <a:txBody>
+                    <a:bodyPr/>
+                    <a:lstStyle/>
+                    <a:p>
+                      <a:pPr algn="ctr"/>
+                      <a:r>
+                        <a:rPr sz="1250" b="1">
+                          <a:solidFill>
+                            <a:srgbClr val="FFFFFF"/>
+                          </a:solidFill>
+                          <a:latin typeface="Helvetica Neue"/>
+                        </a:rPr>
+                        <a:t>3+-token</a:t>
+                      </a:r>
+                    </a:p>
+                  </a:txBody>
+                  <a:tcPr marL="73152" marR="73152" marT="27432" marB="27432" anchor="ctr">
+                    <a:solidFill>
+                      <a:srgbClr val="0B0B0B"/>
+                    </a:solidFill>
+                  </a:tcPr>
+                </a:tc>
+                <a:tc>
+                  <a:txBody>
+                    <a:bodyPr/>
+                    <a:lstStyle/>
+                    <a:p>
+                      <a:pPr algn="ctr"/>
+                      <a:r>
+                        <a:rPr sz="1250" b="1">
+                          <a:solidFill>
+                            <a:srgbClr val="FFFFFF"/>
+                          </a:solidFill>
+                          <a:latin typeface="Helvetica Neue"/>
+                        </a:rPr>
+                        <a:t>Collapse</a:t>
+                      </a:r>
+                    </a:p>
+                  </a:txBody>
+                  <a:tcPr marL="73152" marR="73152" marT="27432" marB="27432" anchor="ctr">
+                    <a:solidFill>
+                      <a:srgbClr val="0B0B0B"/>
+                    </a:solidFill>
+                  </a:tcPr>
+                </a:tc>
+                <a:tc>
+                  <a:txBody>
+                    <a:bodyPr/>
+                    <a:lstStyle/>
+                    <a:p>
+                      <a:pPr algn="ctr"/>
+                      <a:r>
+                        <a:rPr sz="1250" b="1">
+                          <a:solidFill>
+                            <a:srgbClr val="FFFFFF"/>
+                          </a:solidFill>
+                          <a:latin typeface="Helvetica Neue"/>
+                        </a:rPr>
+                        <a:t>Tokenizer exact?</a:t>
+                      </a:r>
+                    </a:p>
+                  </a:txBody>
+                  <a:tcPr marL="73152" marR="73152" marT="27432" marB="27432" anchor="ctr">
+                    <a:solidFill>
+                      <a:srgbClr val="0B0B0B"/>
+                    </a:solidFill>
+                  </a:tcPr>
+                </a:tc>
               </a:tr>
-              <a:tr h="365760">
+              <a:tr h="420624">
                 <a:tc>
                   <a:txBody>
                     <a:bodyPr/>
@@ -19885,36 +23734,128 @@
                     <a:p>
                       <a:pPr algn="l"/>
                       <a:r>
-                        <a:rPr sz="1300" b="0">
-                          <a:solidFill>
-                            <a:srgbClr val="0B0B0B"/>
-                          </a:solidFill>
-                          <a:latin typeface="Helvetica Neue"/>
-                        </a:rPr>
-                        <a:t>a wrong answer from an unparseable one</a:t>
-                      </a:r>
-                    </a:p>
-                  </a:txBody>
-                  <a:tcPr marL="73152" marR="73152" marT="27432" marB="27432" anchor="ctr">
-                    <a:solidFill>
-                      <a:srgbClr val="FCFCFB"/>
-                    </a:solidFill>
-                  </a:tcPr>
-                </a:tc>
-                <a:tc>
-                  <a:txBody>
-                    <a:bodyPr/>
-                    <a:lstStyle/>
-                    <a:p>
-                      <a:pPr algn="ctr"/>
-                      <a:r>
-                        <a:rPr sz="1300" b="0">
-                          <a:solidFill>
-                            <a:srgbClr val="0B0B0B"/>
-                          </a:solidFill>
-                          <a:latin typeface="Helvetica Neue"/>
-                        </a:rPr>
-                        <a:t>1 · parse-failure rate</a:t>
+                        <a:rPr sz="1250" b="0">
+                          <a:solidFill>
+                            <a:srgbClr val="0B0B0B"/>
+                          </a:solidFill>
+                          <a:latin typeface="Helvetica Neue"/>
+                        </a:rPr>
+                        <a:t>Gemma-3-4B</a:t>
+                      </a:r>
+                    </a:p>
+                  </a:txBody>
+                  <a:tcPr marL="73152" marR="73152" marT="27432" marB="27432" anchor="ctr">
+                    <a:solidFill>
+                      <a:srgbClr val="FCFCFB"/>
+                    </a:solidFill>
+                  </a:tcPr>
+                </a:tc>
+                <a:tc>
+                  <a:txBody>
+                    <a:bodyPr/>
+                    <a:lstStyle/>
+                    <a:p>
+                      <a:pPr algn="ctr"/>
+                      <a:r>
+                        <a:rPr sz="1250" b="0">
+                          <a:solidFill>
+                            <a:srgbClr val="0B0B0B"/>
+                          </a:solidFill>
+                          <a:latin typeface="Helvetica Neue"/>
+                        </a:rPr>
+                        <a:t>23.6%</a:t>
+                      </a:r>
+                    </a:p>
+                  </a:txBody>
+                  <a:tcPr marL="73152" marR="73152" marT="27432" marB="27432" anchor="ctr">
+                    <a:solidFill>
+                      <a:srgbClr val="FCFCFB"/>
+                    </a:solidFill>
+                  </a:tcPr>
+                </a:tc>
+                <a:tc>
+                  <a:txBody>
+                    <a:bodyPr/>
+                    <a:lstStyle/>
+                    <a:p>
+                      <a:pPr algn="ctr"/>
+                      <a:r>
+                        <a:rPr sz="1250" b="0">
+                          <a:solidFill>
+                            <a:srgbClr val="0B0B0B"/>
+                          </a:solidFill>
+                          <a:latin typeface="Helvetica Neue"/>
+                        </a:rPr>
+                        <a:t>10.6%</a:t>
+                      </a:r>
+                    </a:p>
+                  </a:txBody>
+                  <a:tcPr marL="73152" marR="73152" marT="27432" marB="27432" anchor="ctr">
+                    <a:solidFill>
+                      <a:srgbClr val="FCFCFB"/>
+                    </a:solidFill>
+                  </a:tcPr>
+                </a:tc>
+                <a:tc>
+                  <a:txBody>
+                    <a:bodyPr/>
+                    <a:lstStyle/>
+                    <a:p>
+                      <a:pPr algn="ctr"/>
+                      <a:r>
+                        <a:rPr sz="1250" b="0">
+                          <a:solidFill>
+                            <a:srgbClr val="0B0B0B"/>
+                          </a:solidFill>
+                          <a:latin typeface="Helvetica Neue"/>
+                        </a:rPr>
+                        <a:t>2.6%</a:t>
+                      </a:r>
+                    </a:p>
+                  </a:txBody>
+                  <a:tcPr marL="73152" marR="73152" marT="27432" marB="27432" anchor="ctr">
+                    <a:solidFill>
+                      <a:srgbClr val="FCFCFB"/>
+                    </a:solidFill>
+                  </a:tcPr>
+                </a:tc>
+                <a:tc>
+                  <a:txBody>
+                    <a:bodyPr/>
+                    <a:lstStyle/>
+                    <a:p>
+                      <a:pPr algn="ctr"/>
+                      <a:r>
+                        <a:rPr sz="1250" b="0">
+                          <a:solidFill>
+                            <a:srgbClr val="0B0B0B"/>
+                          </a:solidFill>
+                          <a:latin typeface="Helvetica Neue"/>
+                        </a:rPr>
+                        <a:t>+21.0 pp</a:t>
+                      </a:r>
+                    </a:p>
+                  </a:txBody>
+                  <a:tcPr marL="73152" marR="73152" marT="27432" marB="27432" anchor="ctr">
+                    <a:solidFill>
+                      <a:srgbClr val="FCFCFB"/>
+                    </a:solidFill>
+                  </a:tcPr>
+                </a:tc>
+                <a:tc>
+                  <a:txBody>
+                    <a:bodyPr/>
+                    <a:lstStyle/>
+                    <a:p>
+                      <a:pPr algn="ctr"/>
+                      <a:r>
+                        <a:rPr sz="1250" b="0">
+                          <a:solidFill>
+                            <a:srgbClr val="0B0B0B"/>
+                          </a:solidFill>
+                          <a:latin typeface="Helvetica Neue"/>
+                        </a:rPr>
+                        <a:t>no — fallback</a:t>
                       </a:r>
                     </a:p>
                   </a:txBody>
@@ -19925,7 +23866,7 @@
                   </a:tcPr>
                 </a:tc>
               </a:tr>
-              <a:tr h="365760">
+              <a:tr h="420624">
                 <a:tc>
                   <a:txBody>
                     <a:bodyPr/>
@@ -19933,36 +23874,128 @@
                     <a:p>
                       <a:pPr algn="l"/>
                       <a:r>
-                        <a:rPr sz="1300" b="0">
-                          <a:solidFill>
-                            <a:srgbClr val="0B0B0B"/>
-                          </a:solidFill>
-                          <a:latin typeface="Helvetica Neue"/>
-                        </a:rPr>
-                        <a:t>confident-and-right from confident-and-wrong</a:t>
-                      </a:r>
-                    </a:p>
-                  </a:txBody>
-                  <a:tcPr marL="73152" marR="73152" marT="27432" marB="27432" anchor="ctr">
-                    <a:solidFill>
-                      <a:srgbClr val="FCFCFB"/>
-                    </a:solidFill>
-                  </a:tcPr>
-                </a:tc>
-                <a:tc>
-                  <a:txBody>
-                    <a:bodyPr/>
-                    <a:lstStyle/>
-                    <a:p>
-                      <a:pPr algn="ctr"/>
-                      <a:r>
-                        <a:rPr sz="1300" b="0">
-                          <a:solidFill>
-                            <a:srgbClr val="0B0B0B"/>
-                          </a:solidFill>
-                          <a:latin typeface="Helvetica Neue"/>
-                        </a:rPr>
-                        <a:t>2 · ECE, Brier</a:t>
+                        <a:rPr sz="1250" b="0">
+                          <a:solidFill>
+                            <a:srgbClr val="0B0B0B"/>
+                          </a:solidFill>
+                          <a:latin typeface="Helvetica Neue"/>
+                        </a:rPr>
+                        <a:t>Llama-3.2-3B</a:t>
+                      </a:r>
+                    </a:p>
+                  </a:txBody>
+                  <a:tcPr marL="73152" marR="73152" marT="27432" marB="27432" anchor="ctr">
+                    <a:solidFill>
+                      <a:srgbClr val="FCFCFB"/>
+                    </a:solidFill>
+                  </a:tcPr>
+                </a:tc>
+                <a:tc>
+                  <a:txBody>
+                    <a:bodyPr/>
+                    <a:lstStyle/>
+                    <a:p>
+                      <a:pPr algn="ctr"/>
+                      <a:r>
+                        <a:rPr sz="1250" b="0">
+                          <a:solidFill>
+                            <a:srgbClr val="0B0B0B"/>
+                          </a:solidFill>
+                          <a:latin typeface="Helvetica Neue"/>
+                        </a:rPr>
+                        <a:t>29.5%</a:t>
+                      </a:r>
+                    </a:p>
+                  </a:txBody>
+                  <a:tcPr marL="73152" marR="73152" marT="27432" marB="27432" anchor="ctr">
+                    <a:solidFill>
+                      <a:srgbClr val="FCFCFB"/>
+                    </a:solidFill>
+                  </a:tcPr>
+                </a:tc>
+                <a:tc>
+                  <a:txBody>
+                    <a:bodyPr/>
+                    <a:lstStyle/>
+                    <a:p>
+                      <a:pPr algn="ctr"/>
+                      <a:r>
+                        <a:rPr sz="1250" b="0">
+                          <a:solidFill>
+                            <a:srgbClr val="0B0B0B"/>
+                          </a:solidFill>
+                          <a:latin typeface="Helvetica Neue"/>
+                        </a:rPr>
+                        <a:t>13.4%</a:t>
+                      </a:r>
+                    </a:p>
+                  </a:txBody>
+                  <a:tcPr marL="73152" marR="73152" marT="27432" marB="27432" anchor="ctr">
+                    <a:solidFill>
+                      <a:srgbClr val="FCFCFB"/>
+                    </a:solidFill>
+                  </a:tcPr>
+                </a:tc>
+                <a:tc>
+                  <a:txBody>
+                    <a:bodyPr/>
+                    <a:lstStyle/>
+                    <a:p>
+                      <a:pPr algn="ctr"/>
+                      <a:r>
+                        <a:rPr sz="1250" b="0">
+                          <a:solidFill>
+                            <a:srgbClr val="0B0B0B"/>
+                          </a:solidFill>
+                          <a:latin typeface="Helvetica Neue"/>
+                        </a:rPr>
+                        <a:t>2.6%</a:t>
+                      </a:r>
+                    </a:p>
+                  </a:txBody>
+                  <a:tcPr marL="73152" marR="73152" marT="27432" marB="27432" anchor="ctr">
+                    <a:solidFill>
+                      <a:srgbClr val="FCFCFB"/>
+                    </a:solidFill>
+                  </a:tcPr>
+                </a:tc>
+                <a:tc>
+                  <a:txBody>
+                    <a:bodyPr/>
+                    <a:lstStyle/>
+                    <a:p>
+                      <a:pPr algn="ctr"/>
+                      <a:r>
+                        <a:rPr sz="1250" b="0">
+                          <a:solidFill>
+                            <a:srgbClr val="0B0B0B"/>
+                          </a:solidFill>
+                          <a:latin typeface="Helvetica Neue"/>
+                        </a:rPr>
+                        <a:t>+26.9 pp</a:t>
+                      </a:r>
+                    </a:p>
+                  </a:txBody>
+                  <a:tcPr marL="73152" marR="73152" marT="27432" marB="27432" anchor="ctr">
+                    <a:solidFill>
+                      <a:srgbClr val="FCFCFB"/>
+                    </a:solidFill>
+                  </a:tcPr>
+                </a:tc>
+                <a:tc>
+                  <a:txBody>
+                    <a:bodyPr/>
+                    <a:lstStyle/>
+                    <a:p>
+                      <a:pPr algn="ctr"/>
+                      <a:r>
+                        <a:rPr sz="1250" b="0">
+                          <a:solidFill>
+                            <a:srgbClr val="0B0B0B"/>
+                          </a:solidFill>
+                          <a:latin typeface="Helvetica Neue"/>
+                        </a:rPr>
+                        <a:t>no — fallback</a:t>
                       </a:r>
                     </a:p>
                   </a:txBody>
@@ -19973,7 +24006,7 @@
                   </a:tcPr>
                 </a:tc>
               </a:tr>
-              <a:tr h="365760">
+              <a:tr h="420624">
                 <a:tc>
                   <a:txBody>
                     <a:bodyPr/>
@@ -19981,276 +24014,128 @@
                     <a:p>
                       <a:pPr algn="l"/>
                       <a:r>
-                        <a:rPr sz="1300" b="0">
-                          <a:solidFill>
-                            <a:srgbClr val="0B0B0B"/>
-                          </a:solidFill>
-                          <a:latin typeface="Helvetica Neue"/>
-                        </a:rPr>
-                        <a:t>a stable answer from a lucky one</a:t>
-                      </a:r>
-                    </a:p>
-                  </a:txBody>
-                  <a:tcPr marL="73152" marR="73152" marT="27432" marB="27432" anchor="ctr">
-                    <a:solidFill>
-                      <a:srgbClr val="FCFCFB"/>
-                    </a:solidFill>
-                  </a:tcPr>
-                </a:tc>
-                <a:tc>
-                  <a:txBody>
-                    <a:bodyPr/>
-                    <a:lstStyle/>
-                    <a:p>
-                      <a:pPr algn="ctr"/>
-                      <a:r>
-                        <a:rPr sz="1300" b="0">
-                          <a:solidFill>
-                            <a:srgbClr val="0B0B0B"/>
-                          </a:solidFill>
-                          <a:latin typeface="Helvetica Neue"/>
-                        </a:rPr>
-                        <a:t>3 · answer stability</a:t>
-                      </a:r>
-                    </a:p>
-                  </a:txBody>
-                  <a:tcPr marL="73152" marR="73152" marT="27432" marB="27432" anchor="ctr">
-                    <a:solidFill>
-                      <a:srgbClr val="FCFCFB"/>
-                    </a:solidFill>
-                  </a:tcPr>
-                </a:tc>
-              </a:tr>
-              <a:tr h="365760">
-                <a:tc>
-                  <a:txBody>
-                    <a:bodyPr/>
-                    <a:lstStyle/>
-                    <a:p>
-                      <a:pPr algn="l"/>
-                      <a:r>
-                        <a:rPr sz="1300" b="0">
-                          <a:solidFill>
-                            <a:srgbClr val="0B0B0B"/>
-                          </a:solidFill>
-                          <a:latin typeface="Helvetica Neue"/>
-                        </a:rPr>
-                        <a:t>comprehension from local n-gram matching</a:t>
-                      </a:r>
-                    </a:p>
-                  </a:txBody>
-                  <a:tcPr marL="73152" marR="73152" marT="27432" marB="27432" anchor="ctr">
-                    <a:solidFill>
-                      <a:srgbClr val="FCFCFB"/>
-                    </a:solidFill>
-                  </a:tcPr>
-                </a:tc>
-                <a:tc>
-                  <a:txBody>
-                    <a:bodyPr/>
-                    <a:lstStyle/>
-                    <a:p>
-                      <a:pPr algn="ctr"/>
-                      <a:r>
-                        <a:rPr sz="1300" b="0">
-                          <a:solidFill>
-                            <a:srgbClr val="0B0B0B"/>
-                          </a:solidFill>
-                          <a:latin typeface="Helvetica Neue"/>
-                        </a:rPr>
-                        <a:t>4 · context ablation</a:t>
-                      </a:r>
-                    </a:p>
-                  </a:txBody>
-                  <a:tcPr marL="73152" marR="73152" marT="27432" marB="27432" anchor="ctr">
-                    <a:solidFill>
-                      <a:srgbClr val="FCFCFB"/>
-                    </a:solidFill>
-                  </a:tcPr>
-                </a:tc>
-              </a:tr>
-              <a:tr h="365760">
-                <a:tc>
-                  <a:txBody>
-                    <a:bodyPr/>
-                    <a:lstStyle/>
-                    <a:p>
-                      <a:pPr algn="l"/>
-                      <a:r>
-                        <a:rPr sz="1300" b="0">
-                          <a:solidFill>
-                            <a:srgbClr val="0B0B0B"/>
-                          </a:solidFill>
-                          <a:latin typeface="Helvetica Neue"/>
-                        </a:rPr>
-                        <a:t>a robust score from a fragile one</a:t>
-                      </a:r>
-                    </a:p>
-                  </a:txBody>
-                  <a:tcPr marL="73152" marR="73152" marT="27432" marB="27432" anchor="ctr">
-                    <a:solidFill>
-                      <a:srgbClr val="FCFCFB"/>
-                    </a:solidFill>
-                  </a:tcPr>
-                </a:tc>
-                <a:tc>
-                  <a:txBody>
-                    <a:bodyPr/>
-                    <a:lstStyle/>
-                    <a:p>
-                      <a:pPr algn="ctr"/>
-                      <a:r>
-                        <a:rPr sz="1300" b="0">
-                          <a:solidFill>
-                            <a:srgbClr val="0B0B0B"/>
-                          </a:solidFill>
-                          <a:latin typeface="Helvetica Neue"/>
-                        </a:rPr>
-                        <a:t>5 · perturbation deltas</a:t>
-                      </a:r>
-                    </a:p>
-                  </a:txBody>
-                  <a:tcPr marL="73152" marR="73152" marT="27432" marB="27432" anchor="ctr">
-                    <a:solidFill>
-                      <a:srgbClr val="FCFCFB"/>
-                    </a:solidFill>
-                  </a:tcPr>
-                </a:tc>
-              </a:tr>
-              <a:tr h="365760">
-                <a:tc>
-                  <a:txBody>
-                    <a:bodyPr/>
-                    <a:lstStyle/>
-                    <a:p>
-                      <a:pPr algn="l"/>
-                      <a:r>
-                        <a:rPr sz="1300" b="0">
-                          <a:solidFill>
-                            <a:srgbClr val="0B0B0B"/>
-                          </a:solidFill>
-                          <a:latin typeface="Helvetica Neue"/>
-                        </a:rPr>
-                        <a:t>a fast model from a slow one</a:t>
-                      </a:r>
-                    </a:p>
-                  </a:txBody>
-                  <a:tcPr marL="73152" marR="73152" marT="27432" marB="27432" anchor="ctr">
-                    <a:solidFill>
-                      <a:srgbClr val="FCFCFB"/>
-                    </a:solidFill>
-                  </a:tcPr>
-                </a:tc>
-                <a:tc>
-                  <a:txBody>
-                    <a:bodyPr/>
-                    <a:lstStyle/>
-                    <a:p>
-                      <a:pPr algn="ctr"/>
-                      <a:r>
-                        <a:rPr sz="1300" b="0">
-                          <a:solidFill>
-                            <a:srgbClr val="0B0B0B"/>
-                          </a:solidFill>
-                          <a:latin typeface="Helvetica Neue"/>
-                        </a:rPr>
-                        <a:t>6 · TTFT, TPOT, p95</a:t>
-                      </a:r>
-                    </a:p>
-                  </a:txBody>
-                  <a:tcPr marL="73152" marR="73152" marT="27432" marB="27432" anchor="ctr">
-                    <a:solidFill>
-                      <a:srgbClr val="FCFCFB"/>
-                    </a:solidFill>
-                  </a:tcPr>
-                </a:tc>
-              </a:tr>
-              <a:tr h="365760">
-                <a:tc>
-                  <a:txBody>
-                    <a:bodyPr/>
-                    <a:lstStyle/>
-                    <a:p>
-                      <a:pPr algn="l"/>
-                      <a:r>
-                        <a:rPr sz="1300" b="0">
-                          <a:solidFill>
-                            <a:srgbClr val="0B0B0B"/>
-                          </a:solidFill>
-                          <a:latin typeface="Helvetica Neue"/>
-                        </a:rPr>
-                        <a:t>cheap tokens from cheap correct answers</a:t>
-                      </a:r>
-                    </a:p>
-                  </a:txBody>
-                  <a:tcPr marL="73152" marR="73152" marT="27432" marB="27432" anchor="ctr">
-                    <a:solidFill>
-                      <a:srgbClr val="FCFCFB"/>
-                    </a:solidFill>
-                  </a:tcPr>
-                </a:tc>
-                <a:tc>
-                  <a:txBody>
-                    <a:bodyPr/>
-                    <a:lstStyle/>
-                    <a:p>
-                      <a:pPr algn="ctr"/>
-                      <a:r>
-                        <a:rPr sz="1300" b="0">
-                          <a:solidFill>
-                            <a:srgbClr val="0B0B0B"/>
-                          </a:solidFill>
-                          <a:latin typeface="Helvetica Neue"/>
-                        </a:rPr>
-                        <a:t>7–8 · cost per correct answer</a:t>
-                      </a:r>
-                    </a:p>
-                  </a:txBody>
-                  <a:tcPr marL="73152" marR="73152" marT="27432" marB="27432" anchor="ctr">
-                    <a:solidFill>
-                      <a:srgbClr val="FCFCFB"/>
-                    </a:solidFill>
-                  </a:tcPr>
-                </a:tc>
-              </a:tr>
-              <a:tr h="365760">
-                <a:tc>
-                  <a:txBody>
-                    <a:bodyPr/>
-                    <a:lstStyle/>
-                    <a:p>
-                      <a:pPr algn="l"/>
-                      <a:r>
-                        <a:rPr sz="1300" b="0">
-                          <a:solidFill>
-                            <a:srgbClr val="0B0B0B"/>
-                          </a:solidFill>
-                          <a:latin typeface="Helvetica Neue"/>
-                        </a:rPr>
-                        <a:t>a clean run from one that silently retried</a:t>
-                      </a:r>
-                    </a:p>
-                  </a:txBody>
-                  <a:tcPr marL="73152" marR="73152" marT="27432" marB="27432" anchor="ctr">
-                    <a:solidFill>
-                      <a:srgbClr val="FCFCFB"/>
-                    </a:solidFill>
-                  </a:tcPr>
-                </a:tc>
-                <a:tc>
-                  <a:txBody>
-                    <a:bodyPr/>
-                    <a:lstStyle/>
-                    <a:p>
-                      <a:pPr algn="ctr"/>
-                      <a:r>
-                        <a:rPr sz="1300" b="0">
-                          <a:solidFill>
-                            <a:srgbClr val="0B0B0B"/>
-                          </a:solidFill>
-                          <a:latin typeface="Helvetica Neue"/>
-                        </a:rPr>
-                        <a:t>9 · retries, failover</a:t>
+                        <a:rPr sz="1250" b="0">
+                          <a:solidFill>
+                            <a:srgbClr val="0B0B0B"/>
+                          </a:solidFill>
+                          <a:latin typeface="Helvetica Neue"/>
+                        </a:rPr>
+                        <a:t>Ministral-8B</a:t>
+                      </a:r>
+                    </a:p>
+                  </a:txBody>
+                  <a:tcPr marL="73152" marR="73152" marT="27432" marB="27432" anchor="ctr">
+                    <a:solidFill>
+                      <a:srgbClr val="FCFCFB"/>
+                    </a:solidFill>
+                  </a:tcPr>
+                </a:tc>
+                <a:tc>
+                  <a:txBody>
+                    <a:bodyPr/>
+                    <a:lstStyle/>
+                    <a:p>
+                      <a:pPr algn="ctr"/>
+                      <a:r>
+                        <a:rPr sz="1250" b="0">
+                          <a:solidFill>
+                            <a:srgbClr val="0B0B0B"/>
+                          </a:solidFill>
+                          <a:latin typeface="Helvetica Neue"/>
+                        </a:rPr>
+                        <a:t>44.3%</a:t>
+                      </a:r>
+                    </a:p>
+                  </a:txBody>
+                  <a:tcPr marL="73152" marR="73152" marT="27432" marB="27432" anchor="ctr">
+                    <a:solidFill>
+                      <a:srgbClr val="FCFCFB"/>
+                    </a:solidFill>
+                  </a:tcPr>
+                </a:tc>
+                <a:tc>
+                  <a:txBody>
+                    <a:bodyPr/>
+                    <a:lstStyle/>
+                    <a:p>
+                      <a:pPr algn="ctr"/>
+                      <a:r>
+                        <a:rPr sz="1250" b="0">
+                          <a:solidFill>
+                            <a:srgbClr val="0B0B0B"/>
+                          </a:solidFill>
+                          <a:latin typeface="Helvetica Neue"/>
+                        </a:rPr>
+                        <a:t>34.8%</a:t>
+                      </a:r>
+                    </a:p>
+                  </a:txBody>
+                  <a:tcPr marL="73152" marR="73152" marT="27432" marB="27432" anchor="ctr">
+                    <a:solidFill>
+                      <a:srgbClr val="FCFCFB"/>
+                    </a:solidFill>
+                  </a:tcPr>
+                </a:tc>
+                <a:tc>
+                  <a:txBody>
+                    <a:bodyPr/>
+                    <a:lstStyle/>
+                    <a:p>
+                      <a:pPr algn="ctr"/>
+                      <a:r>
+                        <a:rPr sz="1250" b="0">
+                          <a:solidFill>
+                            <a:srgbClr val="0B0B0B"/>
+                          </a:solidFill>
+                          <a:latin typeface="Helvetica Neue"/>
+                        </a:rPr>
+                        <a:t>34.5%</a:t>
+                      </a:r>
+                    </a:p>
+                  </a:txBody>
+                  <a:tcPr marL="73152" marR="73152" marT="27432" marB="27432" anchor="ctr">
+                    <a:solidFill>
+                      <a:srgbClr val="FCFCFB"/>
+                    </a:solidFill>
+                  </a:tcPr>
+                </a:tc>
+                <a:tc>
+                  <a:txBody>
+                    <a:bodyPr/>
+                    <a:lstStyle/>
+                    <a:p>
+                      <a:pPr algn="ctr"/>
+                      <a:r>
+                        <a:rPr sz="1250" b="0">
+                          <a:solidFill>
+                            <a:srgbClr val="0B0B0B"/>
+                          </a:solidFill>
+                          <a:latin typeface="Helvetica Neue"/>
+                        </a:rPr>
+                        <a:t>+9.8 pp</a:t>
+                      </a:r>
+                    </a:p>
+                  </a:txBody>
+                  <a:tcPr marL="73152" marR="73152" marT="27432" marB="27432" anchor="ctr">
+                    <a:solidFill>
+                      <a:srgbClr val="FCFCFB"/>
+                    </a:solidFill>
+                  </a:tcPr>
+                </a:tc>
+                <a:tc>
+                  <a:txBody>
+                    <a:bodyPr/>
+                    <a:lstStyle/>
+                    <a:p>
+                      <a:pPr algn="ctr"/>
+                      <a:r>
+                        <a:rPr sz="1250" b="0">
+                          <a:solidFill>
+                            <a:srgbClr val="0B0B0B"/>
+                          </a:solidFill>
+                          <a:latin typeface="Helvetica Neue"/>
+                        </a:rPr>
+                        <a:t>yes</a:t>
                       </a:r>
                     </a:p>
                   </a:txBody>
@@ -20273,8 +24158,8 @@
         </p:nvSpPr>
         <p:spPr>
           <a:xfrm>
-            <a:off x="548640" y="5303520"/>
-            <a:ext cx="11064240" cy="411480"/>
+            <a:off x="548640" y="3703320"/>
+            <a:ext cx="11064240" cy="1005840"/>
           </a:xfrm>
           <a:prstGeom prst="rect">
             <a:avLst/>
@@ -20289,17 +24174,78 @@
           <a:p>
             <a:pPr algn="l">
               <a:lnSpc>
-                <a:spcPct val="115000"/>
+                <a:spcPct val="135000"/>
+              </a:lnSpc>
+              <a:spcAft>
+                <a:spcPts val="700"/>
+              </a:spcAft>
+            </a:pPr>
+            <a:r>
+              <a:rPr sz="1350" b="0" i="0">
+                <a:solidFill>
+                  <a:srgbClr val="52514E"/>
+                </a:solidFill>
+                <a:latin typeface="Helvetica Neue"/>
+              </a:rPr>
+              <a:t>—  A multi-token target must be produced correctly several times over — a mechanical handicap, not a comprehension one.</a:t>
+            </a:r>
+          </a:p>
+          <a:p>
+            <a:pPr algn="l">
+              <a:lnSpc>
+                <a:spcPct val="135000"/>
+              </a:lnSpc>
+              <a:spcAft>
+                <a:spcPts val="700"/>
+              </a:spcAft>
+            </a:pPr>
+            <a:r>
+              <a:rPr sz="1350" b="0" i="0">
+                <a:solidFill>
+                  <a:srgbClr val="52514E"/>
+                </a:solidFill>
+                <a:latin typeface="Helvetica Neue"/>
+              </a:rPr>
+              <a:t>—  Comparing raw LAMBADA scores without this split treats a vocabulary difference as a capability difference.</a:t>
+            </a:r>
+          </a:p>
+        </p:txBody>
+      </p:sp>
+      <p:sp>
+        <p:nvSpPr>
+          <p:cNvPr id="10" name="TextBox 9"/>
+          <p:cNvSpPr txBox="1"/>
+          <p:nvPr/>
+        </p:nvSpPr>
+        <p:spPr>
+          <a:xfrm>
+            <a:off x="548640" y="4846320"/>
+            <a:ext cx="11064240" cy="777240"/>
+          </a:xfrm>
+          <a:prstGeom prst="rect">
+            <a:avLst/>
+          </a:prstGeom>
+          <a:noFill/>
+        </p:spPr>
+        <p:txBody>
+          <a:bodyPr wrap="square">
+            <a:spAutoFit/>
+          </a:bodyPr>
+          <a:lstStyle/>
+          <a:p>
+            <a:pPr algn="l">
+              <a:lnSpc>
+                <a:spcPct val="130000"/>
               </a:lnSpc>
             </a:pPr>
             <a:r>
-              <a:rPr sz="1400" b="1" i="0">
+              <a:rPr sz="1250" b="0" i="0">
                 <a:solidFill>
                   <a:srgbClr val="2A78D6"/>
                 </a:solidFill>
                 <a:latin typeface="Helvetica Neue"/>
               </a:rPr>
-              <a:t>Each stage exists because it separates two things that accuracy conflates.</a:t>
+              <a:t>Caveat: Gemma-3-4B, Llama-3.2-3B fell back to a generic BPE vocabulary because their Hugging Face tokenizers are gated. The trend within each model holds; the fragmentation rates are not comparable across models.</a:t>
             </a:r>
           </a:p>
         </p:txBody>
@@ -20312,7 +24258,7 @@
 </p:sld>
 </file>
 
-<file path=ppt/slides/slide30.xml><?xml version="1.0" encoding="utf-8"?>
+<file path=ppt/slides/slide33.xml><?xml version="1.0" encoding="utf-8"?>
 <p:sld xmlns:a="http://schemas.openxmlformats.org/drawingml/2006/main" xmlns:p="http://schemas.openxmlformats.org/presentationml/2006/main" xmlns:r="http://schemas.openxmlformats.org/officeDocument/2006/relationships">
   <p:cSld>
     <p:spTree>
@@ -20439,7 +24385,529 @@
                 </a:solidFill>
                 <a:latin typeface="Helvetica Neue"/>
               </a:rPr>
-              <a:t>29</a:t>
+              <a:t>32</a:t>
+            </a:r>
+          </a:p>
+        </p:txBody>
+      </p:sp>
+      <p:sp>
+        <p:nvSpPr>
+          <p:cNvPr id="5" name="TextBox 4"/>
+          <p:cNvSpPr txBox="1"/>
+          <p:nvPr/>
+        </p:nvSpPr>
+        <p:spPr>
+          <a:xfrm>
+            <a:off x="548640" y="502920"/>
+            <a:ext cx="11064240" cy="640080"/>
+          </a:xfrm>
+          <a:prstGeom prst="rect">
+            <a:avLst/>
+          </a:prstGeom>
+          <a:noFill/>
+        </p:spPr>
+        <p:txBody>
+          <a:bodyPr wrap="square">
+            <a:spAutoFit/>
+          </a:bodyPr>
+          <a:lstStyle/>
+          <a:p>
+            <a:pPr algn="l">
+              <a:lnSpc>
+                <a:spcPct val="115000"/>
+              </a:lnSpc>
+            </a:pPr>
+            <a:r>
+              <a:rPr sz="3000" b="1" i="0">
+                <a:solidFill>
+                  <a:srgbClr val="0B0B0B"/>
+                </a:solidFill>
+                <a:latin typeface="Helvetica Neue"/>
+              </a:rPr>
+              <a:t>Conclusions</a:t>
+            </a:r>
+          </a:p>
+        </p:txBody>
+      </p:sp>
+      <p:cxnSp>
+        <p:nvCxnSpPr>
+          <p:cNvPr id="6" name="Connector 5"/>
+          <p:cNvCxnSpPr/>
+          <p:nvPr/>
+        </p:nvCxnSpPr>
+        <p:spPr>
+          <a:xfrm>
+            <a:off x="548640" y="1188720"/>
+            <a:ext cx="11091672" cy="0"/>
+          </a:xfrm>
+          <a:prstGeom prst="line">
+            <a:avLst/>
+          </a:prstGeom>
+          <a:ln w="9525">
+            <a:solidFill>
+              <a:srgbClr val="E1E0D9"/>
+            </a:solidFill>
+          </a:ln>
+        </p:spPr>
+        <p:style>
+          <a:lnRef idx="2">
+            <a:schemeClr val="accent1"/>
+          </a:lnRef>
+          <a:fillRef idx="0">
+            <a:schemeClr val="accent1"/>
+          </a:fillRef>
+          <a:effectRef idx="1">
+            <a:schemeClr val="accent1"/>
+          </a:effectRef>
+          <a:fontRef idx="minor">
+            <a:schemeClr val="tx1"/>
+          </a:fontRef>
+        </p:style>
+      </p:cxnSp>
+      <p:sp>
+        <p:nvSpPr>
+          <p:cNvPr id="7" name="TextBox 6"/>
+          <p:cNvSpPr txBox="1"/>
+          <p:nvPr/>
+        </p:nvSpPr>
+        <p:spPr>
+          <a:xfrm>
+            <a:off x="548640" y="1508760"/>
+            <a:ext cx="11064240" cy="384048"/>
+          </a:xfrm>
+          <a:prstGeom prst="rect">
+            <a:avLst/>
+          </a:prstGeom>
+          <a:noFill/>
+        </p:spPr>
+        <p:txBody>
+          <a:bodyPr wrap="square">
+            <a:spAutoFit/>
+          </a:bodyPr>
+          <a:lstStyle/>
+          <a:p>
+            <a:pPr algn="l">
+              <a:lnSpc>
+                <a:spcPct val="115000"/>
+              </a:lnSpc>
+            </a:pPr>
+            <a:r>
+              <a:rPr sz="1700" b="1" i="0">
+                <a:solidFill>
+                  <a:srgbClr val="0B0B0B"/>
+                </a:solidFill>
+                <a:latin typeface="Helvetica Neue"/>
+              </a:rPr>
+              <a:t>Does a larger, non-distilled model beat smaller compressed ones?</a:t>
+            </a:r>
+          </a:p>
+        </p:txBody>
+      </p:sp>
+      <p:sp>
+        <p:nvSpPr>
+          <p:cNvPr id="8" name="TextBox 7"/>
+          <p:cNvSpPr txBox="1"/>
+          <p:nvPr/>
+        </p:nvSpPr>
+        <p:spPr>
+          <a:xfrm>
+            <a:off x="548640" y="1929384"/>
+            <a:ext cx="11064240" cy="1051560"/>
+          </a:xfrm>
+          <a:prstGeom prst="rect">
+            <a:avLst/>
+          </a:prstGeom>
+          <a:noFill/>
+        </p:spPr>
+        <p:txBody>
+          <a:bodyPr wrap="square">
+            <a:spAutoFit/>
+          </a:bodyPr>
+          <a:lstStyle/>
+          <a:p>
+            <a:pPr algn="l">
+              <a:lnSpc>
+                <a:spcPct val="130000"/>
+              </a:lnSpc>
+            </a:pPr>
+            <a:r>
+              <a:rPr sz="1400" b="0" i="0">
+                <a:solidFill>
+                  <a:srgbClr val="52514E"/>
+                </a:solidFill>
+                <a:latin typeface="Helvetica Neue"/>
+              </a:rPr>
+              <a:t>On task quality, consistently — Ministral-8B leads both benchmarks. But the nine-stage view shows the answer is not one-dimensional: the smaller models win on latency and, on MMLU, on cost per correct answer, and second place changes hands depending on whether reliability is counted.</a:t>
+            </a:r>
+          </a:p>
+        </p:txBody>
+      </p:sp>
+      <p:sp>
+        <p:nvSpPr>
+          <p:cNvPr id="9" name="TextBox 8"/>
+          <p:cNvSpPr txBox="1"/>
+          <p:nvPr/>
+        </p:nvSpPr>
+        <p:spPr>
+          <a:xfrm>
+            <a:off x="548640" y="3081528"/>
+            <a:ext cx="11064240" cy="384048"/>
+          </a:xfrm>
+          <a:prstGeom prst="rect">
+            <a:avLst/>
+          </a:prstGeom>
+          <a:noFill/>
+        </p:spPr>
+        <p:txBody>
+          <a:bodyPr wrap="square">
+            <a:spAutoFit/>
+          </a:bodyPr>
+          <a:lstStyle/>
+          <a:p>
+            <a:pPr algn="l">
+              <a:lnSpc>
+                <a:spcPct val="115000"/>
+              </a:lnSpc>
+            </a:pPr>
+            <a:r>
+              <a:rPr sz="1700" b="1" i="0">
+                <a:solidFill>
+                  <a:srgbClr val="0B0B0B"/>
+                </a:solidFill>
+                <a:latin typeface="Helvetica Neue"/>
+              </a:rPr>
+              <a:t>What the extra stages bought.</a:t>
+            </a:r>
+          </a:p>
+        </p:txBody>
+      </p:sp>
+      <p:sp>
+        <p:nvSpPr>
+          <p:cNvPr id="10" name="TextBox 9"/>
+          <p:cNvSpPr txBox="1"/>
+          <p:nvPr/>
+        </p:nvSpPr>
+        <p:spPr>
+          <a:xfrm>
+            <a:off x="548640" y="3502152"/>
+            <a:ext cx="11064240" cy="1051560"/>
+          </a:xfrm>
+          <a:prstGeom prst="rect">
+            <a:avLst/>
+          </a:prstGeom>
+          <a:noFill/>
+        </p:spPr>
+        <p:txBody>
+          <a:bodyPr wrap="square">
+            <a:spAutoFit/>
+          </a:bodyPr>
+          <a:lstStyle/>
+          <a:p>
+            <a:pPr algn="l">
+              <a:lnSpc>
+                <a:spcPct val="130000"/>
+              </a:lnSpc>
+            </a:pPr>
+            <a:r>
+              <a:rPr sz="1400" b="0" i="0">
+                <a:solidFill>
+                  <a:srgbClr val="52514E"/>
+                </a:solidFill>
+                <a:latin typeface="Helvetica Neue"/>
+              </a:rPr>
+              <a:t>Findings invisible to accuracy alone: an instruction-following failure mistaken for ignorance; a tokenizer handicap mistaken for a comprehension gap; a token price that inverts once accuracy is applied; and serving failures hidden inside a clean score.</a:t>
+            </a:r>
+          </a:p>
+        </p:txBody>
+      </p:sp>
+      <p:sp>
+        <p:nvSpPr>
+          <p:cNvPr id="11" name="TextBox 10"/>
+          <p:cNvSpPr txBox="1"/>
+          <p:nvPr/>
+        </p:nvSpPr>
+        <p:spPr>
+          <a:xfrm>
+            <a:off x="548640" y="4654296"/>
+            <a:ext cx="11064240" cy="384048"/>
+          </a:xfrm>
+          <a:prstGeom prst="rect">
+            <a:avLst/>
+          </a:prstGeom>
+          <a:noFill/>
+        </p:spPr>
+        <p:txBody>
+          <a:bodyPr wrap="square">
+            <a:spAutoFit/>
+          </a:bodyPr>
+          <a:lstStyle/>
+          <a:p>
+            <a:pPr algn="l">
+              <a:lnSpc>
+                <a:spcPct val="115000"/>
+              </a:lnSpc>
+            </a:pPr>
+            <a:r>
+              <a:rPr sz="1700" b="1" i="0">
+                <a:solidFill>
+                  <a:srgbClr val="0B0B0B"/>
+                </a:solidFill>
+                <a:latin typeface="Helvetica Neue"/>
+              </a:rPr>
+              <a:t>The methodological point.</a:t>
+            </a:r>
+          </a:p>
+        </p:txBody>
+      </p:sp>
+      <p:sp>
+        <p:nvSpPr>
+          <p:cNvPr id="12" name="TextBox 11"/>
+          <p:cNvSpPr txBox="1"/>
+          <p:nvPr/>
+        </p:nvSpPr>
+        <p:spPr>
+          <a:xfrm>
+            <a:off x="548640" y="5074920"/>
+            <a:ext cx="11064240" cy="1051560"/>
+          </a:xfrm>
+          <a:prstGeom prst="rect">
+            <a:avLst/>
+          </a:prstGeom>
+          <a:noFill/>
+        </p:spPr>
+        <p:txBody>
+          <a:bodyPr wrap="square">
+            <a:spAutoFit/>
+          </a:bodyPr>
+          <a:lstStyle/>
+          <a:p>
+            <a:pPr algn="l">
+              <a:lnSpc>
+                <a:spcPct val="130000"/>
+              </a:lnSpc>
+            </a:pPr>
+            <a:r>
+              <a:rPr sz="1400" b="0" i="0">
+                <a:solidFill>
+                  <a:srgbClr val="52514E"/>
+                </a:solidFill>
+                <a:latin typeface="Helvetica Neue"/>
+              </a:rPr>
+              <a:t>Configuration and measurement are kept apart — parallelism degrees and decoding settings are inputs recorded in a run manifest, never folded into a score. That is what lets the comparison layer refuse to rank runs that are not comparable, which is the correct output in that case.</a:t>
+            </a:r>
+          </a:p>
+        </p:txBody>
+      </p:sp>
+      <p:cxnSp>
+        <p:nvCxnSpPr>
+          <p:cNvPr id="13" name="Connector 12"/>
+          <p:cNvCxnSpPr/>
+          <p:nvPr/>
+        </p:nvCxnSpPr>
+        <p:spPr>
+          <a:xfrm>
+            <a:off x="548640" y="6172200"/>
+            <a:ext cx="11091672" cy="0"/>
+          </a:xfrm>
+          <a:prstGeom prst="line">
+            <a:avLst/>
+          </a:prstGeom>
+          <a:ln w="9525">
+            <a:solidFill>
+              <a:srgbClr val="E1E0D9"/>
+            </a:solidFill>
+          </a:ln>
+        </p:spPr>
+        <p:style>
+          <a:lnRef idx="2">
+            <a:schemeClr val="accent1"/>
+          </a:lnRef>
+          <a:fillRef idx="0">
+            <a:schemeClr val="accent1"/>
+          </a:fillRef>
+          <a:effectRef idx="1">
+            <a:schemeClr val="accent1"/>
+          </a:effectRef>
+          <a:fontRef idx="minor">
+            <a:schemeClr val="tx1"/>
+          </a:fontRef>
+        </p:style>
+      </p:cxnSp>
+      <p:sp>
+        <p:nvSpPr>
+          <p:cNvPr id="14" name="TextBox 13"/>
+          <p:cNvSpPr txBox="1"/>
+          <p:nvPr/>
+        </p:nvSpPr>
+        <p:spPr>
+          <a:xfrm>
+            <a:off x="548640" y="6309360"/>
+            <a:ext cx="11064240" cy="365760"/>
+          </a:xfrm>
+          <a:prstGeom prst="rect">
+            <a:avLst/>
+          </a:prstGeom>
+          <a:noFill/>
+        </p:spPr>
+        <p:txBody>
+          <a:bodyPr wrap="square">
+            <a:spAutoFit/>
+          </a:bodyPr>
+          <a:lstStyle/>
+          <a:p>
+            <a:pPr algn="l">
+              <a:lnSpc>
+                <a:spcPct val="115000"/>
+              </a:lnSpc>
+            </a:pPr>
+            <a:r>
+              <a:rPr sz="1400" b="1" i="0">
+                <a:solidFill>
+                  <a:srgbClr val="2A78D6"/>
+                </a:solidFill>
+                <a:latin typeface="Helvetica Neue"/>
+              </a:rPr>
+              <a:t>Absence is reported, not filled in — the difference between a benchmark you can cite and one you cannot.</a:t>
+            </a:r>
+          </a:p>
+        </p:txBody>
+      </p:sp>
+    </p:spTree>
+  </p:cSld>
+  <p:clrMapOvr>
+    <a:masterClrMapping/>
+  </p:clrMapOvr>
+</p:sld>
+</file>
+
+<file path=ppt/slides/slide34.xml><?xml version="1.0" encoding="utf-8"?>
+<p:sld xmlns:a="http://schemas.openxmlformats.org/drawingml/2006/main" xmlns:p="http://schemas.openxmlformats.org/presentationml/2006/main" xmlns:r="http://schemas.openxmlformats.org/officeDocument/2006/relationships">
+  <p:cSld>
+    <p:spTree>
+      <p:nvGrpSpPr>
+        <p:cNvPr id="1" name=""/>
+        <p:cNvGrpSpPr/>
+        <p:nvPr/>
+      </p:nvGrpSpPr>
+      <p:grpSpPr/>
+      <p:sp>
+        <p:nvSpPr>
+          <p:cNvPr id="2" name="Rectangle 1"/>
+          <p:cNvSpPr/>
+          <p:nvPr/>
+        </p:nvSpPr>
+        <p:spPr>
+          <a:xfrm>
+            <a:off x="0" y="0"/>
+            <a:ext cx="12191695" cy="6858000"/>
+          </a:xfrm>
+          <a:prstGeom prst="rect">
+            <a:avLst/>
+          </a:prstGeom>
+          <a:solidFill>
+            <a:srgbClr val="FCFCFB"/>
+          </a:solidFill>
+          <a:ln>
+            <a:noFill/>
+          </a:ln>
+          <a:effectLst/>
+        </p:spPr>
+        <p:style>
+          <a:lnRef idx="1">
+            <a:schemeClr val="accent1"/>
+          </a:lnRef>
+          <a:fillRef idx="3">
+            <a:schemeClr val="accent1"/>
+          </a:fillRef>
+          <a:effectRef idx="2">
+            <a:schemeClr val="accent1"/>
+          </a:effectRef>
+          <a:fontRef idx="minor">
+            <a:schemeClr val="lt1"/>
+          </a:fontRef>
+        </p:style>
+        <p:txBody>
+          <a:bodyPr rtlCol="0" anchor="ctr"/>
+          <a:lstStyle/>
+          <a:p>
+            <a:pPr algn="ctr"/>
+          </a:p>
+        </p:txBody>
+      </p:sp>
+      <p:sp>
+        <p:nvSpPr>
+          <p:cNvPr id="3" name="TextBox 2"/>
+          <p:cNvSpPr txBox="1"/>
+          <p:nvPr/>
+        </p:nvSpPr>
+        <p:spPr>
+          <a:xfrm>
+            <a:off x="548640" y="6510528"/>
+            <a:ext cx="5486400" cy="274320"/>
+          </a:xfrm>
+          <a:prstGeom prst="rect">
+            <a:avLst/>
+          </a:prstGeom>
+          <a:noFill/>
+        </p:spPr>
+        <p:txBody>
+          <a:bodyPr wrap="square">
+            <a:spAutoFit/>
+          </a:bodyPr>
+          <a:lstStyle/>
+          <a:p>
+            <a:pPr algn="l">
+              <a:lnSpc>
+                <a:spcPct val="115000"/>
+              </a:lnSpc>
+            </a:pPr>
+            <a:r>
+              <a:rPr sz="900" b="0" i="0">
+                <a:solidFill>
+                  <a:srgbClr val="898781"/>
+                </a:solidFill>
+                <a:latin typeface="Helvetica Neue"/>
+              </a:rPr>
+              <a:t>LAMBADA &amp; MMLU Benchmark Evaluation — Extended</a:t>
+            </a:r>
+          </a:p>
+        </p:txBody>
+      </p:sp>
+      <p:sp>
+        <p:nvSpPr>
+          <p:cNvPr id="4" name="TextBox 3"/>
+          <p:cNvSpPr txBox="1"/>
+          <p:nvPr/>
+        </p:nvSpPr>
+        <p:spPr>
+          <a:xfrm>
+            <a:off x="11338560" y="6510528"/>
+            <a:ext cx="457200" cy="274320"/>
+          </a:xfrm>
+          <a:prstGeom prst="rect">
+            <a:avLst/>
+          </a:prstGeom>
+          <a:noFill/>
+        </p:spPr>
+        <p:txBody>
+          <a:bodyPr wrap="square">
+            <a:spAutoFit/>
+          </a:bodyPr>
+          <a:lstStyle/>
+          <a:p>
+            <a:pPr algn="r">
+              <a:lnSpc>
+                <a:spcPct val="115000"/>
+              </a:lnSpc>
+            </a:pPr>
+            <a:r>
+              <a:rPr sz="900" b="0" i="0">
+                <a:solidFill>
+                  <a:srgbClr val="898781"/>
+                </a:solidFill>
+                <a:latin typeface="Helvetica Neue"/>
+              </a:rPr>
+              <a:t>33</a:t>
             </a:r>
           </a:p>
         </p:txBody>
